--- a/decks/Cursor_x_Figma_Discovery_20min.pptx
+++ b/decks/Cursor_x_Figma_Discovery_20min.pptx
@@ -21,6 +21,7 @@
     <p:sldId id="269" r:id="rId20"/>
     <p:sldId id="270" r:id="rId21"/>
     <p:sldId id="271" r:id="rId22"/>
+    <p:sldId id="272" r:id="rId23"/>
   </p:sldIdLst>
   <p:sldSz cx="12191695" cy="6858000" type="screen4x3"/>
   <p:notesSz cx="6858000" cy="9144000"/>
@@ -3263,7 +3264,7 @@
               </a:lnSpc>
             </a:pPr>
             <a:r>
-              <a:rPr sz="1200" b="1" spc="20">
+              <a:rPr sz="1200" b="1" i="0" spc="20">
                 <a:solidFill>
                   <a:srgbClr val="F5F5F5"/>
                 </a:solidFill>
@@ -3302,7 +3303,7 @@
               </a:lnSpc>
             </a:pPr>
             <a:r>
-              <a:rPr sz="1100" b="0" spc="400">
+              <a:rPr sz="1100" b="0" i="0" spc="400">
                 <a:solidFill>
                   <a:srgbClr val="6B6B6B"/>
                 </a:solidFill>
@@ -3341,7 +3342,7 @@
               </a:lnSpc>
             </a:pPr>
             <a:r>
-              <a:rPr sz="5400" b="1">
+              <a:rPr sz="5400" b="1" i="0">
                 <a:solidFill>
                   <a:srgbClr val="F5F5F5"/>
                 </a:solidFill>
@@ -3357,7 +3358,7 @@
               </a:lnSpc>
             </a:pPr>
             <a:r>
-              <a:rPr sz="5400" b="1">
+              <a:rPr sz="5400" b="1" i="0">
                 <a:solidFill>
                   <a:srgbClr val="F5F5F5"/>
                 </a:solidFill>
@@ -3377,7 +3378,7 @@
         <p:spPr>
           <a:xfrm>
             <a:off x="502920" y="4663440"/>
-            <a:ext cx="6858000" cy="914400"/>
+            <a:ext cx="6858000" cy="1188720"/>
           </a:xfrm>
           <a:prstGeom prst="rect">
             <a:avLst/>
@@ -3396,13 +3397,13 @@
               </a:lnSpc>
             </a:pPr>
             <a:r>
-              <a:rPr sz="1600" b="0">
+              <a:rPr sz="1500" b="0" i="1">
                 <a:solidFill>
                   <a:srgbClr val="A0A0A0"/>
                 </a:solidFill>
                 <a:latin typeface="Inter"/>
               </a:rPr>
-              <a:t>Plan de l'appel, questions de découverte,</a:t>
+              <a:t>Cursor wins on workflow, context, and execution.</a:t>
             </a:r>
           </a:p>
           <a:p>
@@ -3412,13 +3413,13 @@
               </a:lnSpc>
             </a:pPr>
             <a:r>
-              <a:rPr sz="1600" b="0">
+              <a:rPr sz="1500" b="0" i="1">
                 <a:solidFill>
                   <a:srgbClr val="A0A0A0"/>
                 </a:solidFill>
                 <a:latin typeface="Inter"/>
               </a:rPr>
-              <a:t>thèse Why Now / Why Change / Why Cursor.</a:t>
+              <a:t>~70 % des Fortune 1000 l'utilisent déjà.</a:t>
             </a:r>
           </a:p>
         </p:txBody>
@@ -3451,7 +3452,7 @@
               </a:lnSpc>
             </a:pPr>
             <a:r>
-              <a:rPr sz="1000" b="0" spc="300">
+              <a:rPr sz="1000" b="0" i="0" spc="300">
                 <a:solidFill>
                   <a:srgbClr val="6B6B6B"/>
                 </a:solidFill>
@@ -3490,12 +3491,28 @@
               </a:lnSpc>
             </a:pPr>
             <a:r>
-              <a:rPr sz="1400" b="0">
+              <a:rPr sz="1400" b="0" i="0">
                 <a:solidFill>
                   <a:srgbClr val="F5F5F5"/>
                 </a:solidFill>
                 <a:latin typeface="Inter"/>
               </a:rPr>
+              <a:t>→  Lead with discovery, not pitch</a:t>
+            </a:r>
+          </a:p>
+          <a:p>
+            <a:pPr algn="l">
+              <a:lnSpc>
+                <a:spcPct val="170000"/>
+              </a:lnSpc>
+            </a:pPr>
+            <a:r>
+              <a:rPr sz="1400" b="0" i="0">
+                <a:solidFill>
+                  <a:srgbClr val="F5F5F5"/>
+                </a:solidFill>
+                <a:latin typeface="Inter"/>
+              </a:rPr>
               <a:t>→  Earn a technical deep dive</a:t>
             </a:r>
           </a:p>
@@ -3506,29 +3523,13 @@
               </a:lnSpc>
             </a:pPr>
             <a:r>
-              <a:rPr sz="1400" b="0">
+              <a:rPr sz="1400" b="0" i="0">
                 <a:solidFill>
                   <a:srgbClr val="F5F5F5"/>
                 </a:solidFill>
                 <a:latin typeface="Inter"/>
               </a:rPr>
               <a:t>→  Earn a security review</a:t>
-            </a:r>
-          </a:p>
-          <a:p>
-            <a:pPr algn="l">
-              <a:lnSpc>
-                <a:spcPct val="170000"/>
-              </a:lnSpc>
-            </a:pPr>
-            <a:r>
-              <a:rPr sz="1400" b="0">
-                <a:solidFill>
-                  <a:srgbClr val="F5F5F5"/>
-                </a:solidFill>
-                <a:latin typeface="Inter"/>
-              </a:rPr>
-              <a:t>→  Ne pas pitcher — qualifier</a:t>
             </a:r>
           </a:p>
         </p:txBody>
@@ -3561,13 +3562,13 @@
               </a:lnSpc>
             </a:pPr>
             <a:r>
-              <a:rPr sz="1000" b="0" spc="300">
+              <a:rPr sz="1000" b="0" i="0" spc="300">
                 <a:solidFill>
                   <a:srgbClr val="6B6B6B"/>
                 </a:solidFill>
                 <a:latin typeface="Inter"/>
               </a:rPr>
-              <a:t>DATE</a:t>
+              <a:t>POSTURE</a:t>
             </a:r>
           </a:p>
         </p:txBody>
@@ -3581,32 +3582,48 @@
         <p:spPr>
           <a:xfrm>
             <a:off x="7863840" y="5257800"/>
-            <a:ext cx="3657600" cy="365760"/>
-          </a:xfrm>
-          <a:prstGeom prst="rect">
-            <a:avLst/>
-          </a:prstGeom>
-          <a:noFill/>
-        </p:spPr>
-        <p:txBody>
-          <a:bodyPr wrap="square" lIns="0" rIns="0" tIns="0" bIns="0" anchor="t">
-            <a:spAutoFit/>
-          </a:bodyPr>
-          <a:lstStyle/>
-          <a:p>
-            <a:pPr algn="l">
-              <a:lnSpc>
-                <a:spcPct val="115000"/>
-              </a:lnSpc>
-            </a:pPr>
-            <a:r>
-              <a:rPr sz="1400" b="0">
+            <a:ext cx="4114800" cy="822960"/>
+          </a:xfrm>
+          <a:prstGeom prst="rect">
+            <a:avLst/>
+          </a:prstGeom>
+          <a:noFill/>
+        </p:spPr>
+        <p:txBody>
+          <a:bodyPr wrap="square" lIns="0" rIns="0" tIns="0" bIns="0" anchor="t">
+            <a:spAutoFit/>
+          </a:bodyPr>
+          <a:lstStyle/>
+          <a:p>
+            <a:pPr algn="l">
+              <a:lnSpc>
+                <a:spcPct val="140000"/>
+              </a:lnSpc>
+            </a:pPr>
+            <a:r>
+              <a:rPr sz="1300" b="0" i="0">
                 <a:solidFill>
                   <a:srgbClr val="F5F5F5"/>
                 </a:solidFill>
                 <a:latin typeface="Inter"/>
               </a:rPr>
-              <a:t>—</a:t>
+              <a:t>Opinionated, not scripted.</a:t>
+            </a:r>
+          </a:p>
+          <a:p>
+            <a:pPr algn="l">
+              <a:lnSpc>
+                <a:spcPct val="140000"/>
+              </a:lnSpc>
+            </a:pPr>
+            <a:r>
+              <a:rPr sz="1300" b="0" i="0">
+                <a:solidFill>
+                  <a:srgbClr val="F5F5F5"/>
+                </a:solidFill>
+                <a:latin typeface="Inter"/>
+              </a:rPr>
+              <a:t>Ground claims, no AI hype.</a:t>
             </a:r>
           </a:p>
         </p:txBody>
@@ -3639,7 +3656,7 @@
               </a:lnSpc>
             </a:pPr>
             <a:r>
-              <a:rPr sz="900" b="0" spc="80">
+              <a:rPr sz="900" b="0" i="0" spc="80">
                 <a:solidFill>
                   <a:srgbClr val="6B6B6B"/>
                 </a:solidFill>
@@ -3678,13 +3695,13 @@
               </a:lnSpc>
             </a:pPr>
             <a:r>
-              <a:rPr sz="900" b="0">
+              <a:rPr sz="900" b="0" i="0">
                 <a:solidFill>
                   <a:srgbClr val="6B6B6B"/>
                 </a:solidFill>
                 <a:latin typeface="JetBrains Mono"/>
               </a:rPr>
-              <a:t>01 / 16</a:t>
+              <a:t>01 / 17</a:t>
             </a:r>
           </a:p>
         </p:txBody>
@@ -3779,7 +3796,7 @@
               </a:lnSpc>
             </a:pPr>
             <a:r>
-              <a:rPr sz="1100" b="1" spc="20">
+              <a:rPr sz="1100" b="1" i="0" spc="20">
                 <a:solidFill>
                   <a:srgbClr val="F5F5F5"/>
                 </a:solidFill>
@@ -3818,7 +3835,7 @@
               </a:lnSpc>
             </a:pPr>
             <a:r>
-              <a:rPr sz="900" b="0" spc="200">
+              <a:rPr sz="900" b="0" i="0" spc="200">
                 <a:solidFill>
                   <a:srgbClr val="6B6B6B"/>
                 </a:solidFill>
@@ -3857,7 +3874,7 @@
               </a:lnSpc>
             </a:pPr>
             <a:r>
-              <a:rPr sz="900" b="0" spc="80">
+              <a:rPr sz="900" b="0" i="0" spc="80">
                 <a:solidFill>
                   <a:srgbClr val="6B6B6B"/>
                 </a:solidFill>
@@ -3896,13 +3913,13 @@
               </a:lnSpc>
             </a:pPr>
             <a:r>
-              <a:rPr sz="900" b="0" spc="50">
+              <a:rPr sz="900" b="0" i="0" spc="50">
                 <a:solidFill>
                   <a:srgbClr val="6B6B6B"/>
                 </a:solidFill>
                 <a:latin typeface="JetBrains Mono"/>
               </a:rPr>
-              <a:t>10 / 16</a:t>
+              <a:t>10 / 17</a:t>
             </a:r>
           </a:p>
         </p:txBody>
@@ -3979,13 +3996,13 @@
               </a:lnSpc>
             </a:pPr>
             <a:r>
-              <a:rPr sz="1000" b="0" spc="300">
+              <a:rPr sz="1000" b="0" i="0" spc="300">
                 <a:solidFill>
                   <a:srgbClr val="6B6B6B"/>
                 </a:solidFill>
                 <a:latin typeface="Inter"/>
               </a:rPr>
-              <a:t>TROIS CLAIMS TRANCHANTS</a:t>
+              <a:t>LES 4 DIFFÉRENCIATEURS</a:t>
             </a:r>
           </a:p>
         </p:txBody>
@@ -4018,7 +4035,7 @@
               </a:lnSpc>
             </a:pPr>
             <a:r>
-              <a:rPr sz="3600" b="1">
+              <a:rPr sz="3600" b="1" i="0">
                 <a:solidFill>
                   <a:srgbClr val="F5F5F5"/>
                 </a:solidFill>
@@ -4038,7 +4055,7 @@
         <p:spPr>
           <a:xfrm>
             <a:off x="502920" y="2606040"/>
-            <a:ext cx="10972800" cy="548640"/>
+            <a:ext cx="10972800" cy="640080"/>
           </a:xfrm>
           <a:prstGeom prst="rect">
             <a:avLst/>
@@ -4057,13 +4074,13 @@
               </a:lnSpc>
             </a:pPr>
             <a:r>
-              <a:rPr sz="1500" b="0">
+              <a:rPr sz="1500" b="0" i="0">
                 <a:solidFill>
                   <a:srgbClr val="A0A0A0"/>
                 </a:solidFill>
                 <a:latin typeface="Inter"/>
               </a:rPr>
-              <a:t>Pas de feature dump. Trois affirmations, défendables sous le feu.</a:t>
+              <a:t>Workflow · Context · Execution. Tout part de là.</a:t>
             </a:r>
           </a:p>
         </p:txBody>
@@ -4076,8 +4093,8 @@
         </p:nvSpPr>
         <p:spPr>
           <a:xfrm>
-            <a:off x="502920" y="3383280"/>
-            <a:ext cx="11201400" cy="960120"/>
+            <a:off x="502920" y="3337560"/>
+            <a:ext cx="11201400" cy="713232"/>
           </a:xfrm>
           <a:prstGeom prst="rect">
             <a:avLst/>
@@ -4120,7 +4137,7 @@
         </p:nvSpPr>
         <p:spPr>
           <a:xfrm>
-            <a:off x="502920" y="3383280"/>
+            <a:off x="502920" y="3337560"/>
             <a:ext cx="11201400" cy="6350"/>
           </a:xfrm>
           <a:prstGeom prst="rect">
@@ -4164,27 +4181,27 @@
         </p:nvSpPr>
         <p:spPr>
           <a:xfrm>
-            <a:off x="777240" y="3566160"/>
-            <a:ext cx="548640" cy="548640"/>
-          </a:xfrm>
-          <a:prstGeom prst="rect">
-            <a:avLst/>
-          </a:prstGeom>
-          <a:noFill/>
-        </p:spPr>
-        <p:txBody>
-          <a:bodyPr wrap="square" lIns="0" rIns="0" tIns="0" bIns="0" anchor="t">
-            <a:spAutoFit/>
-          </a:bodyPr>
-          <a:lstStyle/>
-          <a:p>
-            <a:pPr algn="l">
-              <a:lnSpc>
-                <a:spcPct val="115000"/>
-              </a:lnSpc>
-            </a:pPr>
-            <a:r>
-              <a:rPr sz="2200" b="0">
+            <a:off x="777240" y="3474720"/>
+            <a:ext cx="548640" cy="457200"/>
+          </a:xfrm>
+          <a:prstGeom prst="rect">
+            <a:avLst/>
+          </a:prstGeom>
+          <a:noFill/>
+        </p:spPr>
+        <p:txBody>
+          <a:bodyPr wrap="square" lIns="0" rIns="0" tIns="0" bIns="0" anchor="t">
+            <a:spAutoFit/>
+          </a:bodyPr>
+          <a:lstStyle/>
+          <a:p>
+            <a:pPr algn="l">
+              <a:lnSpc>
+                <a:spcPct val="115000"/>
+              </a:lnSpc>
+            </a:pPr>
+            <a:r>
+              <a:rPr sz="1800" b="0" i="0">
                 <a:solidFill>
                   <a:srgbClr val="6B6B6B"/>
                 </a:solidFill>
@@ -4203,33 +4220,33 @@
         </p:nvSpPr>
         <p:spPr>
           <a:xfrm>
-            <a:off x="1691640" y="3566160"/>
-            <a:ext cx="2286000" cy="457200"/>
-          </a:xfrm>
-          <a:prstGeom prst="rect">
-            <a:avLst/>
-          </a:prstGeom>
-          <a:noFill/>
-        </p:spPr>
-        <p:txBody>
-          <a:bodyPr wrap="square" lIns="0" rIns="0" tIns="0" bIns="0" anchor="t">
-            <a:spAutoFit/>
-          </a:bodyPr>
-          <a:lstStyle/>
-          <a:p>
-            <a:pPr algn="l">
-              <a:lnSpc>
-                <a:spcPct val="115000"/>
-              </a:lnSpc>
-            </a:pPr>
-            <a:r>
-              <a:rPr sz="1600" b="1">
+            <a:off x="1600200" y="3474720"/>
+            <a:ext cx="3200400" cy="457200"/>
+          </a:xfrm>
+          <a:prstGeom prst="rect">
+            <a:avLst/>
+          </a:prstGeom>
+          <a:noFill/>
+        </p:spPr>
+        <p:txBody>
+          <a:bodyPr wrap="square" lIns="0" rIns="0" tIns="0" bIns="0" anchor="t">
+            <a:spAutoFit/>
+          </a:bodyPr>
+          <a:lstStyle/>
+          <a:p>
+            <a:pPr algn="l">
+              <a:lnSpc>
+                <a:spcPct val="115000"/>
+              </a:lnSpc>
+            </a:pPr>
+            <a:r>
+              <a:rPr sz="1500" b="1" i="0">
                 <a:solidFill>
                   <a:srgbClr val="F5F5F5"/>
                 </a:solidFill>
                 <a:latin typeface="Inter"/>
               </a:rPr>
-              <a:t>Capacité</a:t>
+              <a:t>Model neutrality</a:t>
             </a:r>
           </a:p>
         </p:txBody>
@@ -4242,49 +4259,33 @@
         </p:nvSpPr>
         <p:spPr>
           <a:xfrm>
-            <a:off x="4206240" y="3566160"/>
-            <a:ext cx="7498079" cy="731520"/>
-          </a:xfrm>
-          <a:prstGeom prst="rect">
-            <a:avLst/>
-          </a:prstGeom>
-          <a:noFill/>
-        </p:spPr>
-        <p:txBody>
-          <a:bodyPr wrap="square" lIns="0" rIns="0" tIns="0" bIns="0" anchor="t">
-            <a:spAutoFit/>
-          </a:bodyPr>
-          <a:lstStyle/>
-          <a:p>
-            <a:pPr algn="l">
-              <a:lnSpc>
-                <a:spcPct val="140000"/>
-              </a:lnSpc>
-            </a:pPr>
-            <a:r>
-              <a:rPr sz="1200" b="0">
+            <a:off x="4983480" y="3502152"/>
+            <a:ext cx="6675120" cy="502920"/>
+          </a:xfrm>
+          <a:prstGeom prst="rect">
+            <a:avLst/>
+          </a:prstGeom>
+          <a:noFill/>
+        </p:spPr>
+        <p:txBody>
+          <a:bodyPr wrap="square" lIns="0" rIns="0" tIns="0" bIns="0" anchor="t">
+            <a:spAutoFit/>
+          </a:bodyPr>
+          <a:lstStyle/>
+          <a:p>
+            <a:pPr algn="l">
+              <a:lnSpc>
+                <a:spcPct val="135000"/>
+              </a:lnSpc>
+            </a:pPr>
+            <a:r>
+              <a:rPr sz="1150" b="0" i="0">
                 <a:solidFill>
                   <a:srgbClr val="A0A0A0"/>
                 </a:solidFill>
                 <a:latin typeface="Inter"/>
               </a:rPr>
-              <a:t>Cursor est conçu pour le travail full-repo et agentique — exactement</a:t>
-            </a:r>
-          </a:p>
-          <a:p>
-            <a:pPr algn="l">
-              <a:lnSpc>
-                <a:spcPct val="140000"/>
-              </a:lnSpc>
-            </a:pPr>
-            <a:r>
-              <a:rPr sz="1200" b="0">
-                <a:solidFill>
-                  <a:srgbClr val="A0A0A0"/>
-                </a:solidFill>
-                <a:latin typeface="Inter"/>
-              </a:rPr>
-              <a:t>là où se joue la prochaine année de gains de productivité.</a:t>
+              <a:t>Flexibilité, pas de lock-in. Le meilleur modèle change tout le temps — Cursor donne accès au SOTA sans forcer à quitter une plateforme.</a:t>
             </a:r>
           </a:p>
         </p:txBody>
@@ -4297,8 +4298,8 @@
         </p:nvSpPr>
         <p:spPr>
           <a:xfrm>
-            <a:off x="502920" y="4434840"/>
-            <a:ext cx="11201400" cy="960120"/>
+            <a:off x="502920" y="4114800"/>
+            <a:ext cx="11201400" cy="713232"/>
           </a:xfrm>
           <a:prstGeom prst="rect">
             <a:avLst/>
@@ -4341,7 +4342,7 @@
         </p:nvSpPr>
         <p:spPr>
           <a:xfrm>
-            <a:off x="502920" y="4434840"/>
+            <a:off x="502920" y="4114800"/>
             <a:ext cx="11201400" cy="6350"/>
           </a:xfrm>
           <a:prstGeom prst="rect">
@@ -4385,27 +4386,27 @@
         </p:nvSpPr>
         <p:spPr>
           <a:xfrm>
-            <a:off x="777240" y="4617720"/>
-            <a:ext cx="548640" cy="548640"/>
-          </a:xfrm>
-          <a:prstGeom prst="rect">
-            <a:avLst/>
-          </a:prstGeom>
-          <a:noFill/>
-        </p:spPr>
-        <p:txBody>
-          <a:bodyPr wrap="square" lIns="0" rIns="0" tIns="0" bIns="0" anchor="t">
-            <a:spAutoFit/>
-          </a:bodyPr>
-          <a:lstStyle/>
-          <a:p>
-            <a:pPr algn="l">
-              <a:lnSpc>
-                <a:spcPct val="115000"/>
-              </a:lnSpc>
-            </a:pPr>
-            <a:r>
-              <a:rPr sz="2200" b="0">
+            <a:off x="777240" y="4251960"/>
+            <a:ext cx="548640" cy="457200"/>
+          </a:xfrm>
+          <a:prstGeom prst="rect">
+            <a:avLst/>
+          </a:prstGeom>
+          <a:noFill/>
+        </p:spPr>
+        <p:txBody>
+          <a:bodyPr wrap="square" lIns="0" rIns="0" tIns="0" bIns="0" anchor="t">
+            <a:spAutoFit/>
+          </a:bodyPr>
+          <a:lstStyle/>
+          <a:p>
+            <a:pPr algn="l">
+              <a:lnSpc>
+                <a:spcPct val="115000"/>
+              </a:lnSpc>
+            </a:pPr>
+            <a:r>
+              <a:rPr sz="1800" b="0" i="0">
                 <a:solidFill>
                   <a:srgbClr val="6B6B6B"/>
                 </a:solidFill>
@@ -4424,33 +4425,33 @@
         </p:nvSpPr>
         <p:spPr>
           <a:xfrm>
-            <a:off x="1691640" y="4617720"/>
-            <a:ext cx="2286000" cy="457200"/>
-          </a:xfrm>
-          <a:prstGeom prst="rect">
-            <a:avLst/>
-          </a:prstGeom>
-          <a:noFill/>
-        </p:spPr>
-        <p:txBody>
-          <a:bodyPr wrap="square" lIns="0" rIns="0" tIns="0" bIns="0" anchor="t">
-            <a:spAutoFit/>
-          </a:bodyPr>
-          <a:lstStyle/>
-          <a:p>
-            <a:pPr algn="l">
-              <a:lnSpc>
-                <a:spcPct val="115000"/>
-              </a:lnSpc>
-            </a:pPr>
-            <a:r>
-              <a:rPr sz="1600" b="1">
+            <a:off x="1600200" y="4251960"/>
+            <a:ext cx="3200400" cy="457200"/>
+          </a:xfrm>
+          <a:prstGeom prst="rect">
+            <a:avLst/>
+          </a:prstGeom>
+          <a:noFill/>
+        </p:spPr>
+        <p:txBody>
+          <a:bodyPr wrap="square" lIns="0" rIns="0" tIns="0" bIns="0" anchor="t">
+            <a:spAutoFit/>
+          </a:bodyPr>
+          <a:lstStyle/>
+          <a:p>
+            <a:pPr algn="l">
+              <a:lnSpc>
+                <a:spcPct val="115000"/>
+              </a:lnSpc>
+            </a:pPr>
+            <a:r>
+              <a:rPr sz="1500" b="1" i="0">
                 <a:solidFill>
                   <a:srgbClr val="F5F5F5"/>
                 </a:solidFill>
                 <a:latin typeface="Inter"/>
               </a:rPr>
-              <a:t>Choix + futur-proof</a:t>
+              <a:t>Large codebase performance</a:t>
             </a:r>
           </a:p>
         </p:txBody>
@@ -4463,49 +4464,33 @@
         </p:nvSpPr>
         <p:spPr>
           <a:xfrm>
-            <a:off x="4206240" y="4617720"/>
-            <a:ext cx="7498079" cy="731520"/>
-          </a:xfrm>
-          <a:prstGeom prst="rect">
-            <a:avLst/>
-          </a:prstGeom>
-          <a:noFill/>
-        </p:spPr>
-        <p:txBody>
-          <a:bodyPr wrap="square" lIns="0" rIns="0" tIns="0" bIns="0" anchor="t">
-            <a:spAutoFit/>
-          </a:bodyPr>
-          <a:lstStyle/>
-          <a:p>
-            <a:pPr algn="l">
-              <a:lnSpc>
-                <a:spcPct val="140000"/>
-              </a:lnSpc>
-            </a:pPr>
-            <a:r>
-              <a:rPr sz="1200" b="0">
+            <a:off x="4983480" y="4279392"/>
+            <a:ext cx="6675120" cy="502920"/>
+          </a:xfrm>
+          <a:prstGeom prst="rect">
+            <a:avLst/>
+          </a:prstGeom>
+          <a:noFill/>
+        </p:spPr>
+        <p:txBody>
+          <a:bodyPr wrap="square" lIns="0" rIns="0" tIns="0" bIns="0" anchor="t">
+            <a:spAutoFit/>
+          </a:bodyPr>
+          <a:lstStyle/>
+          <a:p>
+            <a:pPr algn="l">
+              <a:lnSpc>
+                <a:spcPct val="135000"/>
+              </a:lnSpc>
+            </a:pPr>
+            <a:r>
+              <a:rPr sz="1150" b="0" i="0">
                 <a:solidFill>
                   <a:srgbClr val="A0A0A0"/>
                 </a:solidFill>
                 <a:latin typeface="Inter"/>
               </a:rPr>
-              <a:t>Les modèles frontières s'échangent à mesure qu'ils sortent.</a:t>
-            </a:r>
-          </a:p>
-          <a:p>
-            <a:pPr algn="l">
-              <a:lnSpc>
-                <a:spcPct val="140000"/>
-              </a:lnSpc>
-            </a:pPr>
-            <a:r>
-              <a:rPr sz="1200" b="0">
-                <a:solidFill>
-                  <a:srgbClr val="A0A0A0"/>
-                </a:solidFill>
-                <a:latin typeface="Inter"/>
-              </a:rPr>
-              <a:t>Pas de lock-in sur la roadmap d'un seul provider.</a:t>
+              <a:t>Pas juste un wrapper de modèle. Semantic search, indexing, retrieval — d'autant plus déterminant que le repo est gros et messy.</a:t>
             </a:r>
           </a:p>
         </p:txBody>
@@ -4518,8 +4503,8 @@
         </p:nvSpPr>
         <p:spPr>
           <a:xfrm>
-            <a:off x="502920" y="5486400"/>
-            <a:ext cx="11201400" cy="960120"/>
+            <a:off x="502920" y="4892040"/>
+            <a:ext cx="11201400" cy="713232"/>
           </a:xfrm>
           <a:prstGeom prst="rect">
             <a:avLst/>
@@ -4562,7 +4547,7 @@
         </p:nvSpPr>
         <p:spPr>
           <a:xfrm>
-            <a:off x="502920" y="5486400"/>
+            <a:off x="502920" y="4892040"/>
             <a:ext cx="11201400" cy="6350"/>
           </a:xfrm>
           <a:prstGeom prst="rect">
@@ -4606,27 +4591,27 @@
         </p:nvSpPr>
         <p:spPr>
           <a:xfrm>
-            <a:off x="777240" y="5669280"/>
-            <a:ext cx="548640" cy="548640"/>
-          </a:xfrm>
-          <a:prstGeom prst="rect">
-            <a:avLst/>
-          </a:prstGeom>
-          <a:noFill/>
-        </p:spPr>
-        <p:txBody>
-          <a:bodyPr wrap="square" lIns="0" rIns="0" tIns="0" bIns="0" anchor="t">
-            <a:spAutoFit/>
-          </a:bodyPr>
-          <a:lstStyle/>
-          <a:p>
-            <a:pPr algn="l">
-              <a:lnSpc>
-                <a:spcPct val="115000"/>
-              </a:lnSpc>
-            </a:pPr>
-            <a:r>
-              <a:rPr sz="2200" b="0">
+            <a:off x="777240" y="5029200"/>
+            <a:ext cx="548640" cy="457200"/>
+          </a:xfrm>
+          <a:prstGeom prst="rect">
+            <a:avLst/>
+          </a:prstGeom>
+          <a:noFill/>
+        </p:spPr>
+        <p:txBody>
+          <a:bodyPr wrap="square" lIns="0" rIns="0" tIns="0" bIns="0" anchor="t">
+            <a:spAutoFit/>
+          </a:bodyPr>
+          <a:lstStyle/>
+          <a:p>
+            <a:pPr algn="l">
+              <a:lnSpc>
+                <a:spcPct val="115000"/>
+              </a:lnSpc>
+            </a:pPr>
+            <a:r>
+              <a:rPr sz="1800" b="0" i="0">
                 <a:solidFill>
                   <a:srgbClr val="6B6B6B"/>
                 </a:solidFill>
@@ -4645,33 +4630,33 @@
         </p:nvSpPr>
         <p:spPr>
           <a:xfrm>
-            <a:off x="1691640" y="5669280"/>
-            <a:ext cx="2286000" cy="457200"/>
-          </a:xfrm>
-          <a:prstGeom prst="rect">
-            <a:avLst/>
-          </a:prstGeom>
-          <a:noFill/>
-        </p:spPr>
-        <p:txBody>
-          <a:bodyPr wrap="square" lIns="0" rIns="0" tIns="0" bIns="0" anchor="t">
-            <a:spAutoFit/>
-          </a:bodyPr>
-          <a:lstStyle/>
-          <a:p>
-            <a:pPr algn="l">
-              <a:lnSpc>
-                <a:spcPct val="115000"/>
-              </a:lnSpc>
-            </a:pPr>
-            <a:r>
-              <a:rPr sz="1600" b="1">
+            <a:off x="1600200" y="5029200"/>
+            <a:ext cx="3200400" cy="457200"/>
+          </a:xfrm>
+          <a:prstGeom prst="rect">
+            <a:avLst/>
+          </a:prstGeom>
+          <a:noFill/>
+        </p:spPr>
+        <p:txBody>
+          <a:bodyPr wrap="square" lIns="0" rIns="0" tIns="0" bIns="0" anchor="t">
+            <a:spAutoFit/>
+          </a:bodyPr>
+          <a:lstStyle/>
+          <a:p>
+            <a:pPr algn="l">
+              <a:lnSpc>
+                <a:spcPct val="115000"/>
+              </a:lnSpc>
+            </a:pPr>
+            <a:r>
+              <a:rPr sz="1500" b="1" i="0">
                 <a:solidFill>
                   <a:srgbClr val="F5F5F5"/>
                 </a:solidFill>
                 <a:latin typeface="Inter"/>
               </a:rPr>
-              <a:t>Trust enterprise</a:t>
+              <a:t>Faster time to value</a:t>
             </a:r>
           </a:p>
         </p:txBody>
@@ -4684,49 +4669,238 @@
         </p:nvSpPr>
         <p:spPr>
           <a:xfrm>
-            <a:off x="4206240" y="5669280"/>
-            <a:ext cx="7498079" cy="731520"/>
-          </a:xfrm>
-          <a:prstGeom prst="rect">
-            <a:avLst/>
-          </a:prstGeom>
-          <a:noFill/>
-        </p:spPr>
-        <p:txBody>
-          <a:bodyPr wrap="square" lIns="0" rIns="0" tIns="0" bIns="0" anchor="t">
-            <a:spAutoFit/>
-          </a:bodyPr>
-          <a:lstStyle/>
-          <a:p>
-            <a:pPr algn="l">
-              <a:lnSpc>
-                <a:spcPct val="140000"/>
-              </a:lnSpc>
-            </a:pPr>
-            <a:r>
-              <a:rPr sz="1200" b="0">
+            <a:off x="4983480" y="5056632"/>
+            <a:ext cx="6675120" cy="502920"/>
+          </a:xfrm>
+          <a:prstGeom prst="rect">
+            <a:avLst/>
+          </a:prstGeom>
+          <a:noFill/>
+        </p:spPr>
+        <p:txBody>
+          <a:bodyPr wrap="square" lIns="0" rIns="0" tIns="0" bIns="0" anchor="t">
+            <a:spAutoFit/>
+          </a:bodyPr>
+          <a:lstStyle/>
+          <a:p>
+            <a:pPr algn="l">
+              <a:lnSpc>
+                <a:spcPct val="135000"/>
+              </a:lnSpc>
+            </a:pPr>
+            <a:r>
+              <a:rPr sz="1150" b="0" i="0">
                 <a:solidFill>
                   <a:srgbClr val="A0A0A0"/>
                 </a:solidFill>
                 <a:latin typeface="Inter"/>
               </a:rPr>
-              <a:t>SOC 2 Type II, ISO 27001, Privacy Mode (zero data retention),</a:t>
-            </a:r>
-          </a:p>
-          <a:p>
-            <a:pPr algn="l">
-              <a:lnSpc>
-                <a:spcPct val="140000"/>
-              </a:lnSpc>
-            </a:pPr>
-            <a:r>
-              <a:rPr sz="1200" b="0">
+              <a:t>Marche out of the box. Les équipes standardisent vite ; les power users vont profond, mais le baseline est déjà fort.</a:t>
+            </a:r>
+          </a:p>
+        </p:txBody>
+      </p:sp>
+      <p:sp>
+        <p:nvSpPr>
+          <p:cNvPr id="26" name="Rectangle 25"/>
+          <p:cNvSpPr/>
+          <p:nvPr/>
+        </p:nvSpPr>
+        <p:spPr>
+          <a:xfrm>
+            <a:off x="502920" y="5669280"/>
+            <a:ext cx="11201400" cy="713232"/>
+          </a:xfrm>
+          <a:prstGeom prst="rect">
+            <a:avLst/>
+          </a:prstGeom>
+          <a:solidFill>
+            <a:srgbClr val="141414"/>
+          </a:solidFill>
+          <a:ln>
+            <a:noFill/>
+          </a:ln>
+          <a:effectLst/>
+        </p:spPr>
+        <p:style>
+          <a:lnRef idx="1">
+            <a:schemeClr val="accent1"/>
+          </a:lnRef>
+          <a:fillRef idx="3">
+            <a:schemeClr val="accent1"/>
+          </a:fillRef>
+          <a:effectRef idx="2">
+            <a:schemeClr val="accent1"/>
+          </a:effectRef>
+          <a:fontRef idx="minor">
+            <a:schemeClr val="lt1"/>
+          </a:fontRef>
+        </p:style>
+        <p:txBody>
+          <a:bodyPr rtlCol="0" anchor="ctr"/>
+          <a:lstStyle/>
+          <a:p>
+            <a:pPr algn="ctr"/>
+          </a:p>
+        </p:txBody>
+      </p:sp>
+      <p:sp>
+        <p:nvSpPr>
+          <p:cNvPr id="27" name="Rectangle 26"/>
+          <p:cNvSpPr/>
+          <p:nvPr/>
+        </p:nvSpPr>
+        <p:spPr>
+          <a:xfrm>
+            <a:off x="502920" y="5669280"/>
+            <a:ext cx="11201400" cy="6350"/>
+          </a:xfrm>
+          <a:prstGeom prst="rect">
+            <a:avLst/>
+          </a:prstGeom>
+          <a:solidFill>
+            <a:srgbClr val="2A2A2A"/>
+          </a:solidFill>
+          <a:ln>
+            <a:noFill/>
+          </a:ln>
+          <a:effectLst/>
+        </p:spPr>
+        <p:style>
+          <a:lnRef idx="1">
+            <a:schemeClr val="accent1"/>
+          </a:lnRef>
+          <a:fillRef idx="3">
+            <a:schemeClr val="accent1"/>
+          </a:fillRef>
+          <a:effectRef idx="2">
+            <a:schemeClr val="accent1"/>
+          </a:effectRef>
+          <a:fontRef idx="minor">
+            <a:schemeClr val="lt1"/>
+          </a:fontRef>
+        </p:style>
+        <p:txBody>
+          <a:bodyPr rtlCol="0" anchor="ctr"/>
+          <a:lstStyle/>
+          <a:p>
+            <a:pPr algn="ctr"/>
+          </a:p>
+        </p:txBody>
+      </p:sp>
+      <p:sp>
+        <p:nvSpPr>
+          <p:cNvPr id="28" name="TextBox 27"/>
+          <p:cNvSpPr txBox="1"/>
+          <p:nvPr/>
+        </p:nvSpPr>
+        <p:spPr>
+          <a:xfrm>
+            <a:off x="777240" y="5806440"/>
+            <a:ext cx="548640" cy="457200"/>
+          </a:xfrm>
+          <a:prstGeom prst="rect">
+            <a:avLst/>
+          </a:prstGeom>
+          <a:noFill/>
+        </p:spPr>
+        <p:txBody>
+          <a:bodyPr wrap="square" lIns="0" rIns="0" tIns="0" bIns="0" anchor="t">
+            <a:spAutoFit/>
+          </a:bodyPr>
+          <a:lstStyle/>
+          <a:p>
+            <a:pPr algn="l">
+              <a:lnSpc>
+                <a:spcPct val="115000"/>
+              </a:lnSpc>
+            </a:pPr>
+            <a:r>
+              <a:rPr sz="1800" b="0" i="0">
+                <a:solidFill>
+                  <a:srgbClr val="6B6B6B"/>
+                </a:solidFill>
+                <a:latin typeface="JetBrains Mono"/>
+              </a:rPr>
+              <a:t>04</a:t>
+            </a:r>
+          </a:p>
+        </p:txBody>
+      </p:sp>
+      <p:sp>
+        <p:nvSpPr>
+          <p:cNvPr id="29" name="TextBox 28"/>
+          <p:cNvSpPr txBox="1"/>
+          <p:nvPr/>
+        </p:nvSpPr>
+        <p:spPr>
+          <a:xfrm>
+            <a:off x="1600200" y="5806440"/>
+            <a:ext cx="3200400" cy="457200"/>
+          </a:xfrm>
+          <a:prstGeom prst="rect">
+            <a:avLst/>
+          </a:prstGeom>
+          <a:noFill/>
+        </p:spPr>
+        <p:txBody>
+          <a:bodyPr wrap="square" lIns="0" rIns="0" tIns="0" bIns="0" anchor="t">
+            <a:spAutoFit/>
+          </a:bodyPr>
+          <a:lstStyle/>
+          <a:p>
+            <a:pPr algn="l">
+              <a:lnSpc>
+                <a:spcPct val="115000"/>
+              </a:lnSpc>
+            </a:pPr>
+            <a:r>
+              <a:rPr sz="1500" b="1" i="0">
+                <a:solidFill>
+                  <a:srgbClr val="F5F5F5"/>
+                </a:solidFill>
+                <a:latin typeface="Inter"/>
+              </a:rPr>
+              <a:t>Platform, not just a tool</a:t>
+            </a:r>
+          </a:p>
+        </p:txBody>
+      </p:sp>
+      <p:sp>
+        <p:nvSpPr>
+          <p:cNvPr id="30" name="TextBox 29"/>
+          <p:cNvSpPr txBox="1"/>
+          <p:nvPr/>
+        </p:nvSpPr>
+        <p:spPr>
+          <a:xfrm>
+            <a:off x="4983480" y="5833872"/>
+            <a:ext cx="6675120" cy="502920"/>
+          </a:xfrm>
+          <a:prstGeom prst="rect">
+            <a:avLst/>
+          </a:prstGeom>
+          <a:noFill/>
+        </p:spPr>
+        <p:txBody>
+          <a:bodyPr wrap="square" lIns="0" rIns="0" tIns="0" bIns="0" anchor="t">
+            <a:spAutoFit/>
+          </a:bodyPr>
+          <a:lstStyle/>
+          <a:p>
+            <a:pPr algn="l">
+              <a:lnSpc>
+                <a:spcPct val="135000"/>
+              </a:lnSpc>
+            </a:pPr>
+            <a:r>
+              <a:rPr sz="1150" b="0" i="0">
                 <a:solidFill>
                   <a:srgbClr val="A0A0A0"/>
                 </a:solidFill>
                 <a:latin typeface="Inter"/>
               </a:rPr>
-              <a:t>no training on your code, SAML/SCIM, audit logs.</a:t>
+              <a:t>Couvre tout le SDLC — plan, write, review, debug, iterate. L'intelligence est appliquée là où les devs travaillent vraiment.</a:t>
             </a:r>
           </a:p>
         </p:txBody>
@@ -4821,7 +4995,7 @@
               </a:lnSpc>
             </a:pPr>
             <a:r>
-              <a:rPr sz="1100" b="1" spc="20">
+              <a:rPr sz="1100" b="1" i="0" spc="20">
                 <a:solidFill>
                   <a:srgbClr val="F5F5F5"/>
                 </a:solidFill>
@@ -4860,7 +5034,7 @@
               </a:lnSpc>
             </a:pPr>
             <a:r>
-              <a:rPr sz="900" b="0" spc="200">
+              <a:rPr sz="900" b="0" i="0" spc="200">
                 <a:solidFill>
                   <a:srgbClr val="6B6B6B"/>
                 </a:solidFill>
@@ -4899,7 +5073,7 @@
               </a:lnSpc>
             </a:pPr>
             <a:r>
-              <a:rPr sz="900" b="0" spc="80">
+              <a:rPr sz="900" b="0" i="0" spc="80">
                 <a:solidFill>
                   <a:srgbClr val="6B6B6B"/>
                 </a:solidFill>
@@ -4938,13 +5112,13 @@
               </a:lnSpc>
             </a:pPr>
             <a:r>
-              <a:rPr sz="900" b="0" spc="50">
+              <a:rPr sz="900" b="0" i="0" spc="50">
                 <a:solidFill>
                   <a:srgbClr val="6B6B6B"/>
                 </a:solidFill>
                 <a:latin typeface="JetBrains Mono"/>
               </a:rPr>
-              <a:t>11 / 16</a:t>
+              <a:t>11 / 17</a:t>
             </a:r>
           </a:p>
         </p:txBody>
@@ -5021,13 +5195,13 @@
               </a:lnSpc>
             </a:pPr>
             <a:r>
-              <a:rPr sz="1000" b="0" spc="300">
+              <a:rPr sz="1000" b="0" i="0" spc="300">
                 <a:solidFill>
                   <a:srgbClr val="6B6B6B"/>
                 </a:solidFill>
                 <a:latin typeface="Inter"/>
               </a:rPr>
-              <a:t>REPÈRES À MÉMORISER</a:t>
+              <a:t>REPÈRES À MANIER AVEC PRÉCAUTION</a:t>
             </a:r>
           </a:p>
         </p:txBody>
@@ -5060,7 +5234,7 @@
               </a:lnSpc>
             </a:pPr>
             <a:r>
-              <a:rPr sz="3600" b="1">
+              <a:rPr sz="3600" b="1" i="0">
                 <a:solidFill>
                   <a:srgbClr val="F5F5F5"/>
                 </a:solidFill>
@@ -5080,7 +5254,7 @@
         <p:spPr>
           <a:xfrm>
             <a:off x="502920" y="2606040"/>
-            <a:ext cx="10972800" cy="548640"/>
+            <a:ext cx="10972800" cy="640080"/>
           </a:xfrm>
           <a:prstGeom prst="rect">
             <a:avLst/>
@@ -5099,13 +5273,13 @@
               </a:lnSpc>
             </a:pPr>
             <a:r>
-              <a:rPr sz="1500" b="0">
+              <a:rPr sz="1500" b="0" i="0">
                 <a:solidFill>
                   <a:srgbClr val="A0A0A0"/>
                 </a:solidFill>
                 <a:latin typeface="Inter"/>
               </a:rPr>
-              <a:t>Toujours formuler : « ce qu'on voit chez des clients de votre taille »,</a:t>
+              <a:t>Toujours : « ce qu'on voit chez des clients de votre taille ».</a:t>
             </a:r>
           </a:p>
           <a:p>
@@ -5115,13 +5289,13 @@
               </a:lnSpc>
             </a:pPr>
             <a:r>
-              <a:rPr sz="1500" b="0">
+              <a:rPr sz="1500" b="0" i="0">
                 <a:solidFill>
                   <a:srgbClr val="A0A0A0"/>
                 </a:solidFill>
                 <a:latin typeface="Inter"/>
               </a:rPr>
-              <a:t>jamais comme une vérité universelle.</a:t>
+              <a:t>Jamais une vérité universelle — pas d'AI hype.</a:t>
             </a:r>
           </a:p>
         </p:txBody>
@@ -5242,13 +5416,13 @@
               </a:lnSpc>
             </a:pPr>
             <a:r>
-              <a:rPr sz="3400" b="1" spc="-20">
+              <a:rPr sz="3200" b="1" i="0" spc="-20">
                 <a:solidFill>
                   <a:srgbClr val="F5F5F5"/>
                 </a:solidFill>
                 <a:latin typeface="Inter"/>
               </a:rPr>
-              <a:t>30–40 %</a:t>
+              <a:t>~70 %</a:t>
             </a:r>
           </a:p>
         </p:txBody>
@@ -5261,7 +5435,7 @@
         </p:nvSpPr>
         <p:spPr>
           <a:xfrm>
-            <a:off x="777240" y="4800600"/>
+            <a:off x="777240" y="4846320"/>
             <a:ext cx="2377440" cy="1280160"/>
           </a:xfrm>
           <a:prstGeom prst="rect">
@@ -5281,13 +5455,13 @@
               </a:lnSpc>
             </a:pPr>
             <a:r>
-              <a:rPr sz="1150" b="0">
+              <a:rPr sz="1150" b="0" i="0">
                 <a:solidFill>
                   <a:srgbClr val="A0A0A0"/>
                 </a:solidFill>
                 <a:latin typeface="Inter"/>
               </a:rPr>
-              <a:t>du temps des seniors passé à</a:t>
+              <a:t>des Fortune 1000</a:t>
             </a:r>
           </a:p>
           <a:p>
@@ -5297,13 +5471,13 @@
               </a:lnSpc>
             </a:pPr>
             <a:r>
-              <a:rPr sz="1150" b="0">
+              <a:rPr sz="1150" b="0" i="0">
                 <a:solidFill>
                   <a:srgbClr val="A0A0A0"/>
                 </a:solidFill>
                 <a:latin typeface="Inter"/>
               </a:rPr>
-              <a:t>lire / naviguer du code</a:t>
+              <a:t>utilisent Cursor.</a:t>
             </a:r>
           </a:p>
           <a:p>
@@ -5313,13 +5487,13 @@
               </a:lnSpc>
             </a:pPr>
             <a:r>
-              <a:rPr sz="1150" b="0">
+              <a:rPr sz="1150" b="0" i="0">
                 <a:solidFill>
                   <a:srgbClr val="A0A0A0"/>
                 </a:solidFill>
                 <a:latin typeface="Inter"/>
               </a:rPr>
-              <a:t>qu'ils n'ont pas écrit.</a:t>
+              <a:t>(positionnement officiel)</a:t>
             </a:r>
           </a:p>
         </p:txBody>
@@ -5440,7 +5614,7 @@
               </a:lnSpc>
             </a:pPr>
             <a:r>
-              <a:rPr sz="3400" b="1" spc="-20">
+              <a:rPr sz="3200" b="1" i="0" spc="-20">
                 <a:solidFill>
                   <a:srgbClr val="F5F5F5"/>
                 </a:solidFill>
@@ -5459,7 +5633,7 @@
         </p:nvSpPr>
         <p:spPr>
           <a:xfrm>
-            <a:off x="3611880" y="4800600"/>
+            <a:off x="3611880" y="4846320"/>
             <a:ext cx="2377440" cy="1280160"/>
           </a:xfrm>
           <a:prstGeom prst="rect">
@@ -5479,7 +5653,7 @@
               </a:lnSpc>
             </a:pPr>
             <a:r>
-              <a:rPr sz="1150" b="0">
+              <a:rPr sz="1150" b="0" i="0">
                 <a:solidFill>
                   <a:srgbClr val="A0A0A0"/>
                 </a:solidFill>
@@ -5495,7 +5669,7 @@
               </a:lnSpc>
             </a:pPr>
             <a:r>
-              <a:rPr sz="1150" b="0">
+              <a:rPr sz="1150" b="0" i="0">
                 <a:solidFill>
                   <a:srgbClr val="A0A0A0"/>
                 </a:solidFill>
@@ -5511,7 +5685,7 @@
               </a:lnSpc>
             </a:pPr>
             <a:r>
-              <a:rPr sz="1150" b="0">
+              <a:rPr sz="1150" b="0" i="0">
                 <a:solidFill>
                   <a:srgbClr val="A0A0A0"/>
                 </a:solidFill>
@@ -5638,7 +5812,7 @@
               </a:lnSpc>
             </a:pPr>
             <a:r>
-              <a:rPr sz="3400" b="1" spc="-20">
+              <a:rPr sz="3200" b="1" i="0" spc="-20">
                 <a:solidFill>
                   <a:srgbClr val="F5F5F5"/>
                 </a:solidFill>
@@ -5657,7 +5831,7 @@
         </p:nvSpPr>
         <p:spPr>
           <a:xfrm>
-            <a:off x="6446520" y="4800600"/>
+            <a:off x="6446520" y="4846320"/>
             <a:ext cx="2377440" cy="1280160"/>
           </a:xfrm>
           <a:prstGeom prst="rect">
@@ -5677,7 +5851,7 @@
               </a:lnSpc>
             </a:pPr>
             <a:r>
-              <a:rPr sz="1150" b="0">
+              <a:rPr sz="1150" b="0" i="0">
                 <a:solidFill>
                   <a:srgbClr val="A0A0A0"/>
                 </a:solidFill>
@@ -5693,7 +5867,7 @@
               </a:lnSpc>
             </a:pPr>
             <a:r>
-              <a:rPr sz="1150" b="0">
+              <a:rPr sz="1150" b="0" i="0">
                 <a:solidFill>
                   <a:srgbClr val="A0A0A0"/>
                 </a:solidFill>
@@ -5709,7 +5883,7 @@
               </a:lnSpc>
             </a:pPr>
             <a:r>
-              <a:rPr sz="1150" b="0">
+              <a:rPr sz="1150" b="0" i="0">
                 <a:solidFill>
                   <a:srgbClr val="A0A0A0"/>
                 </a:solidFill>
@@ -5836,13 +6010,13 @@
               </a:lnSpc>
             </a:pPr>
             <a:r>
-              <a:rPr sz="3400" b="1" spc="-20">
+              <a:rPr sz="3200" b="1" i="0" spc="-20">
                 <a:solidFill>
                   <a:srgbClr val="F5F5F5"/>
                 </a:solidFill>
                 <a:latin typeface="Inter"/>
               </a:rPr>
-              <a:t>≤ 35 %</a:t>
+              <a:t>Senior IC</a:t>
             </a:r>
           </a:p>
         </p:txBody>
@@ -5855,7 +6029,7 @@
         </p:nvSpPr>
         <p:spPr>
           <a:xfrm>
-            <a:off x="9281160" y="4800600"/>
+            <a:off x="9281160" y="4846320"/>
             <a:ext cx="2377440" cy="1280160"/>
           </a:xfrm>
           <a:prstGeom prst="rect">
@@ -5875,13 +6049,13 @@
               </a:lnSpc>
             </a:pPr>
             <a:r>
-              <a:rPr sz="1150" b="0">
+              <a:rPr sz="1150" b="0" i="0">
                 <a:solidFill>
                   <a:srgbClr val="A0A0A0"/>
                 </a:solidFill>
                 <a:latin typeface="Inter"/>
               </a:rPr>
-              <a:t>des suggestions multi-lignes</a:t>
+              <a:t>opt-out = signal #1.</a:t>
             </a:r>
           </a:p>
           <a:p>
@@ -5891,13 +6065,13 @@
               </a:lnSpc>
             </a:pPr>
             <a:r>
-              <a:rPr sz="1150" b="0">
+              <a:rPr sz="1150" b="0" i="0">
                 <a:solidFill>
                   <a:srgbClr val="A0A0A0"/>
                 </a:solidFill>
                 <a:latin typeface="Inter"/>
               </a:rPr>
-              <a:t>acceptées chez les outils</a:t>
+              <a:t>Quand les meilleurs n'utilisent pas,</a:t>
             </a:r>
           </a:p>
           <a:p>
@@ -5907,13 +6081,13 @@
               </a:lnSpc>
             </a:pPr>
             <a:r>
-              <a:rPr sz="1150" b="0">
+              <a:rPr sz="1150" b="0" i="0">
                 <a:solidFill>
                   <a:srgbClr val="A0A0A0"/>
                 </a:solidFill>
                 <a:latin typeface="Inter"/>
               </a:rPr>
-              <a:t>complétion-only. Inversé en agentique.</a:t>
+              <a:t>plafond ROI org ≈ 5 %.</a:t>
             </a:r>
           </a:p>
         </p:txBody>
@@ -6008,7 +6182,7 @@
               </a:lnSpc>
             </a:pPr>
             <a:r>
-              <a:rPr sz="1100" b="1" spc="20">
+              <a:rPr sz="1100" b="1" i="0" spc="20">
                 <a:solidFill>
                   <a:srgbClr val="F5F5F5"/>
                 </a:solidFill>
@@ -6047,7 +6221,7 @@
               </a:lnSpc>
             </a:pPr>
             <a:r>
-              <a:rPr sz="900" b="0" spc="200">
+              <a:rPr sz="900" b="0" i="0" spc="200">
                 <a:solidFill>
                   <a:srgbClr val="6B6B6B"/>
                 </a:solidFill>
@@ -6086,7 +6260,7 @@
               </a:lnSpc>
             </a:pPr>
             <a:r>
-              <a:rPr sz="900" b="0" spc="80">
+              <a:rPr sz="900" b="0" i="0" spc="80">
                 <a:solidFill>
                   <a:srgbClr val="6B6B6B"/>
                 </a:solidFill>
@@ -6125,13 +6299,13 @@
               </a:lnSpc>
             </a:pPr>
             <a:r>
-              <a:rPr sz="900" b="0" spc="50">
+              <a:rPr sz="900" b="0" i="0" spc="50">
                 <a:solidFill>
                   <a:srgbClr val="6B6B6B"/>
                 </a:solidFill>
                 <a:latin typeface="JetBrains Mono"/>
               </a:rPr>
-              <a:t>12 / 16</a:t>
+              <a:t>12 / 17</a:t>
             </a:r>
           </a:p>
         </p:txBody>
@@ -6208,7 +6382,7 @@
               </a:lnSpc>
             </a:pPr>
             <a:r>
-              <a:rPr sz="1000" b="0" spc="300">
+              <a:rPr sz="1000" b="0" i="0" spc="300">
                 <a:solidFill>
                   <a:srgbClr val="6B6B6B"/>
                 </a:solidFill>
@@ -6247,13 +6421,13 @@
               </a:lnSpc>
             </a:pPr>
             <a:r>
-              <a:rPr sz="3600" b="1">
+              <a:rPr sz="3600" b="1" i="0">
                 <a:solidFill>
                   <a:srgbClr val="F5F5F5"/>
                 </a:solidFill>
                 <a:latin typeface="Inter"/>
               </a:rPr>
-              <a:t>ROI : capter 5 % ou 50 % de l'upside ?</a:t>
+              <a:t>Modèle, pas promesse.</a:t>
             </a:r>
           </a:p>
         </p:txBody>
@@ -6267,7 +6441,7 @@
         <p:spPr>
           <a:xfrm>
             <a:off x="502920" y="2606040"/>
-            <a:ext cx="10972800" cy="548640"/>
+            <a:ext cx="10972800" cy="640080"/>
           </a:xfrm>
           <a:prstGeom prst="rect">
             <a:avLst/>
@@ -6286,7 +6460,7 @@
               </a:lnSpc>
             </a:pPr>
             <a:r>
-              <a:rPr sz="1500" b="0">
+              <a:rPr sz="1500" b="0" i="0">
                 <a:solidFill>
                   <a:srgbClr val="A0A0A0"/>
                 </a:solidFill>
@@ -6413,7 +6587,7 @@
               </a:lnSpc>
             </a:pPr>
             <a:r>
-              <a:rPr sz="1000" b="0" spc="300">
+              <a:rPr sz="1000" b="0" i="0" spc="300">
                 <a:solidFill>
                   <a:srgbClr val="6B6B6B"/>
                 </a:solidFill>
@@ -6452,7 +6626,7 @@
               </a:lnSpc>
             </a:pPr>
             <a:r>
-              <a:rPr sz="1300" b="0">
+              <a:rPr sz="1300" b="0" i="0">
                 <a:solidFill>
                   <a:srgbClr val="F5F5F5"/>
                 </a:solidFill>
@@ -6468,7 +6642,7 @@
               </a:lnSpc>
             </a:pPr>
             <a:r>
-              <a:rPr sz="1300" b="0">
+              <a:rPr sz="1300" b="0" i="0">
                 <a:solidFill>
                   <a:srgbClr val="F5F5F5"/>
                 </a:solidFill>
@@ -6484,7 +6658,7 @@
               </a:lnSpc>
             </a:pPr>
             <a:r>
-              <a:rPr sz="1300" b="0">
+              <a:rPr sz="1300" b="0" i="0">
                 <a:solidFill>
                   <a:srgbClr val="F5F5F5"/>
                 </a:solidFill>
@@ -6500,7 +6674,7 @@
               </a:lnSpc>
             </a:pPr>
             <a:r>
-              <a:rPr sz="1300" b="0">
+              <a:rPr sz="1300" b="0" i="0">
                 <a:solidFill>
                   <a:srgbClr val="F5F5F5"/>
                 </a:solidFill>
@@ -6516,7 +6690,7 @@
               </a:lnSpc>
             </a:pPr>
             <a:r>
-              <a:rPr sz="1300" b="0">
+              <a:rPr sz="1300" b="0" i="0">
                 <a:solidFill>
                   <a:srgbClr val="F5F5F5"/>
                 </a:solidFill>
@@ -6532,7 +6706,7 @@
               </a:lnSpc>
             </a:pPr>
             <a:r>
-              <a:rPr sz="1300" b="0">
+              <a:rPr sz="1300" b="0" i="0">
                 <a:solidFill>
                   <a:srgbClr val="F5F5F5"/>
                 </a:solidFill>
@@ -6659,7 +6833,7 @@
               </a:lnSpc>
             </a:pPr>
             <a:r>
-              <a:rPr sz="1000" b="0" spc="300">
+              <a:rPr sz="1000" b="0" i="0" spc="300">
                 <a:solidFill>
                   <a:srgbClr val="6B6B6B"/>
                 </a:solidFill>
@@ -6698,7 +6872,7 @@
               </a:lnSpc>
             </a:pPr>
             <a:r>
-              <a:rPr sz="3000" b="1" spc="-10">
+              <a:rPr sz="3000" b="1" i="0" spc="-10">
                 <a:solidFill>
                   <a:srgbClr val="F5F5F5"/>
                 </a:solidFill>
@@ -6737,7 +6911,7 @@
               </a:lnSpc>
             </a:pPr>
             <a:r>
-              <a:rPr sz="1200" b="0">
+              <a:rPr sz="1200" b="0" i="0">
                 <a:solidFill>
                   <a:srgbClr val="A0A0A0"/>
                 </a:solidFill>
@@ -6753,7 +6927,7 @@
               </a:lnSpc>
             </a:pPr>
             <a:r>
-              <a:rPr sz="1200" b="0">
+              <a:rPr sz="1200" b="0" i="0">
                 <a:solidFill>
                   <a:srgbClr val="A0A0A0"/>
                 </a:solidFill>
@@ -6769,7 +6943,7 @@
               </a:lnSpc>
             </a:pPr>
             <a:r>
-              <a:rPr sz="1200" b="0">
+              <a:rPr sz="1200" b="0" i="0">
                 <a:solidFill>
                   <a:srgbClr val="A0A0A0"/>
                 </a:solidFill>
@@ -6785,7 +6959,7 @@
               </a:lnSpc>
             </a:pPr>
             <a:r>
-              <a:rPr sz="1200" b="0">
+              <a:rPr sz="1200" b="0" i="0">
                 <a:solidFill>
                   <a:srgbClr val="A0A0A0"/>
                 </a:solidFill>
@@ -6824,7 +6998,7 @@
               </a:lnSpc>
             </a:pPr>
             <a:r>
-              <a:rPr sz="1050" b="0" spc="20">
+              <a:rPr sz="1050" b="0" i="1" spc="20">
                 <a:solidFill>
                   <a:srgbClr val="E5E5E5"/>
                 </a:solidFill>
@@ -6925,7 +7099,7 @@
               </a:lnSpc>
             </a:pPr>
             <a:r>
-              <a:rPr sz="1100" b="1" spc="20">
+              <a:rPr sz="1100" b="1" i="0" spc="20">
                 <a:solidFill>
                   <a:srgbClr val="F5F5F5"/>
                 </a:solidFill>
@@ -6964,7 +7138,7 @@
               </a:lnSpc>
             </a:pPr>
             <a:r>
-              <a:rPr sz="900" b="0" spc="200">
+              <a:rPr sz="900" b="0" i="0" spc="200">
                 <a:solidFill>
                   <a:srgbClr val="6B6B6B"/>
                 </a:solidFill>
@@ -7003,7 +7177,7 @@
               </a:lnSpc>
             </a:pPr>
             <a:r>
-              <a:rPr sz="900" b="0" spc="80">
+              <a:rPr sz="900" b="0" i="0" spc="80">
                 <a:solidFill>
                   <a:srgbClr val="6B6B6B"/>
                 </a:solidFill>
@@ -7042,13 +7216,13 @@
               </a:lnSpc>
             </a:pPr>
             <a:r>
-              <a:rPr sz="900" b="0" spc="50">
+              <a:rPr sz="900" b="0" i="0" spc="50">
                 <a:solidFill>
                   <a:srgbClr val="6B6B6B"/>
                 </a:solidFill>
                 <a:latin typeface="JetBrains Mono"/>
               </a:rPr>
-              <a:t>13 / 16</a:t>
+              <a:t>13 / 17</a:t>
             </a:r>
           </a:p>
         </p:txBody>
@@ -7125,7 +7299,7 @@
               </a:lnSpc>
             </a:pPr>
             <a:r>
-              <a:rPr sz="1000" b="0" spc="300">
+              <a:rPr sz="1000" b="0" i="0" spc="300">
                 <a:solidFill>
                   <a:srgbClr val="6B6B6B"/>
                 </a:solidFill>
@@ -7164,7 +7338,7 @@
               </a:lnSpc>
             </a:pPr>
             <a:r>
-              <a:rPr sz="3600" b="1">
+              <a:rPr sz="3600" b="1" i="0">
                 <a:solidFill>
                   <a:srgbClr val="F5F5F5"/>
                 </a:solidFill>
@@ -7184,7 +7358,7 @@
         <p:spPr>
           <a:xfrm>
             <a:off x="502920" y="2606040"/>
-            <a:ext cx="10972800" cy="548640"/>
+            <a:ext cx="10972800" cy="640080"/>
           </a:xfrm>
           <a:prstGeom prst="rect">
             <a:avLst/>
@@ -7203,7 +7377,7 @@
               </a:lnSpc>
             </a:pPr>
             <a:r>
-              <a:rPr sz="1500" b="0">
+              <a:rPr sz="1500" b="0" i="0">
                 <a:solidFill>
                   <a:srgbClr val="A0A0A0"/>
                 </a:solidFill>
@@ -7330,7 +7504,7 @@
               </a:lnSpc>
             </a:pPr>
             <a:r>
-              <a:rPr sz="3000" b="1" spc="-20">
+              <a:rPr sz="3000" b="1" i="0" spc="-20">
                 <a:solidFill>
                   <a:srgbClr val="F5F5F5"/>
                 </a:solidFill>
@@ -7369,7 +7543,7 @@
               </a:lnSpc>
             </a:pPr>
             <a:r>
-              <a:rPr sz="1150" b="0">
+              <a:rPr sz="1150" b="0" i="0">
                 <a:solidFill>
                   <a:srgbClr val="A0A0A0"/>
                 </a:solidFill>
@@ -7385,7 +7559,7 @@
               </a:lnSpc>
             </a:pPr>
             <a:r>
-              <a:rPr sz="1150" b="0">
+              <a:rPr sz="1150" b="0" i="0">
                 <a:solidFill>
                   <a:srgbClr val="A0A0A0"/>
                 </a:solidFill>
@@ -7512,7 +7686,7 @@
               </a:lnSpc>
             </a:pPr>
             <a:r>
-              <a:rPr sz="3000" b="1" spc="-20">
+              <a:rPr sz="3000" b="1" i="0" spc="-20">
                 <a:solidFill>
                   <a:srgbClr val="F5F5F5"/>
                 </a:solidFill>
@@ -7551,7 +7725,7 @@
               </a:lnSpc>
             </a:pPr>
             <a:r>
-              <a:rPr sz="1150" b="0">
+              <a:rPr sz="1150" b="0" i="0">
                 <a:solidFill>
                   <a:srgbClr val="A0A0A0"/>
                 </a:solidFill>
@@ -7567,7 +7741,7 @@
               </a:lnSpc>
             </a:pPr>
             <a:r>
-              <a:rPr sz="1150" b="0">
+              <a:rPr sz="1150" b="0" i="0">
                 <a:solidFill>
                   <a:srgbClr val="A0A0A0"/>
                 </a:solidFill>
@@ -7694,7 +7868,7 @@
               </a:lnSpc>
             </a:pPr>
             <a:r>
-              <a:rPr sz="3000" b="1" spc="-20">
+              <a:rPr sz="3000" b="1" i="0" spc="-20">
                 <a:solidFill>
                   <a:srgbClr val="F5F5F5"/>
                 </a:solidFill>
@@ -7733,7 +7907,7 @@
               </a:lnSpc>
             </a:pPr>
             <a:r>
-              <a:rPr sz="1150" b="0">
+              <a:rPr sz="1150" b="0" i="0">
                 <a:solidFill>
                   <a:srgbClr val="A0A0A0"/>
                 </a:solidFill>
@@ -7749,7 +7923,7 @@
               </a:lnSpc>
             </a:pPr>
             <a:r>
-              <a:rPr sz="1150" b="0">
+              <a:rPr sz="1150" b="0" i="0">
                 <a:solidFill>
                   <a:srgbClr val="A0A0A0"/>
                 </a:solidFill>
@@ -7876,7 +8050,7 @@
               </a:lnSpc>
             </a:pPr>
             <a:r>
-              <a:rPr sz="3000" b="1" spc="-20">
+              <a:rPr sz="3000" b="1" i="0" spc="-20">
                 <a:solidFill>
                   <a:srgbClr val="F5F5F5"/>
                 </a:solidFill>
@@ -7915,7 +8089,7 @@
               </a:lnSpc>
             </a:pPr>
             <a:r>
-              <a:rPr sz="1150" b="0">
+              <a:rPr sz="1150" b="0" i="0">
                 <a:solidFill>
                   <a:srgbClr val="A0A0A0"/>
                 </a:solidFill>
@@ -7931,7 +8105,7 @@
               </a:lnSpc>
             </a:pPr>
             <a:r>
-              <a:rPr sz="1150" b="0">
+              <a:rPr sz="1150" b="0" i="0">
                 <a:solidFill>
                   <a:srgbClr val="A0A0A0"/>
                 </a:solidFill>
@@ -7947,7 +8121,7 @@
               </a:lnSpc>
             </a:pPr>
             <a:r>
-              <a:rPr sz="1150" b="0">
+              <a:rPr sz="1150" b="0" i="0">
                 <a:solidFill>
                   <a:srgbClr val="A0A0A0"/>
                 </a:solidFill>
@@ -8048,7 +8222,7 @@
               </a:lnSpc>
             </a:pPr>
             <a:r>
-              <a:rPr sz="1100" b="1" spc="20">
+              <a:rPr sz="1100" b="1" i="0" spc="20">
                 <a:solidFill>
                   <a:srgbClr val="F5F5F5"/>
                 </a:solidFill>
@@ -8087,7 +8261,7 @@
               </a:lnSpc>
             </a:pPr>
             <a:r>
-              <a:rPr sz="900" b="0" spc="200">
+              <a:rPr sz="900" b="0" i="0" spc="200">
                 <a:solidFill>
                   <a:srgbClr val="6B6B6B"/>
                 </a:solidFill>
@@ -8126,7 +8300,7 @@
               </a:lnSpc>
             </a:pPr>
             <a:r>
-              <a:rPr sz="900" b="0" spc="80">
+              <a:rPr sz="900" b="0" i="0" spc="80">
                 <a:solidFill>
                   <a:srgbClr val="6B6B6B"/>
                 </a:solidFill>
@@ -8165,13 +8339,13 @@
               </a:lnSpc>
             </a:pPr>
             <a:r>
-              <a:rPr sz="900" b="0" spc="50">
+              <a:rPr sz="900" b="0" i="0" spc="50">
                 <a:solidFill>
                   <a:srgbClr val="6B6B6B"/>
                 </a:solidFill>
                 <a:latin typeface="JetBrains Mono"/>
               </a:rPr>
-              <a:t>14 / 16</a:t>
+              <a:t>14 / 17</a:t>
             </a:r>
           </a:p>
         </p:txBody>
@@ -8248,7 +8422,7 @@
               </a:lnSpc>
             </a:pPr>
             <a:r>
-              <a:rPr sz="1000" b="0" spc="300">
+              <a:rPr sz="1000" b="0" i="0" spc="300">
                 <a:solidFill>
                   <a:srgbClr val="6B6B6B"/>
                 </a:solidFill>
@@ -8287,7 +8461,7 @@
               </a:lnSpc>
             </a:pPr>
             <a:r>
-              <a:rPr sz="3600" b="1">
+              <a:rPr sz="3600" b="1" i="0">
                 <a:solidFill>
                   <a:srgbClr val="F5F5F5"/>
                 </a:solidFill>
@@ -8307,7 +8481,7 @@
         <p:spPr>
           <a:xfrm>
             <a:off x="502920" y="2606040"/>
-            <a:ext cx="10972800" cy="548640"/>
+            <a:ext cx="10972800" cy="640080"/>
           </a:xfrm>
           <a:prstGeom prst="rect">
             <a:avLst/>
@@ -8326,13 +8500,13 @@
               </a:lnSpc>
             </a:pPr>
             <a:r>
-              <a:rPr sz="1500" b="0">
+              <a:rPr sz="1500" b="0" i="0">
                 <a:solidFill>
                   <a:srgbClr val="A0A0A0"/>
                 </a:solidFill>
                 <a:latin typeface="Inter"/>
               </a:rPr>
-              <a:t>Trois réponses préparées. Aucune n'est une feature, toutes sont contractuelles.</a:t>
+              <a:t>Privacy Mode + SOC 2. Trois bullets exacts, pas de feature dump.</a:t>
             </a:r>
           </a:p>
         </p:txBody>
@@ -8345,7 +8519,7 @@
         </p:nvSpPr>
         <p:spPr>
           <a:xfrm>
-            <a:off x="502920" y="3383280"/>
+            <a:off x="502920" y="3337560"/>
             <a:ext cx="640080" cy="457200"/>
           </a:xfrm>
           <a:prstGeom prst="rect">
@@ -8365,7 +8539,7 @@
               </a:lnSpc>
             </a:pPr>
             <a:r>
-              <a:rPr sz="1800" b="0">
+              <a:rPr sz="1600" b="0" i="0">
                 <a:solidFill>
                   <a:srgbClr val="6B6B6B"/>
                 </a:solidFill>
@@ -8384,7 +8558,7 @@
         </p:nvSpPr>
         <p:spPr>
           <a:xfrm>
-            <a:off x="1371600" y="3383280"/>
+            <a:off x="1280160" y="3337560"/>
             <a:ext cx="3200400" cy="457200"/>
           </a:xfrm>
           <a:prstGeom prst="rect">
@@ -8404,13 +8578,13 @@
               </a:lnSpc>
             </a:pPr>
             <a:r>
-              <a:rPr sz="1500" b="1">
+              <a:rPr sz="1400" b="1" i="0">
                 <a:solidFill>
                   <a:srgbClr val="F5F5F5"/>
                 </a:solidFill>
                 <a:latin typeface="Inter"/>
               </a:rPr>
-              <a:t>Zero training</a:t>
+              <a:t>Code non-stocké</a:t>
             </a:r>
           </a:p>
         </p:txBody>
@@ -8423,33 +8597,33 @@
         </p:nvSpPr>
         <p:spPr>
           <a:xfrm>
-            <a:off x="4754880" y="3383280"/>
-            <a:ext cx="6949440" cy="914400"/>
-          </a:xfrm>
-          <a:prstGeom prst="rect">
-            <a:avLst/>
-          </a:prstGeom>
-          <a:noFill/>
-        </p:spPr>
-        <p:txBody>
-          <a:bodyPr wrap="square" lIns="0" rIns="0" tIns="0" bIns="0" anchor="t">
-            <a:spAutoFit/>
-          </a:bodyPr>
-          <a:lstStyle/>
-          <a:p>
-            <a:pPr algn="l">
-              <a:lnSpc>
-                <a:spcPct val="145000"/>
-              </a:lnSpc>
-            </a:pPr>
-            <a:r>
-              <a:rPr sz="1250" b="0">
+            <a:off x="4754880" y="3337560"/>
+            <a:ext cx="6949440" cy="731520"/>
+          </a:xfrm>
+          <a:prstGeom prst="rect">
+            <a:avLst/>
+          </a:prstGeom>
+          <a:noFill/>
+        </p:spPr>
+        <p:txBody>
+          <a:bodyPr wrap="square" lIns="0" rIns="0" tIns="0" bIns="0" anchor="t">
+            <a:spAutoFit/>
+          </a:bodyPr>
+          <a:lstStyle/>
+          <a:p>
+            <a:pPr algn="l">
+              <a:lnSpc>
+                <a:spcPct val="140000"/>
+              </a:lnSpc>
+            </a:pPr>
+            <a:r>
+              <a:rPr sz="1200" b="0" i="0">
                 <a:solidFill>
                   <a:srgbClr val="A0A0A0"/>
                 </a:solidFill>
                 <a:latin typeface="Inter"/>
               </a:rPr>
-              <a:t>Votre code n'entraîne aucun modèle — ni le nôtre, ni celui des providers. C'est contractuel, pas un toggle.</a:t>
+              <a:t>Customer code is not stored or retained — c'est contractuel, pas un toggle. Le code n'atterrit pas sur nos disques.</a:t>
             </a:r>
           </a:p>
         </p:txBody>
@@ -8462,7 +8636,7 @@
         </p:nvSpPr>
         <p:spPr>
           <a:xfrm>
-            <a:off x="502920" y="4343400"/>
+            <a:off x="502920" y="4050792"/>
             <a:ext cx="11201400" cy="6350"/>
           </a:xfrm>
           <a:prstGeom prst="rect">
@@ -8506,7 +8680,7 @@
         </p:nvSpPr>
         <p:spPr>
           <a:xfrm>
-            <a:off x="502920" y="4434840"/>
+            <a:off x="502920" y="4114800"/>
             <a:ext cx="640080" cy="457200"/>
           </a:xfrm>
           <a:prstGeom prst="rect">
@@ -8526,7 +8700,7 @@
               </a:lnSpc>
             </a:pPr>
             <a:r>
-              <a:rPr sz="1800" b="0">
+              <a:rPr sz="1600" b="0" i="0">
                 <a:solidFill>
                   <a:srgbClr val="6B6B6B"/>
                 </a:solidFill>
@@ -8545,7 +8719,7 @@
         </p:nvSpPr>
         <p:spPr>
           <a:xfrm>
-            <a:off x="1371600" y="4434840"/>
+            <a:off x="1280160" y="4114800"/>
             <a:ext cx="3200400" cy="457200"/>
           </a:xfrm>
           <a:prstGeom prst="rect">
@@ -8565,13 +8739,13 @@
               </a:lnSpc>
             </a:pPr>
             <a:r>
-              <a:rPr sz="1500" b="1">
+              <a:rPr sz="1400" b="1" i="0">
                 <a:solidFill>
                   <a:srgbClr val="F5F5F5"/>
                 </a:solidFill>
                 <a:latin typeface="Inter"/>
               </a:rPr>
-              <a:t>Privacy Mode + ZDR</a:t>
+              <a:t>Pas d'entraînement</a:t>
             </a:r>
           </a:p>
         </p:txBody>
@@ -8584,33 +8758,33 @@
         </p:nvSpPr>
         <p:spPr>
           <a:xfrm>
-            <a:off x="4754880" y="4434840"/>
-            <a:ext cx="6949440" cy="914400"/>
-          </a:xfrm>
-          <a:prstGeom prst="rect">
-            <a:avLst/>
-          </a:prstGeom>
-          <a:noFill/>
-        </p:spPr>
-        <p:txBody>
-          <a:bodyPr wrap="square" lIns="0" rIns="0" tIns="0" bIns="0" anchor="t">
-            <a:spAutoFit/>
-          </a:bodyPr>
-          <a:lstStyle/>
-          <a:p>
-            <a:pPr algn="l">
-              <a:lnSpc>
-                <a:spcPct val="145000"/>
-              </a:lnSpc>
-            </a:pPr>
-            <a:r>
-              <a:rPr sz="1250" b="0">
+            <a:off x="4754880" y="4114800"/>
+            <a:ext cx="6949440" cy="731520"/>
+          </a:xfrm>
+          <a:prstGeom prst="rect">
+            <a:avLst/>
+          </a:prstGeom>
+          <a:noFill/>
+        </p:spPr>
+        <p:txBody>
+          <a:bodyPr wrap="square" lIns="0" rIns="0" tIns="0" bIns="0" anchor="t">
+            <a:spAutoFit/>
+          </a:bodyPr>
+          <a:lstStyle/>
+          <a:p>
+            <a:pPr algn="l">
+              <a:lnSpc>
+                <a:spcPct val="140000"/>
+              </a:lnSpc>
+            </a:pPr>
+            <a:r>
+              <a:rPr sz="1200" b="0" i="0">
                 <a:solidFill>
                   <a:srgbClr val="A0A0A0"/>
                 </a:solidFill>
                 <a:latin typeface="Inter"/>
               </a:rPr>
-              <a:t>Prompts et completions peuvent ne pas persister sur notre infrastructure. On déroule à votre équipe ce qui est loggé et ce qui ne l'est pas.</a:t>
+              <a:t>Code is not used to train models — ni les nôtres, ni ceux des providers tiers. Garantie contractuelle.</a:t>
             </a:r>
           </a:p>
         </p:txBody>
@@ -8623,7 +8797,7 @@
         </p:nvSpPr>
         <p:spPr>
           <a:xfrm>
-            <a:off x="502920" y="5394960"/>
+            <a:off x="502920" y="4828032"/>
             <a:ext cx="11201400" cy="6350"/>
           </a:xfrm>
           <a:prstGeom prst="rect">
@@ -8667,7 +8841,7 @@
         </p:nvSpPr>
         <p:spPr>
           <a:xfrm>
-            <a:off x="502920" y="5486400"/>
+            <a:off x="502920" y="4892040"/>
             <a:ext cx="640080" cy="457200"/>
           </a:xfrm>
           <a:prstGeom prst="rect">
@@ -8687,7 +8861,7 @@
               </a:lnSpc>
             </a:pPr>
             <a:r>
-              <a:rPr sz="1800" b="0">
+              <a:rPr sz="1600" b="0" i="0">
                 <a:solidFill>
                   <a:srgbClr val="6B6B6B"/>
                 </a:solidFill>
@@ -8706,7 +8880,7 @@
         </p:nvSpPr>
         <p:spPr>
           <a:xfrm>
-            <a:off x="1371600" y="5486400"/>
+            <a:off x="1280160" y="4892040"/>
             <a:ext cx="3200400" cy="457200"/>
           </a:xfrm>
           <a:prstGeom prst="rect">
@@ -8726,13 +8900,13 @@
               </a:lnSpc>
             </a:pPr>
             <a:r>
-              <a:rPr sz="1500" b="1">
+              <a:rPr sz="1400" b="1" i="0">
                 <a:solidFill>
                   <a:srgbClr val="F5F5F5"/>
                 </a:solidFill>
                 <a:latin typeface="Inter"/>
               </a:rPr>
-              <a:t>Contrôles enterprise</a:t>
+              <a:t>Requêtes éphémères</a:t>
             </a:r>
           </a:p>
         </p:txBody>
@@ -8745,33 +8919,33 @@
         </p:nvSpPr>
         <p:spPr>
           <a:xfrm>
-            <a:off x="4754880" y="5486400"/>
-            <a:ext cx="6949440" cy="914400"/>
-          </a:xfrm>
-          <a:prstGeom prst="rect">
-            <a:avLst/>
-          </a:prstGeom>
-          <a:noFill/>
-        </p:spPr>
-        <p:txBody>
-          <a:bodyPr wrap="square" lIns="0" rIns="0" tIns="0" bIns="0" anchor="t">
-            <a:spAutoFit/>
-          </a:bodyPr>
-          <a:lstStyle/>
-          <a:p>
-            <a:pPr algn="l">
-              <a:lnSpc>
-                <a:spcPct val="145000"/>
-              </a:lnSpc>
-            </a:pPr>
-            <a:r>
-              <a:rPr sz="1250" b="0">
+            <a:off x="4754880" y="4892040"/>
+            <a:ext cx="6949440" cy="731520"/>
+          </a:xfrm>
+          <a:prstGeom prst="rect">
+            <a:avLst/>
+          </a:prstGeom>
+          <a:noFill/>
+        </p:spPr>
+        <p:txBody>
+          <a:bodyPr wrap="square" lIns="0" rIns="0" tIns="0" bIns="0" anchor="t">
+            <a:spAutoFit/>
+          </a:bodyPr>
+          <a:lstStyle/>
+          <a:p>
+            <a:pPr algn="l">
+              <a:lnSpc>
+                <a:spcPct val="140000"/>
+              </a:lnSpc>
+            </a:pPr>
+            <a:r>
+              <a:rPr sz="1200" b="0" i="0">
                 <a:solidFill>
                   <a:srgbClr val="A0A0A0"/>
                 </a:solidFill>
                 <a:latin typeface="Inter"/>
               </a:rPr>
-              <a:t>SOC 2 Type II · ISO 27001 · SAML SSO · SCIM · export audit logs · policies par équipe. Call security ↔ security sous 7 jours, SIG + résumé pentest envoyés en amont.</a:t>
+              <a:t>Requests are isolated and ephemeral — pas de log persistant des prompts ni des completions en mode privé.</a:t>
             </a:r>
           </a:p>
         </p:txBody>
@@ -8784,7 +8958,168 @@
         </p:nvSpPr>
         <p:spPr>
           <a:xfrm>
-            <a:off x="502920" y="6446520"/>
+            <a:off x="502920" y="5605272"/>
+            <a:ext cx="11201400" cy="6350"/>
+          </a:xfrm>
+          <a:prstGeom prst="rect">
+            <a:avLst/>
+          </a:prstGeom>
+          <a:solidFill>
+            <a:srgbClr val="2A2A2A"/>
+          </a:solidFill>
+          <a:ln>
+            <a:noFill/>
+          </a:ln>
+          <a:effectLst/>
+        </p:spPr>
+        <p:style>
+          <a:lnRef idx="1">
+            <a:schemeClr val="accent1"/>
+          </a:lnRef>
+          <a:fillRef idx="3">
+            <a:schemeClr val="accent1"/>
+          </a:fillRef>
+          <a:effectRef idx="2">
+            <a:schemeClr val="accent1"/>
+          </a:effectRef>
+          <a:fontRef idx="minor">
+            <a:schemeClr val="lt1"/>
+          </a:fontRef>
+        </p:style>
+        <p:txBody>
+          <a:bodyPr rtlCol="0" anchor="ctr"/>
+          <a:lstStyle/>
+          <a:p>
+            <a:pPr algn="ctr"/>
+          </a:p>
+        </p:txBody>
+      </p:sp>
+      <p:sp>
+        <p:nvSpPr>
+          <p:cNvPr id="23" name="TextBox 22"/>
+          <p:cNvSpPr txBox="1"/>
+          <p:nvPr/>
+        </p:nvSpPr>
+        <p:spPr>
+          <a:xfrm>
+            <a:off x="502920" y="5669280"/>
+            <a:ext cx="640080" cy="457200"/>
+          </a:xfrm>
+          <a:prstGeom prst="rect">
+            <a:avLst/>
+          </a:prstGeom>
+          <a:noFill/>
+        </p:spPr>
+        <p:txBody>
+          <a:bodyPr wrap="square" lIns="0" rIns="0" tIns="0" bIns="0" anchor="t">
+            <a:spAutoFit/>
+          </a:bodyPr>
+          <a:lstStyle/>
+          <a:p>
+            <a:pPr algn="l">
+              <a:lnSpc>
+                <a:spcPct val="115000"/>
+              </a:lnSpc>
+            </a:pPr>
+            <a:r>
+              <a:rPr sz="1600" b="0" i="0">
+                <a:solidFill>
+                  <a:srgbClr val="6B6B6B"/>
+                </a:solidFill>
+                <a:latin typeface="JetBrains Mono"/>
+              </a:rPr>
+              <a:t>04</a:t>
+            </a:r>
+          </a:p>
+        </p:txBody>
+      </p:sp>
+      <p:sp>
+        <p:nvSpPr>
+          <p:cNvPr id="24" name="TextBox 23"/>
+          <p:cNvSpPr txBox="1"/>
+          <p:nvPr/>
+        </p:nvSpPr>
+        <p:spPr>
+          <a:xfrm>
+            <a:off x="1280160" y="5669280"/>
+            <a:ext cx="3200400" cy="457200"/>
+          </a:xfrm>
+          <a:prstGeom prst="rect">
+            <a:avLst/>
+          </a:prstGeom>
+          <a:noFill/>
+        </p:spPr>
+        <p:txBody>
+          <a:bodyPr wrap="square" lIns="0" rIns="0" tIns="0" bIns="0" anchor="t">
+            <a:spAutoFit/>
+          </a:bodyPr>
+          <a:lstStyle/>
+          <a:p>
+            <a:pPr algn="l">
+              <a:lnSpc>
+                <a:spcPct val="115000"/>
+              </a:lnSpc>
+            </a:pPr>
+            <a:r>
+              <a:rPr sz="1400" b="1" i="0">
+                <a:solidFill>
+                  <a:srgbClr val="F5F5F5"/>
+                </a:solidFill>
+                <a:latin typeface="Inter"/>
+              </a:rPr>
+              <a:t>Enterprise readiness</a:t>
+            </a:r>
+          </a:p>
+        </p:txBody>
+      </p:sp>
+      <p:sp>
+        <p:nvSpPr>
+          <p:cNvPr id="25" name="TextBox 24"/>
+          <p:cNvSpPr txBox="1"/>
+          <p:nvPr/>
+        </p:nvSpPr>
+        <p:spPr>
+          <a:xfrm>
+            <a:off x="4754880" y="5669280"/>
+            <a:ext cx="6949440" cy="731520"/>
+          </a:xfrm>
+          <a:prstGeom prst="rect">
+            <a:avLst/>
+          </a:prstGeom>
+          <a:noFill/>
+        </p:spPr>
+        <p:txBody>
+          <a:bodyPr wrap="square" lIns="0" rIns="0" tIns="0" bIns="0" anchor="t">
+            <a:spAutoFit/>
+          </a:bodyPr>
+          <a:lstStyle/>
+          <a:p>
+            <a:pPr algn="l">
+              <a:lnSpc>
+                <a:spcPct val="140000"/>
+              </a:lnSpc>
+            </a:pPr>
+            <a:r>
+              <a:rPr sz="1200" b="0" i="0">
+                <a:solidFill>
+                  <a:srgbClr val="A0A0A0"/>
+                </a:solidFill>
+                <a:latin typeface="Inter"/>
+              </a:rPr>
+              <a:t>SOC 2 · contrôles admin · visibilité · SSO. Call security ↔ security sous 7 jours, avec SIG + pentest en amont.</a:t>
+            </a:r>
+          </a:p>
+        </p:txBody>
+      </p:sp>
+      <p:sp>
+        <p:nvSpPr>
+          <p:cNvPr id="26" name="Rectangle 25"/>
+          <p:cNvSpPr/>
+          <p:nvPr/>
+        </p:nvSpPr>
+        <p:spPr>
+          <a:xfrm>
+            <a:off x="502920" y="6382512"/>
             <a:ext cx="11201400" cy="6350"/>
           </a:xfrm>
           <a:prstGeom prst="rect">
@@ -8910,7 +9245,7 @@
               </a:lnSpc>
             </a:pPr>
             <a:r>
-              <a:rPr sz="1100" b="1" spc="20">
+              <a:rPr sz="1100" b="1" i="0" spc="20">
                 <a:solidFill>
                   <a:srgbClr val="F5F5F5"/>
                 </a:solidFill>
@@ -8949,7 +9284,7 @@
               </a:lnSpc>
             </a:pPr>
             <a:r>
-              <a:rPr sz="900" b="0" spc="200">
+              <a:rPr sz="900" b="0" i="0" spc="200">
                 <a:solidFill>
                   <a:srgbClr val="6B6B6B"/>
                 </a:solidFill>
@@ -8988,7 +9323,7 @@
               </a:lnSpc>
             </a:pPr>
             <a:r>
-              <a:rPr sz="900" b="0" spc="80">
+              <a:rPr sz="900" b="0" i="0" spc="80">
                 <a:solidFill>
                   <a:srgbClr val="6B6B6B"/>
                 </a:solidFill>
@@ -9027,13 +9362,13 @@
               </a:lnSpc>
             </a:pPr>
             <a:r>
-              <a:rPr sz="900" b="0" spc="50">
+              <a:rPr sz="900" b="0" i="0" spc="50">
                 <a:solidFill>
                   <a:srgbClr val="6B6B6B"/>
                 </a:solidFill>
                 <a:latin typeface="JetBrains Mono"/>
               </a:rPr>
-              <a:t>15 / 16</a:t>
+              <a:t>15 / 17</a:t>
             </a:r>
           </a:p>
         </p:txBody>
@@ -9110,7 +9445,7 @@
               </a:lnSpc>
             </a:pPr>
             <a:r>
-              <a:rPr sz="1000" b="0" spc="300">
+              <a:rPr sz="1000" b="0" i="0" spc="300">
                 <a:solidFill>
                   <a:srgbClr val="6B6B6B"/>
                 </a:solidFill>
@@ -9149,7 +9484,7 @@
               </a:lnSpc>
             </a:pPr>
             <a:r>
-              <a:rPr sz="3600" b="1">
+              <a:rPr sz="3600" b="1" i="0">
                 <a:solidFill>
                   <a:srgbClr val="F5F5F5"/>
                 </a:solidFill>
@@ -9169,7 +9504,7 @@
         <p:spPr>
           <a:xfrm>
             <a:off x="502920" y="2606040"/>
-            <a:ext cx="10972800" cy="548640"/>
+            <a:ext cx="10972800" cy="640080"/>
           </a:xfrm>
           <a:prstGeom prst="rect">
             <a:avLst/>
@@ -9188,7 +9523,7 @@
               </a:lnSpc>
             </a:pPr>
             <a:r>
-              <a:rPr sz="1500" b="0">
+              <a:rPr sz="1500" b="0" i="0">
                 <a:solidFill>
                   <a:srgbClr val="A0A0A0"/>
                 </a:solidFill>
@@ -9315,7 +9650,7 @@
               </a:lnSpc>
             </a:pPr>
             <a:r>
-              <a:rPr sz="1000" b="0" spc="300">
+              <a:rPr sz="1000" b="0" i="0" spc="300">
                 <a:solidFill>
                   <a:srgbClr val="6B6B6B"/>
                 </a:solidFill>
@@ -9354,7 +9689,7 @@
               </a:lnSpc>
             </a:pPr>
             <a:r>
-              <a:rPr sz="2000" b="1">
+              <a:rPr sz="2000" b="1" i="0">
                 <a:solidFill>
                   <a:srgbClr val="F5F5F5"/>
                 </a:solidFill>
@@ -9393,7 +9728,7 @@
               </a:lnSpc>
             </a:pPr>
             <a:r>
-              <a:rPr sz="1250" b="0">
+              <a:rPr sz="1250" b="0" i="0">
                 <a:solidFill>
                   <a:srgbClr val="A0A0A0"/>
                 </a:solidFill>
@@ -9409,7 +9744,7 @@
               </a:lnSpc>
             </a:pPr>
             <a:r>
-              <a:rPr sz="1250" b="0">
+              <a:rPr sz="1250" b="0" i="0">
                 <a:solidFill>
                   <a:srgbClr val="A0A0A0"/>
                 </a:solidFill>
@@ -9425,7 +9760,7 @@
               </a:lnSpc>
             </a:pPr>
             <a:r>
-              <a:rPr sz="1250" b="0">
+              <a:rPr sz="1250" b="0" i="0">
                 <a:solidFill>
                   <a:srgbClr val="A0A0A0"/>
                 </a:solidFill>
@@ -9441,7 +9776,7 @@
               </a:lnSpc>
             </a:pPr>
             <a:r>
-              <a:rPr sz="1250" b="0">
+              <a:rPr sz="1250" b="0" i="0">
                 <a:solidFill>
                   <a:srgbClr val="A0A0A0"/>
                 </a:solidFill>
@@ -9480,7 +9815,7 @@
               </a:lnSpc>
             </a:pPr>
             <a:r>
-              <a:rPr sz="900" b="0" spc="200">
+              <a:rPr sz="900" b="0" i="0" spc="200">
                 <a:solidFill>
                   <a:srgbClr val="6B6B6B"/>
                 </a:solidFill>
@@ -9519,7 +9854,7 @@
               </a:lnSpc>
             </a:pPr>
             <a:r>
-              <a:rPr sz="1200" b="0">
+              <a:rPr sz="1200" b="0" i="0">
                 <a:solidFill>
                   <a:srgbClr val="F5F5F5"/>
                 </a:solidFill>
@@ -9646,7 +9981,7 @@
               </a:lnSpc>
             </a:pPr>
             <a:r>
-              <a:rPr sz="1000" b="0" spc="300">
+              <a:rPr sz="1000" b="0" i="0" spc="300">
                 <a:solidFill>
                   <a:srgbClr val="6B6B6B"/>
                 </a:solidFill>
@@ -9685,7 +10020,7 @@
               </a:lnSpc>
             </a:pPr>
             <a:r>
-              <a:rPr sz="2000" b="1">
+              <a:rPr sz="2000" b="1" i="0">
                 <a:solidFill>
                   <a:srgbClr val="F5F5F5"/>
                 </a:solidFill>
@@ -9724,7 +10059,7 @@
               </a:lnSpc>
             </a:pPr>
             <a:r>
-              <a:rPr sz="1250" b="0">
+              <a:rPr sz="1250" b="0" i="0">
                 <a:solidFill>
                   <a:srgbClr val="A0A0A0"/>
                 </a:solidFill>
@@ -9740,7 +10075,7 @@
               </a:lnSpc>
             </a:pPr>
             <a:r>
-              <a:rPr sz="1250" b="0">
+              <a:rPr sz="1250" b="0" i="0">
                 <a:solidFill>
                   <a:srgbClr val="A0A0A0"/>
                 </a:solidFill>
@@ -9756,7 +10091,7 @@
               </a:lnSpc>
             </a:pPr>
             <a:r>
-              <a:rPr sz="1250" b="0">
+              <a:rPr sz="1250" b="0" i="0">
                 <a:solidFill>
                   <a:srgbClr val="A0A0A0"/>
                 </a:solidFill>
@@ -9772,7 +10107,7 @@
               </a:lnSpc>
             </a:pPr>
             <a:r>
-              <a:rPr sz="1250" b="0">
+              <a:rPr sz="1250" b="0" i="0">
                 <a:solidFill>
                   <a:srgbClr val="A0A0A0"/>
                 </a:solidFill>
@@ -9811,7 +10146,7 @@
               </a:lnSpc>
             </a:pPr>
             <a:r>
-              <a:rPr sz="900" b="0" spc="200">
+              <a:rPr sz="900" b="0" i="0" spc="200">
                 <a:solidFill>
                   <a:srgbClr val="6B6B6B"/>
                 </a:solidFill>
@@ -9850,7 +10185,7 @@
               </a:lnSpc>
             </a:pPr>
             <a:r>
-              <a:rPr sz="1200" b="0">
+              <a:rPr sz="1200" b="0" i="0">
                 <a:solidFill>
                   <a:srgbClr val="F5F5F5"/>
                 </a:solidFill>
@@ -9889,7 +10224,7 @@
               </a:lnSpc>
             </a:pPr>
             <a:r>
-              <a:rPr sz="1050" b="0" spc="20">
+              <a:rPr sz="1050" b="0" i="1" spc="20">
                 <a:solidFill>
                   <a:srgbClr val="E5E5E5"/>
                 </a:solidFill>
@@ -9990,7 +10325,7 @@
               </a:lnSpc>
             </a:pPr>
             <a:r>
-              <a:rPr sz="1100" b="1" spc="20">
+              <a:rPr sz="1100" b="1" i="0" spc="20">
                 <a:solidFill>
                   <a:srgbClr val="F5F5F5"/>
                 </a:solidFill>
@@ -10029,7 +10364,7 @@
               </a:lnSpc>
             </a:pPr>
             <a:r>
-              <a:rPr sz="900" b="0" spc="200">
+              <a:rPr sz="900" b="0" i="0" spc="200">
                 <a:solidFill>
                   <a:srgbClr val="6B6B6B"/>
                 </a:solidFill>
@@ -10068,7 +10403,7 @@
               </a:lnSpc>
             </a:pPr>
             <a:r>
-              <a:rPr sz="900" b="0" spc="80">
+              <a:rPr sz="900" b="0" i="0" spc="80">
                 <a:solidFill>
                   <a:srgbClr val="6B6B6B"/>
                 </a:solidFill>
@@ -10107,13 +10442,13 @@
               </a:lnSpc>
             </a:pPr>
             <a:r>
-              <a:rPr sz="900" b="0" spc="50">
+              <a:rPr sz="900" b="0" i="0" spc="50">
                 <a:solidFill>
                   <a:srgbClr val="6B6B6B"/>
                 </a:solidFill>
                 <a:latin typeface="JetBrains Mono"/>
               </a:rPr>
-              <a:t>16 / 16</a:t>
+              <a:t>16 / 17</a:t>
             </a:r>
           </a:p>
         </p:txBody>
@@ -10190,13 +10525,13 @@
               </a:lnSpc>
             </a:pPr>
             <a:r>
-              <a:rPr sz="1000" b="0" spc="300">
+              <a:rPr sz="1000" b="0" i="0" spc="300">
                 <a:solidFill>
                   <a:srgbClr val="6B6B6B"/>
                 </a:solidFill>
                 <a:latin typeface="Inter"/>
               </a:rPr>
-              <a:t>À GARDER EN TÊTE</a:t>
+              <a:t>À GARDER EN TÊTE SUR LE CALL</a:t>
             </a:r>
           </a:p>
         </p:txBody>
@@ -10229,7 +10564,7 @@
               </a:lnSpc>
             </a:pPr>
             <a:r>
-              <a:rPr sz="3600" b="1">
+              <a:rPr sz="3600" b="1" i="0">
                 <a:solidFill>
                   <a:srgbClr val="F5F5F5"/>
                 </a:solidFill>
@@ -10249,7 +10584,7 @@
         <p:spPr>
           <a:xfrm>
             <a:off x="502920" y="2606040"/>
-            <a:ext cx="10972800" cy="548640"/>
+            <a:ext cx="10972800" cy="640080"/>
           </a:xfrm>
           <a:prstGeom prst="rect">
             <a:avLst/>
@@ -10268,7 +10603,7 @@
               </a:lnSpc>
             </a:pPr>
             <a:r>
-              <a:rPr sz="1500" b="0">
+              <a:rPr sz="1500" b="0" i="0">
                 <a:solidFill>
                   <a:srgbClr val="A0A0A0"/>
                 </a:solidFill>
@@ -10287,7 +10622,7 @@
         </p:nvSpPr>
         <p:spPr>
           <a:xfrm>
-            <a:off x="502920" y="3383280"/>
+            <a:off x="502920" y="3337560"/>
             <a:ext cx="274320" cy="365760"/>
           </a:xfrm>
           <a:prstGeom prst="rect">
@@ -10307,7 +10642,7 @@
               </a:lnSpc>
             </a:pPr>
             <a:r>
-              <a:rPr sz="1600" b="0">
+              <a:rPr sz="1600" b="0" i="0">
                 <a:solidFill>
                   <a:srgbClr val="6B6B6B"/>
                 </a:solidFill>
@@ -10326,7 +10661,7 @@
         </p:nvSpPr>
         <p:spPr>
           <a:xfrm>
-            <a:off x="822960" y="3383280"/>
+            <a:off x="822960" y="3337560"/>
             <a:ext cx="5212080" cy="365760"/>
           </a:xfrm>
           <a:prstGeom prst="rect">
@@ -10346,13 +10681,13 @@
               </a:lnSpc>
             </a:pPr>
             <a:r>
-              <a:rPr sz="1300" b="1">
+              <a:rPr sz="1300" b="1" i="0">
                 <a:solidFill>
                   <a:srgbClr val="F5F5F5"/>
                 </a:solidFill>
                 <a:latin typeface="Inter"/>
               </a:rPr>
-              <a:t>Pré-envoyer  ·  rien de lourd</a:t>
+              <a:t>Lead with discovery, not pitch</a:t>
             </a:r>
           </a:p>
         </p:txBody>
@@ -10365,8 +10700,8 @@
         </p:nvSpPr>
         <p:spPr>
           <a:xfrm>
-            <a:off x="822960" y="3749040"/>
-            <a:ext cx="5212080" cy="548640"/>
+            <a:off x="822960" y="3703320"/>
+            <a:ext cx="5212080" cy="594360"/>
           </a:xfrm>
           <a:prstGeom prst="rect">
             <a:avLst/>
@@ -10385,13 +10720,13 @@
               </a:lnSpc>
             </a:pPr>
             <a:r>
-              <a:rPr sz="1150" b="0">
+              <a:rPr sz="1150" b="0" i="0">
                 <a:solidFill>
                   <a:srgbClr val="A0A0A0"/>
                 </a:solidFill>
                 <a:latin typeface="Inter"/>
               </a:rPr>
-              <a:t>Email de 2 lignes max — agenda. On garde les artefacts pour le screen-share.</a:t>
+              <a:t>60 % du temps c'est eux qui parlent. On poursuit la compréhension avant l'opinion.</a:t>
             </a:r>
           </a:p>
         </p:txBody>
@@ -10404,7 +10739,7 @@
         </p:nvSpPr>
         <p:spPr>
           <a:xfrm>
-            <a:off x="6355080" y="3383280"/>
+            <a:off x="6355080" y="3337560"/>
             <a:ext cx="274320" cy="365760"/>
           </a:xfrm>
           <a:prstGeom prst="rect">
@@ -10424,7 +10759,7 @@
               </a:lnSpc>
             </a:pPr>
             <a:r>
-              <a:rPr sz="1600" b="0">
+              <a:rPr sz="1600" b="0" i="0">
                 <a:solidFill>
                   <a:srgbClr val="6B6B6B"/>
                 </a:solidFill>
@@ -10443,7 +10778,7 @@
         </p:nvSpPr>
         <p:spPr>
           <a:xfrm>
-            <a:off x="6675120" y="3383280"/>
+            <a:off x="6675120" y="3337560"/>
             <a:ext cx="5212080" cy="365760"/>
           </a:xfrm>
           <a:prstGeom prst="rect">
@@ -10463,13 +10798,13 @@
               </a:lnSpc>
             </a:pPr>
             <a:r>
-              <a:rPr sz="1300" b="1">
+              <a:rPr sz="1300" b="1" i="0">
                 <a:solidFill>
                   <a:srgbClr val="F5F5F5"/>
                 </a:solidFill>
                 <a:latin typeface="Inter"/>
               </a:rPr>
-              <a:t>Citer 2–3 pairs</a:t>
+              <a:t>Opinionated, not scripted</a:t>
             </a:r>
           </a:p>
         </p:txBody>
@@ -10482,8 +10817,8 @@
         </p:nvSpPr>
         <p:spPr>
           <a:xfrm>
-            <a:off x="6675120" y="3749040"/>
-            <a:ext cx="5212080" cy="548640"/>
+            <a:off x="6675120" y="3703320"/>
+            <a:ext cx="5212080" cy="594360"/>
           </a:xfrm>
           <a:prstGeom prst="rect">
             <a:avLst/>
@@ -10502,13 +10837,13 @@
               </a:lnSpc>
             </a:pPr>
             <a:r>
-              <a:rPr sz="1150" b="0">
+              <a:rPr sz="1150" b="0" i="0">
                 <a:solidFill>
                   <a:srgbClr val="A0A0A0"/>
                 </a:solidFill>
                 <a:latin typeface="Inter"/>
               </a:rPr>
-              <a:t>Mêmes taille + stack, en clients enterprise Cursor. UN qui a résolu pile l'objection sécurité du CISO.</a:t>
+              <a:t>Avoir un point de vue. Reconnaître les tradeoffs vs Copilot et Claude Code.</a:t>
             </a:r>
           </a:p>
         </p:txBody>
@@ -10541,7 +10876,7 @@
               </a:lnSpc>
             </a:pPr>
             <a:r>
-              <a:rPr sz="1600" b="0">
+              <a:rPr sz="1600" b="0" i="0">
                 <a:solidFill>
                   <a:srgbClr val="6B6B6B"/>
                 </a:solidFill>
@@ -10580,13 +10915,13 @@
               </a:lnSpc>
             </a:pPr>
             <a:r>
-              <a:rPr sz="1300" b="1">
+              <a:rPr sz="1300" b="1" i="0">
                 <a:solidFill>
                   <a:srgbClr val="F5F5F5"/>
                 </a:solidFill>
                 <a:latin typeface="Inter"/>
               </a:rPr>
-              <a:t>Regarder l'horloge visiblement</a:t>
+              <a:t>Pressure-test l'urgence</a:t>
             </a:r>
           </a:p>
         </p:txBody>
@@ -10600,7 +10935,7 @@
         <p:spPr>
           <a:xfrm>
             <a:off x="822960" y="4709160"/>
-            <a:ext cx="5212080" cy="548640"/>
+            <a:ext cx="5212080" cy="594360"/>
           </a:xfrm>
           <a:prstGeom prst="rect">
             <a:avLst/>
@@ -10619,13 +10954,13 @@
               </a:lnSpc>
             </a:pPr>
             <a:r>
-              <a:rPr sz="1150" b="0">
+              <a:rPr sz="1150" b="0" i="0">
                 <a:solidFill>
                   <a:srgbClr val="A0A0A0"/>
                 </a:solidFill>
                 <a:latin typeface="Inter"/>
               </a:rPr>
-              <a:t>À 17:00 — « je veux respecter votre temps, passons aux next steps. » Discipline = crédibilité.</a:t>
+              <a:t>« Pourquoi maintenant, pas dans 6 mois ? » Si pas de réponse claire = pas de deal.</a:t>
             </a:r>
           </a:p>
         </p:txBody>
@@ -10658,7 +10993,7 @@
               </a:lnSpc>
             </a:pPr>
             <a:r>
-              <a:rPr sz="1600" b="0">
+              <a:rPr sz="1600" b="0" i="0">
                 <a:solidFill>
                   <a:srgbClr val="6B6B6B"/>
                 </a:solidFill>
@@ -10697,13 +11032,13 @@
               </a:lnSpc>
             </a:pPr>
             <a:r>
-              <a:rPr sz="1300" b="1">
+              <a:rPr sz="1300" b="1" i="0">
                 <a:solidFill>
                   <a:srgbClr val="F5F5F5"/>
                 </a:solidFill>
                 <a:latin typeface="Inter"/>
               </a:rPr>
-              <a:t>Followup &lt; 2 h</a:t>
+              <a:t>Adjust par persona</a:t>
             </a:r>
           </a:p>
         </p:txBody>
@@ -10717,7 +11052,7 @@
         <p:spPr>
           <a:xfrm>
             <a:off x="6675120" y="4709160"/>
-            <a:ext cx="5212080" cy="548640"/>
+            <a:ext cx="5212080" cy="594360"/>
           </a:xfrm>
           <a:prstGeom prst="rect">
             <a:avLst/>
@@ -10736,13 +11071,13 @@
               </a:lnSpc>
             </a:pPr>
             <a:r>
-              <a:rPr sz="1150" b="0">
+              <a:rPr sz="1150" b="0" i="0">
                 <a:solidFill>
                   <a:srgbClr val="A0A0A0"/>
                 </a:solidFill>
                 <a:latin typeface="Inter"/>
               </a:rPr>
-              <a:t>Pas 24. Un paragraphe par persona. On reprend ce qu'ILS ont dit, pas ce qu'on a dit.</a:t>
+              <a:t>CTO = vélocité et talent. CISO = privacy mode + SOC 2. Pas la même histoire.</a:t>
             </a:r>
           </a:p>
         </p:txBody>
@@ -10755,7 +11090,7 @@
         </p:nvSpPr>
         <p:spPr>
           <a:xfrm>
-            <a:off x="502920" y="5303520"/>
+            <a:off x="502920" y="5349240"/>
             <a:ext cx="274320" cy="365760"/>
           </a:xfrm>
           <a:prstGeom prst="rect">
@@ -10775,7 +11110,7 @@
               </a:lnSpc>
             </a:pPr>
             <a:r>
-              <a:rPr sz="1600" b="0">
+              <a:rPr sz="1600" b="0" i="0">
                 <a:solidFill>
                   <a:srgbClr val="6B6B6B"/>
                 </a:solidFill>
@@ -10794,7 +11129,7 @@
         </p:nvSpPr>
         <p:spPr>
           <a:xfrm>
-            <a:off x="822960" y="5303520"/>
+            <a:off x="822960" y="5349240"/>
             <a:ext cx="5212080" cy="365760"/>
           </a:xfrm>
           <a:prstGeom prst="rect">
@@ -10814,13 +11149,13 @@
               </a:lnSpc>
             </a:pPr>
             <a:r>
-              <a:rPr sz="1300" b="1">
+              <a:rPr sz="1300" b="1" i="0">
                 <a:solidFill>
                   <a:srgbClr val="F5F5F5"/>
                 </a:solidFill>
                 <a:latin typeface="Inter"/>
               </a:rPr>
-              <a:t>Senior IC opt-out</a:t>
+              <a:t>Customer stories &gt; AI hype</a:t>
             </a:r>
           </a:p>
         </p:txBody>
@@ -10833,8 +11168,8 @@
         </p:nvSpPr>
         <p:spPr>
           <a:xfrm>
-            <a:off x="822960" y="5669280"/>
-            <a:ext cx="5212080" cy="548640"/>
+            <a:off x="822960" y="5715000"/>
+            <a:ext cx="5212080" cy="594360"/>
           </a:xfrm>
           <a:prstGeom prst="rect">
             <a:avLst/>
@@ -10853,13 +11188,13 @@
               </a:lnSpc>
             </a:pPr>
             <a:r>
-              <a:rPr sz="1150" b="0">
+              <a:rPr sz="1150" b="0" i="0">
                 <a:solidFill>
                   <a:srgbClr val="A0A0A0"/>
                 </a:solidFill>
                 <a:latin typeface="Inter"/>
               </a:rPr>
-              <a:t>Si ça sort en discovery — épingler l'info, c'est le wedge le plus puissant pour le pilote.</a:t>
+              <a:t>Citer des pairs (Fortune 1000, ~70 %) plutôt que des claims génériques.</a:t>
             </a:r>
           </a:p>
         </p:txBody>
@@ -10872,7 +11207,7 @@
         </p:nvSpPr>
         <p:spPr>
           <a:xfrm>
-            <a:off x="6355080" y="5303520"/>
+            <a:off x="6355080" y="5349240"/>
             <a:ext cx="274320" cy="365760"/>
           </a:xfrm>
           <a:prstGeom prst="rect">
@@ -10892,7 +11227,7 @@
               </a:lnSpc>
             </a:pPr>
             <a:r>
-              <a:rPr sz="1600" b="0">
+              <a:rPr sz="1600" b="0" i="0">
                 <a:solidFill>
                   <a:srgbClr val="6B6B6B"/>
                 </a:solidFill>
@@ -10911,7 +11246,7 @@
         </p:nvSpPr>
         <p:spPr>
           <a:xfrm>
-            <a:off x="6675120" y="5303520"/>
+            <a:off x="6675120" y="5349240"/>
             <a:ext cx="5212080" cy="365760"/>
           </a:xfrm>
           <a:prstGeom prst="rect">
@@ -10931,7 +11266,7 @@
               </a:lnSpc>
             </a:pPr>
             <a:r>
-              <a:rPr sz="1300" b="1">
+              <a:rPr sz="1300" b="1" i="0">
                 <a:solidFill>
                   <a:srgbClr val="F5F5F5"/>
                 </a:solidFill>
@@ -10950,8 +11285,8 @@
         </p:nvSpPr>
         <p:spPr>
           <a:xfrm>
-            <a:off x="6675120" y="5669280"/>
-            <a:ext cx="5212080" cy="548640"/>
+            <a:off x="6675120" y="5715000"/>
+            <a:ext cx="5212080" cy="594360"/>
           </a:xfrm>
           <a:prstGeom prst="rect">
             <a:avLst/>
@@ -10970,13 +11305,1465 @@
               </a:lnSpc>
             </a:pPr>
             <a:r>
-              <a:rPr sz="1150" b="0">
+              <a:rPr sz="1150" b="0" i="0">
                 <a:solidFill>
                   <a:srgbClr val="A0A0A0"/>
                 </a:solidFill>
                 <a:latin typeface="Inter"/>
               </a:rPr>
               <a:t>Compter 3 secondes après chaque question. Le premier qui parle perd.</a:t>
+            </a:r>
+          </a:p>
+        </p:txBody>
+      </p:sp>
+    </p:spTree>
+  </p:cSld>
+  <p:clrMapOvr>
+    <a:masterClrMapping/>
+  </p:clrMapOvr>
+</p:sld>
+</file>
+
+<file path=ppt/slides/slide17.xml><?xml version="1.0" encoding="utf-8"?>
+<p:sld xmlns:a="http://schemas.openxmlformats.org/drawingml/2006/main" xmlns:p="http://schemas.openxmlformats.org/presentationml/2006/main" xmlns:r="http://schemas.openxmlformats.org/officeDocument/2006/relationships">
+  <p:cSld>
+    <p:spTree>
+      <p:nvGrpSpPr>
+        <p:cNvPr id="1" name=""/>
+        <p:cNvGrpSpPr/>
+        <p:nvPr/>
+      </p:nvGrpSpPr>
+      <p:grpSpPr/>
+      <p:sp>
+        <p:nvSpPr>
+          <p:cNvPr id="2" name="Rectangle 1"/>
+          <p:cNvSpPr/>
+          <p:nvPr/>
+        </p:nvSpPr>
+        <p:spPr>
+          <a:xfrm>
+            <a:off x="0" y="0"/>
+            <a:ext cx="12191695" cy="6858000"/>
+          </a:xfrm>
+          <a:prstGeom prst="rect">
+            <a:avLst/>
+          </a:prstGeom>
+          <a:solidFill>
+            <a:srgbClr val="0A0A0A"/>
+          </a:solidFill>
+          <a:ln>
+            <a:noFill/>
+          </a:ln>
+          <a:effectLst/>
+        </p:spPr>
+        <p:style>
+          <a:lnRef idx="1">
+            <a:schemeClr val="accent1"/>
+          </a:lnRef>
+          <a:fillRef idx="3">
+            <a:schemeClr val="accent1"/>
+          </a:fillRef>
+          <a:effectRef idx="2">
+            <a:schemeClr val="accent1"/>
+          </a:effectRef>
+          <a:fontRef idx="minor">
+            <a:schemeClr val="lt1"/>
+          </a:fontRef>
+        </p:style>
+        <p:txBody>
+          <a:bodyPr rtlCol="0" anchor="ctr"/>
+          <a:lstStyle/>
+          <a:p>
+            <a:pPr algn="ctr"/>
+          </a:p>
+        </p:txBody>
+      </p:sp>
+      <p:sp>
+        <p:nvSpPr>
+          <p:cNvPr id="3" name="TextBox 2"/>
+          <p:cNvSpPr txBox="1"/>
+          <p:nvPr/>
+        </p:nvSpPr>
+        <p:spPr>
+          <a:xfrm>
+            <a:off x="502920" y="320040"/>
+            <a:ext cx="2743200" cy="365760"/>
+          </a:xfrm>
+          <a:prstGeom prst="rect">
+            <a:avLst/>
+          </a:prstGeom>
+          <a:noFill/>
+        </p:spPr>
+        <p:txBody>
+          <a:bodyPr wrap="square" lIns="0" rIns="0" tIns="0" bIns="0" anchor="t">
+            <a:spAutoFit/>
+          </a:bodyPr>
+          <a:lstStyle/>
+          <a:p>
+            <a:pPr algn="l">
+              <a:lnSpc>
+                <a:spcPct val="115000"/>
+              </a:lnSpc>
+            </a:pPr>
+            <a:r>
+              <a:rPr sz="1100" b="1" i="0" spc="20">
+                <a:solidFill>
+                  <a:srgbClr val="F5F5F5"/>
+                </a:solidFill>
+                <a:latin typeface="Inter"/>
+              </a:rPr>
+              <a:t>● cursor</a:t>
+            </a:r>
+          </a:p>
+        </p:txBody>
+      </p:sp>
+      <p:sp>
+        <p:nvSpPr>
+          <p:cNvPr id="4" name="TextBox 3"/>
+          <p:cNvSpPr txBox="1"/>
+          <p:nvPr/>
+        </p:nvSpPr>
+        <p:spPr>
+          <a:xfrm>
+            <a:off x="8686800" y="320040"/>
+            <a:ext cx="3017520" cy="365760"/>
+          </a:xfrm>
+          <a:prstGeom prst="rect">
+            <a:avLst/>
+          </a:prstGeom>
+          <a:noFill/>
+        </p:spPr>
+        <p:txBody>
+          <a:bodyPr wrap="square" lIns="0" rIns="0" tIns="0" bIns="0" anchor="t">
+            <a:spAutoFit/>
+          </a:bodyPr>
+          <a:lstStyle/>
+          <a:p>
+            <a:pPr algn="r">
+              <a:lnSpc>
+                <a:spcPct val="115000"/>
+              </a:lnSpc>
+            </a:pPr>
+            <a:r>
+              <a:rPr sz="900" b="0" i="0" spc="200">
+                <a:solidFill>
+                  <a:srgbClr val="6B6B6B"/>
+                </a:solidFill>
+                <a:latin typeface="Inter"/>
+              </a:rPr>
+              <a:t>META · CANDIDATE-ONLY</a:t>
+            </a:r>
+          </a:p>
+        </p:txBody>
+      </p:sp>
+      <p:sp>
+        <p:nvSpPr>
+          <p:cNvPr id="5" name="TextBox 4"/>
+          <p:cNvSpPr txBox="1"/>
+          <p:nvPr/>
+        </p:nvSpPr>
+        <p:spPr>
+          <a:xfrm>
+            <a:off x="502920" y="6446520"/>
+            <a:ext cx="5486400" cy="274320"/>
+          </a:xfrm>
+          <a:prstGeom prst="rect">
+            <a:avLst/>
+          </a:prstGeom>
+          <a:noFill/>
+        </p:spPr>
+        <p:txBody>
+          <a:bodyPr wrap="square" lIns="0" rIns="0" tIns="0" bIns="0" anchor="t">
+            <a:spAutoFit/>
+          </a:bodyPr>
+          <a:lstStyle/>
+          <a:p>
+            <a:pPr algn="l">
+              <a:lnSpc>
+                <a:spcPct val="115000"/>
+              </a:lnSpc>
+            </a:pPr>
+            <a:r>
+              <a:rPr sz="900" b="0" i="0" spc="80">
+                <a:solidFill>
+                  <a:srgbClr val="6B6B6B"/>
+                </a:solidFill>
+                <a:latin typeface="Inter"/>
+              </a:rPr>
+              <a:t>Cursor × Figma  ·  Discovery CTO / CISO  ·  20 min</a:t>
+            </a:r>
+          </a:p>
+        </p:txBody>
+      </p:sp>
+      <p:sp>
+        <p:nvSpPr>
+          <p:cNvPr id="6" name="TextBox 5"/>
+          <p:cNvSpPr txBox="1"/>
+          <p:nvPr/>
+        </p:nvSpPr>
+        <p:spPr>
+          <a:xfrm>
+            <a:off x="10515600" y="6446520"/>
+            <a:ext cx="1188720" cy="274320"/>
+          </a:xfrm>
+          <a:prstGeom prst="rect">
+            <a:avLst/>
+          </a:prstGeom>
+          <a:noFill/>
+        </p:spPr>
+        <p:txBody>
+          <a:bodyPr wrap="square" lIns="0" rIns="0" tIns="0" bIns="0" anchor="t">
+            <a:spAutoFit/>
+          </a:bodyPr>
+          <a:lstStyle/>
+          <a:p>
+            <a:pPr algn="r">
+              <a:lnSpc>
+                <a:spcPct val="115000"/>
+              </a:lnSpc>
+            </a:pPr>
+            <a:r>
+              <a:rPr sz="900" b="0" i="0" spc="50">
+                <a:solidFill>
+                  <a:srgbClr val="6B6B6B"/>
+                </a:solidFill>
+                <a:latin typeface="JetBrains Mono"/>
+              </a:rPr>
+              <a:t>17 / 17</a:t>
+            </a:r>
+          </a:p>
+        </p:txBody>
+      </p:sp>
+      <p:sp>
+        <p:nvSpPr>
+          <p:cNvPr id="7" name="Rectangle 6"/>
+          <p:cNvSpPr/>
+          <p:nvPr/>
+        </p:nvSpPr>
+        <p:spPr>
+          <a:xfrm>
+            <a:off x="502920" y="777240"/>
+            <a:ext cx="11201400" cy="6350"/>
+          </a:xfrm>
+          <a:prstGeom prst="rect">
+            <a:avLst/>
+          </a:prstGeom>
+          <a:solidFill>
+            <a:srgbClr val="2A2A2A"/>
+          </a:solidFill>
+          <a:ln>
+            <a:noFill/>
+          </a:ln>
+          <a:effectLst/>
+        </p:spPr>
+        <p:style>
+          <a:lnRef idx="1">
+            <a:schemeClr val="accent1"/>
+          </a:lnRef>
+          <a:fillRef idx="3">
+            <a:schemeClr val="accent1"/>
+          </a:fillRef>
+          <a:effectRef idx="2">
+            <a:schemeClr val="accent1"/>
+          </a:effectRef>
+          <a:fontRef idx="minor">
+            <a:schemeClr val="lt1"/>
+          </a:fontRef>
+        </p:style>
+        <p:txBody>
+          <a:bodyPr rtlCol="0" anchor="ctr"/>
+          <a:lstStyle/>
+          <a:p>
+            <a:pPr algn="ctr"/>
+          </a:p>
+        </p:txBody>
+      </p:sp>
+      <p:sp>
+        <p:nvSpPr>
+          <p:cNvPr id="8" name="TextBox 7"/>
+          <p:cNvSpPr txBox="1"/>
+          <p:nvPr/>
+        </p:nvSpPr>
+        <p:spPr>
+          <a:xfrm>
+            <a:off x="502920" y="1143000"/>
+            <a:ext cx="7315200" cy="365760"/>
+          </a:xfrm>
+          <a:prstGeom prst="rect">
+            <a:avLst/>
+          </a:prstGeom>
+          <a:noFill/>
+        </p:spPr>
+        <p:txBody>
+          <a:bodyPr wrap="square" lIns="0" rIns="0" tIns="0" bIns="0" anchor="t">
+            <a:spAutoFit/>
+          </a:bodyPr>
+          <a:lstStyle/>
+          <a:p>
+            <a:pPr algn="l">
+              <a:lnSpc>
+                <a:spcPct val="115000"/>
+              </a:lnSpc>
+            </a:pPr>
+            <a:r>
+              <a:rPr sz="1000" b="0" i="0" spc="300">
+                <a:solidFill>
+                  <a:srgbClr val="6B6B6B"/>
+                </a:solidFill>
+                <a:latin typeface="Inter"/>
+              </a:rPr>
+              <a:t>À MASQUER PENDANT LE ROLE-PLAY</a:t>
+            </a:r>
+          </a:p>
+        </p:txBody>
+      </p:sp>
+      <p:sp>
+        <p:nvSpPr>
+          <p:cNvPr id="9" name="TextBox 8"/>
+          <p:cNvSpPr txBox="1"/>
+          <p:nvPr/>
+        </p:nvSpPr>
+        <p:spPr>
+          <a:xfrm>
+            <a:off x="502920" y="1508760"/>
+            <a:ext cx="10972800" cy="1097280"/>
+          </a:xfrm>
+          <a:prstGeom prst="rect">
+            <a:avLst/>
+          </a:prstGeom>
+          <a:noFill/>
+        </p:spPr>
+        <p:txBody>
+          <a:bodyPr wrap="square" lIns="0" rIns="0" tIns="0" bIns="0" anchor="t">
+            <a:spAutoFit/>
+          </a:bodyPr>
+          <a:lstStyle/>
+          <a:p>
+            <a:pPr algn="l">
+              <a:lnSpc>
+                <a:spcPct val="105000"/>
+              </a:lnSpc>
+            </a:pPr>
+            <a:r>
+              <a:rPr sz="3600" b="1" i="0">
+                <a:solidFill>
+                  <a:srgbClr val="F5F5F5"/>
+                </a:solidFill>
+                <a:latin typeface="Inter"/>
+              </a:rPr>
+              <a:t>Ce qui est vraiment évalué.</a:t>
+            </a:r>
+          </a:p>
+        </p:txBody>
+      </p:sp>
+      <p:sp>
+        <p:nvSpPr>
+          <p:cNvPr id="10" name="TextBox 9"/>
+          <p:cNvSpPr txBox="1"/>
+          <p:nvPr/>
+        </p:nvSpPr>
+        <p:spPr>
+          <a:xfrm>
+            <a:off x="502920" y="2606040"/>
+            <a:ext cx="10972800" cy="640080"/>
+          </a:xfrm>
+          <a:prstGeom prst="rect">
+            <a:avLst/>
+          </a:prstGeom>
+          <a:noFill/>
+        </p:spPr>
+        <p:txBody>
+          <a:bodyPr wrap="square" lIns="0" rIns="0" tIns="0" bIns="0" anchor="t">
+            <a:spAutoFit/>
+          </a:bodyPr>
+          <a:lstStyle/>
+          <a:p>
+            <a:pPr algn="l">
+              <a:lnSpc>
+                <a:spcPct val="130000"/>
+              </a:lnSpc>
+            </a:pPr>
+            <a:r>
+              <a:rPr sz="1500" b="0" i="0">
+                <a:solidFill>
+                  <a:srgbClr val="A0A0A0"/>
+                </a:solidFill>
+                <a:latin typeface="Inter"/>
+              </a:rPr>
+              <a:t>Cinq signaux à émettre activement pendant les 20 minutes.</a:t>
+            </a:r>
+          </a:p>
+        </p:txBody>
+      </p:sp>
+      <p:sp>
+        <p:nvSpPr>
+          <p:cNvPr id="11" name="Rectangle 10"/>
+          <p:cNvSpPr/>
+          <p:nvPr/>
+        </p:nvSpPr>
+        <p:spPr>
+          <a:xfrm>
+            <a:off x="502920" y="3291840"/>
+            <a:ext cx="5577840" cy="3108960"/>
+          </a:xfrm>
+          <a:prstGeom prst="rect">
+            <a:avLst/>
+          </a:prstGeom>
+          <a:solidFill>
+            <a:srgbClr val="141414"/>
+          </a:solidFill>
+          <a:ln>
+            <a:noFill/>
+          </a:ln>
+          <a:effectLst/>
+        </p:spPr>
+        <p:style>
+          <a:lnRef idx="1">
+            <a:schemeClr val="accent1"/>
+          </a:lnRef>
+          <a:fillRef idx="3">
+            <a:schemeClr val="accent1"/>
+          </a:fillRef>
+          <a:effectRef idx="2">
+            <a:schemeClr val="accent1"/>
+          </a:effectRef>
+          <a:fontRef idx="minor">
+            <a:schemeClr val="lt1"/>
+          </a:fontRef>
+        </p:style>
+        <p:txBody>
+          <a:bodyPr rtlCol="0" anchor="ctr"/>
+          <a:lstStyle/>
+          <a:p>
+            <a:pPr algn="ctr"/>
+          </a:p>
+        </p:txBody>
+      </p:sp>
+      <p:sp>
+        <p:nvSpPr>
+          <p:cNvPr id="12" name="Rectangle 11"/>
+          <p:cNvSpPr/>
+          <p:nvPr/>
+        </p:nvSpPr>
+        <p:spPr>
+          <a:xfrm>
+            <a:off x="502920" y="3291840"/>
+            <a:ext cx="5577840" cy="6350"/>
+          </a:xfrm>
+          <a:prstGeom prst="rect">
+            <a:avLst/>
+          </a:prstGeom>
+          <a:solidFill>
+            <a:srgbClr val="2A2A2A"/>
+          </a:solidFill>
+          <a:ln>
+            <a:noFill/>
+          </a:ln>
+          <a:effectLst/>
+        </p:spPr>
+        <p:style>
+          <a:lnRef idx="1">
+            <a:schemeClr val="accent1"/>
+          </a:lnRef>
+          <a:fillRef idx="3">
+            <a:schemeClr val="accent1"/>
+          </a:fillRef>
+          <a:effectRef idx="2">
+            <a:schemeClr val="accent1"/>
+          </a:effectRef>
+          <a:fontRef idx="minor">
+            <a:schemeClr val="lt1"/>
+          </a:fontRef>
+        </p:style>
+        <p:txBody>
+          <a:bodyPr rtlCol="0" anchor="ctr"/>
+          <a:lstStyle/>
+          <a:p>
+            <a:pPr algn="ctr"/>
+          </a:p>
+        </p:txBody>
+      </p:sp>
+      <p:sp>
+        <p:nvSpPr>
+          <p:cNvPr id="13" name="TextBox 12"/>
+          <p:cNvSpPr txBox="1"/>
+          <p:nvPr/>
+        </p:nvSpPr>
+        <p:spPr>
+          <a:xfrm>
+            <a:off x="777240" y="3429000"/>
+            <a:ext cx="5029200" cy="365760"/>
+          </a:xfrm>
+          <a:prstGeom prst="rect">
+            <a:avLst/>
+          </a:prstGeom>
+          <a:noFill/>
+        </p:spPr>
+        <p:txBody>
+          <a:bodyPr wrap="square" lIns="0" rIns="0" tIns="0" bIns="0" anchor="t">
+            <a:spAutoFit/>
+          </a:bodyPr>
+          <a:lstStyle/>
+          <a:p>
+            <a:pPr algn="l">
+              <a:lnSpc>
+                <a:spcPct val="115000"/>
+              </a:lnSpc>
+            </a:pPr>
+            <a:r>
+              <a:rPr sz="1000" b="0" i="0" spc="300">
+                <a:solidFill>
+                  <a:srgbClr val="6B6B6B"/>
+                </a:solidFill>
+                <a:latin typeface="Inter"/>
+              </a:rPr>
+              <a:t>SIGNAUX FORTS — à émettre</a:t>
+            </a:r>
+          </a:p>
+        </p:txBody>
+      </p:sp>
+      <p:sp>
+        <p:nvSpPr>
+          <p:cNvPr id="14" name="TextBox 13"/>
+          <p:cNvSpPr txBox="1"/>
+          <p:nvPr/>
+        </p:nvSpPr>
+        <p:spPr>
+          <a:xfrm>
+            <a:off x="777240" y="3794760"/>
+            <a:ext cx="274320" cy="365760"/>
+          </a:xfrm>
+          <a:prstGeom prst="rect">
+            <a:avLst/>
+          </a:prstGeom>
+          <a:noFill/>
+        </p:spPr>
+        <p:txBody>
+          <a:bodyPr wrap="square" lIns="0" rIns="0" tIns="0" bIns="0" anchor="t">
+            <a:spAutoFit/>
+          </a:bodyPr>
+          <a:lstStyle/>
+          <a:p>
+            <a:pPr algn="l">
+              <a:lnSpc>
+                <a:spcPct val="115000"/>
+              </a:lnSpc>
+            </a:pPr>
+            <a:r>
+              <a:rPr sz="1200" b="0" i="0">
+                <a:solidFill>
+                  <a:srgbClr val="E5E5E5"/>
+                </a:solidFill>
+                <a:latin typeface="Inter"/>
+              </a:rPr>
+              <a:t>●</a:t>
+            </a:r>
+          </a:p>
+        </p:txBody>
+      </p:sp>
+      <p:sp>
+        <p:nvSpPr>
+          <p:cNvPr id="15" name="TextBox 14"/>
+          <p:cNvSpPr txBox="1"/>
+          <p:nvPr/>
+        </p:nvSpPr>
+        <p:spPr>
+          <a:xfrm>
+            <a:off x="1097280" y="3794760"/>
+            <a:ext cx="4846320" cy="365760"/>
+          </a:xfrm>
+          <a:prstGeom prst="rect">
+            <a:avLst/>
+          </a:prstGeom>
+          <a:noFill/>
+        </p:spPr>
+        <p:txBody>
+          <a:bodyPr wrap="square" lIns="0" rIns="0" tIns="0" bIns="0" anchor="t">
+            <a:spAutoFit/>
+          </a:bodyPr>
+          <a:lstStyle/>
+          <a:p>
+            <a:pPr algn="l">
+              <a:lnSpc>
+                <a:spcPct val="140000"/>
+              </a:lnSpc>
+            </a:pPr>
+            <a:r>
+              <a:rPr sz="1300" b="0" i="0">
+                <a:solidFill>
+                  <a:srgbClr val="F5F5F5"/>
+                </a:solidFill>
+                <a:latin typeface="Inter"/>
+              </a:rPr>
+              <a:t>Prepared — preuves de recherche Figma</a:t>
+            </a:r>
+          </a:p>
+        </p:txBody>
+      </p:sp>
+      <p:sp>
+        <p:nvSpPr>
+          <p:cNvPr id="16" name="TextBox 15"/>
+          <p:cNvSpPr txBox="1"/>
+          <p:nvPr/>
+        </p:nvSpPr>
+        <p:spPr>
+          <a:xfrm>
+            <a:off x="777240" y="4206240"/>
+            <a:ext cx="274320" cy="365760"/>
+          </a:xfrm>
+          <a:prstGeom prst="rect">
+            <a:avLst/>
+          </a:prstGeom>
+          <a:noFill/>
+        </p:spPr>
+        <p:txBody>
+          <a:bodyPr wrap="square" lIns="0" rIns="0" tIns="0" bIns="0" anchor="t">
+            <a:spAutoFit/>
+          </a:bodyPr>
+          <a:lstStyle/>
+          <a:p>
+            <a:pPr algn="l">
+              <a:lnSpc>
+                <a:spcPct val="115000"/>
+              </a:lnSpc>
+            </a:pPr>
+            <a:r>
+              <a:rPr sz="1200" b="0" i="0">
+                <a:solidFill>
+                  <a:srgbClr val="E5E5E5"/>
+                </a:solidFill>
+                <a:latin typeface="Inter"/>
+              </a:rPr>
+              <a:t>●</a:t>
+            </a:r>
+          </a:p>
+        </p:txBody>
+      </p:sp>
+      <p:sp>
+        <p:nvSpPr>
+          <p:cNvPr id="17" name="TextBox 16"/>
+          <p:cNvSpPr txBox="1"/>
+          <p:nvPr/>
+        </p:nvSpPr>
+        <p:spPr>
+          <a:xfrm>
+            <a:off x="1097280" y="4206240"/>
+            <a:ext cx="4846320" cy="365760"/>
+          </a:xfrm>
+          <a:prstGeom prst="rect">
+            <a:avLst/>
+          </a:prstGeom>
+          <a:noFill/>
+        </p:spPr>
+        <p:txBody>
+          <a:bodyPr wrap="square" lIns="0" rIns="0" tIns="0" bIns="0" anchor="t">
+            <a:spAutoFit/>
+          </a:bodyPr>
+          <a:lstStyle/>
+          <a:p>
+            <a:pPr algn="l">
+              <a:lnSpc>
+                <a:spcPct val="140000"/>
+              </a:lnSpc>
+            </a:pPr>
+            <a:r>
+              <a:rPr sz="1300" b="0" i="0">
+                <a:solidFill>
+                  <a:srgbClr val="F5F5F5"/>
+                </a:solidFill>
+                <a:latin typeface="Inter"/>
+              </a:rPr>
+              <a:t>Self-aware — nommer ses tradeoffs</a:t>
+            </a:r>
+          </a:p>
+        </p:txBody>
+      </p:sp>
+      <p:sp>
+        <p:nvSpPr>
+          <p:cNvPr id="18" name="TextBox 17"/>
+          <p:cNvSpPr txBox="1"/>
+          <p:nvPr/>
+        </p:nvSpPr>
+        <p:spPr>
+          <a:xfrm>
+            <a:off x="777240" y="4617720"/>
+            <a:ext cx="274320" cy="365760"/>
+          </a:xfrm>
+          <a:prstGeom prst="rect">
+            <a:avLst/>
+          </a:prstGeom>
+          <a:noFill/>
+        </p:spPr>
+        <p:txBody>
+          <a:bodyPr wrap="square" lIns="0" rIns="0" tIns="0" bIns="0" anchor="t">
+            <a:spAutoFit/>
+          </a:bodyPr>
+          <a:lstStyle/>
+          <a:p>
+            <a:pPr algn="l">
+              <a:lnSpc>
+                <a:spcPct val="115000"/>
+              </a:lnSpc>
+            </a:pPr>
+            <a:r>
+              <a:rPr sz="1200" b="0" i="0">
+                <a:solidFill>
+                  <a:srgbClr val="E5E5E5"/>
+                </a:solidFill>
+                <a:latin typeface="Inter"/>
+              </a:rPr>
+              <a:t>●</a:t>
+            </a:r>
+          </a:p>
+        </p:txBody>
+      </p:sp>
+      <p:sp>
+        <p:nvSpPr>
+          <p:cNvPr id="19" name="TextBox 18"/>
+          <p:cNvSpPr txBox="1"/>
+          <p:nvPr/>
+        </p:nvSpPr>
+        <p:spPr>
+          <a:xfrm>
+            <a:off x="1097280" y="4617720"/>
+            <a:ext cx="4846320" cy="365760"/>
+          </a:xfrm>
+          <a:prstGeom prst="rect">
+            <a:avLst/>
+          </a:prstGeom>
+          <a:noFill/>
+        </p:spPr>
+        <p:txBody>
+          <a:bodyPr wrap="square" lIns="0" rIns="0" tIns="0" bIns="0" anchor="t">
+            <a:spAutoFit/>
+          </a:bodyPr>
+          <a:lstStyle/>
+          <a:p>
+            <a:pPr algn="l">
+              <a:lnSpc>
+                <a:spcPct val="140000"/>
+              </a:lnSpc>
+            </a:pPr>
+            <a:r>
+              <a:rPr sz="1300" b="0" i="0">
+                <a:solidFill>
+                  <a:srgbClr val="F5F5F5"/>
+                </a:solidFill>
+                <a:latin typeface="Inter"/>
+              </a:rPr>
+              <a:t>Composed — gérer le silence</a:t>
+            </a:r>
+          </a:p>
+        </p:txBody>
+      </p:sp>
+      <p:sp>
+        <p:nvSpPr>
+          <p:cNvPr id="20" name="TextBox 19"/>
+          <p:cNvSpPr txBox="1"/>
+          <p:nvPr/>
+        </p:nvSpPr>
+        <p:spPr>
+          <a:xfrm>
+            <a:off x="777240" y="5029200"/>
+            <a:ext cx="274320" cy="365760"/>
+          </a:xfrm>
+          <a:prstGeom prst="rect">
+            <a:avLst/>
+          </a:prstGeom>
+          <a:noFill/>
+        </p:spPr>
+        <p:txBody>
+          <a:bodyPr wrap="square" lIns="0" rIns="0" tIns="0" bIns="0" anchor="t">
+            <a:spAutoFit/>
+          </a:bodyPr>
+          <a:lstStyle/>
+          <a:p>
+            <a:pPr algn="l">
+              <a:lnSpc>
+                <a:spcPct val="115000"/>
+              </a:lnSpc>
+            </a:pPr>
+            <a:r>
+              <a:rPr sz="1200" b="0" i="0">
+                <a:solidFill>
+                  <a:srgbClr val="E5E5E5"/>
+                </a:solidFill>
+                <a:latin typeface="Inter"/>
+              </a:rPr>
+              <a:t>●</a:t>
+            </a:r>
+          </a:p>
+        </p:txBody>
+      </p:sp>
+      <p:sp>
+        <p:nvSpPr>
+          <p:cNvPr id="21" name="TextBox 20"/>
+          <p:cNvSpPr txBox="1"/>
+          <p:nvPr/>
+        </p:nvSpPr>
+        <p:spPr>
+          <a:xfrm>
+            <a:off x="1097280" y="5029200"/>
+            <a:ext cx="4846320" cy="365760"/>
+          </a:xfrm>
+          <a:prstGeom prst="rect">
+            <a:avLst/>
+          </a:prstGeom>
+          <a:noFill/>
+        </p:spPr>
+        <p:txBody>
+          <a:bodyPr wrap="square" lIns="0" rIns="0" tIns="0" bIns="0" anchor="t">
+            <a:spAutoFit/>
+          </a:bodyPr>
+          <a:lstStyle/>
+          <a:p>
+            <a:pPr algn="l">
+              <a:lnSpc>
+                <a:spcPct val="140000"/>
+              </a:lnSpc>
+            </a:pPr>
+            <a:r>
+              <a:rPr sz="1300" b="0" i="0">
+                <a:solidFill>
+                  <a:srgbClr val="F5F5F5"/>
+                </a:solidFill>
+                <a:latin typeface="Inter"/>
+              </a:rPr>
+              <a:t>Tactically sharp — questions ciblées</a:t>
+            </a:r>
+          </a:p>
+        </p:txBody>
+      </p:sp>
+      <p:sp>
+        <p:nvSpPr>
+          <p:cNvPr id="22" name="TextBox 21"/>
+          <p:cNvSpPr txBox="1"/>
+          <p:nvPr/>
+        </p:nvSpPr>
+        <p:spPr>
+          <a:xfrm>
+            <a:off x="777240" y="5440680"/>
+            <a:ext cx="274320" cy="365760"/>
+          </a:xfrm>
+          <a:prstGeom prst="rect">
+            <a:avLst/>
+          </a:prstGeom>
+          <a:noFill/>
+        </p:spPr>
+        <p:txBody>
+          <a:bodyPr wrap="square" lIns="0" rIns="0" tIns="0" bIns="0" anchor="t">
+            <a:spAutoFit/>
+          </a:bodyPr>
+          <a:lstStyle/>
+          <a:p>
+            <a:pPr algn="l">
+              <a:lnSpc>
+                <a:spcPct val="115000"/>
+              </a:lnSpc>
+            </a:pPr>
+            <a:r>
+              <a:rPr sz="1200" b="0" i="0">
+                <a:solidFill>
+                  <a:srgbClr val="E5E5E5"/>
+                </a:solidFill>
+                <a:latin typeface="Inter"/>
+              </a:rPr>
+              <a:t>●</a:t>
+            </a:r>
+          </a:p>
+        </p:txBody>
+      </p:sp>
+      <p:sp>
+        <p:nvSpPr>
+          <p:cNvPr id="23" name="TextBox 22"/>
+          <p:cNvSpPr txBox="1"/>
+          <p:nvPr/>
+        </p:nvSpPr>
+        <p:spPr>
+          <a:xfrm>
+            <a:off x="1097280" y="5440680"/>
+            <a:ext cx="4846320" cy="365760"/>
+          </a:xfrm>
+          <a:prstGeom prst="rect">
+            <a:avLst/>
+          </a:prstGeom>
+          <a:noFill/>
+        </p:spPr>
+        <p:txBody>
+          <a:bodyPr wrap="square" lIns="0" rIns="0" tIns="0" bIns="0" anchor="t">
+            <a:spAutoFit/>
+          </a:bodyPr>
+          <a:lstStyle/>
+          <a:p>
+            <a:pPr algn="l">
+              <a:lnSpc>
+                <a:spcPct val="140000"/>
+              </a:lnSpc>
+            </a:pPr>
+            <a:r>
+              <a:rPr sz="1300" b="0" i="0">
+                <a:solidFill>
+                  <a:srgbClr val="F5F5F5"/>
+                </a:solidFill>
+                <a:latin typeface="Inter"/>
+              </a:rPr>
+              <a:t>Coachable — accueillir le pushback</a:t>
+            </a:r>
+          </a:p>
+        </p:txBody>
+      </p:sp>
+      <p:sp>
+        <p:nvSpPr>
+          <p:cNvPr id="24" name="Rectangle 23"/>
+          <p:cNvSpPr/>
+          <p:nvPr/>
+        </p:nvSpPr>
+        <p:spPr>
+          <a:xfrm>
+            <a:off x="6172200" y="3291840"/>
+            <a:ext cx="5577840" cy="3108960"/>
+          </a:xfrm>
+          <a:prstGeom prst="rect">
+            <a:avLst/>
+          </a:prstGeom>
+          <a:solidFill>
+            <a:srgbClr val="141414"/>
+          </a:solidFill>
+          <a:ln>
+            <a:noFill/>
+          </a:ln>
+          <a:effectLst/>
+        </p:spPr>
+        <p:style>
+          <a:lnRef idx="1">
+            <a:schemeClr val="accent1"/>
+          </a:lnRef>
+          <a:fillRef idx="3">
+            <a:schemeClr val="accent1"/>
+          </a:fillRef>
+          <a:effectRef idx="2">
+            <a:schemeClr val="accent1"/>
+          </a:effectRef>
+          <a:fontRef idx="minor">
+            <a:schemeClr val="lt1"/>
+          </a:fontRef>
+        </p:style>
+        <p:txBody>
+          <a:bodyPr rtlCol="0" anchor="ctr"/>
+          <a:lstStyle/>
+          <a:p>
+            <a:pPr algn="ctr"/>
+          </a:p>
+        </p:txBody>
+      </p:sp>
+      <p:sp>
+        <p:nvSpPr>
+          <p:cNvPr id="25" name="Rectangle 24"/>
+          <p:cNvSpPr/>
+          <p:nvPr/>
+        </p:nvSpPr>
+        <p:spPr>
+          <a:xfrm>
+            <a:off x="6172200" y="3291840"/>
+            <a:ext cx="5577840" cy="6350"/>
+          </a:xfrm>
+          <a:prstGeom prst="rect">
+            <a:avLst/>
+          </a:prstGeom>
+          <a:solidFill>
+            <a:srgbClr val="2A2A2A"/>
+          </a:solidFill>
+          <a:ln>
+            <a:noFill/>
+          </a:ln>
+          <a:effectLst/>
+        </p:spPr>
+        <p:style>
+          <a:lnRef idx="1">
+            <a:schemeClr val="accent1"/>
+          </a:lnRef>
+          <a:fillRef idx="3">
+            <a:schemeClr val="accent1"/>
+          </a:fillRef>
+          <a:effectRef idx="2">
+            <a:schemeClr val="accent1"/>
+          </a:effectRef>
+          <a:fontRef idx="minor">
+            <a:schemeClr val="lt1"/>
+          </a:fontRef>
+        </p:style>
+        <p:txBody>
+          <a:bodyPr rtlCol="0" anchor="ctr"/>
+          <a:lstStyle/>
+          <a:p>
+            <a:pPr algn="ctr"/>
+          </a:p>
+        </p:txBody>
+      </p:sp>
+      <p:sp>
+        <p:nvSpPr>
+          <p:cNvPr id="26" name="TextBox 25"/>
+          <p:cNvSpPr txBox="1"/>
+          <p:nvPr/>
+        </p:nvSpPr>
+        <p:spPr>
+          <a:xfrm>
+            <a:off x="6446520" y="3429000"/>
+            <a:ext cx="5029200" cy="365760"/>
+          </a:xfrm>
+          <a:prstGeom prst="rect">
+            <a:avLst/>
+          </a:prstGeom>
+          <a:noFill/>
+        </p:spPr>
+        <p:txBody>
+          <a:bodyPr wrap="square" lIns="0" rIns="0" tIns="0" bIns="0" anchor="t">
+            <a:spAutoFit/>
+          </a:bodyPr>
+          <a:lstStyle/>
+          <a:p>
+            <a:pPr algn="l">
+              <a:lnSpc>
+                <a:spcPct val="115000"/>
+              </a:lnSpc>
+            </a:pPr>
+            <a:r>
+              <a:rPr sz="1000" b="0" i="0" spc="300">
+                <a:solidFill>
+                  <a:srgbClr val="6B6B6B"/>
+                </a:solidFill>
+                <a:latin typeface="Inter"/>
+              </a:rPr>
+              <a:t>SIGNAUX FAIBLES — à éviter</a:t>
+            </a:r>
+          </a:p>
+        </p:txBody>
+      </p:sp>
+      <p:sp>
+        <p:nvSpPr>
+          <p:cNvPr id="27" name="TextBox 26"/>
+          <p:cNvSpPr txBox="1"/>
+          <p:nvPr/>
+        </p:nvSpPr>
+        <p:spPr>
+          <a:xfrm>
+            <a:off x="6446520" y="3794760"/>
+            <a:ext cx="274320" cy="365760"/>
+          </a:xfrm>
+          <a:prstGeom prst="rect">
+            <a:avLst/>
+          </a:prstGeom>
+          <a:noFill/>
+        </p:spPr>
+        <p:txBody>
+          <a:bodyPr wrap="square" lIns="0" rIns="0" tIns="0" bIns="0" anchor="t">
+            <a:spAutoFit/>
+          </a:bodyPr>
+          <a:lstStyle/>
+          <a:p>
+            <a:pPr algn="l">
+              <a:lnSpc>
+                <a:spcPct val="115000"/>
+              </a:lnSpc>
+            </a:pPr>
+            <a:r>
+              <a:rPr sz="1200" b="0" i="0">
+                <a:solidFill>
+                  <a:srgbClr val="6B6B6B"/>
+                </a:solidFill>
+                <a:latin typeface="Inter"/>
+              </a:rPr>
+              <a:t>●</a:t>
+            </a:r>
+          </a:p>
+        </p:txBody>
+      </p:sp>
+      <p:sp>
+        <p:nvSpPr>
+          <p:cNvPr id="28" name="TextBox 27"/>
+          <p:cNvSpPr txBox="1"/>
+          <p:nvPr/>
+        </p:nvSpPr>
+        <p:spPr>
+          <a:xfrm>
+            <a:off x="6766560" y="3794760"/>
+            <a:ext cx="4846320" cy="365760"/>
+          </a:xfrm>
+          <a:prstGeom prst="rect">
+            <a:avLst/>
+          </a:prstGeom>
+          <a:noFill/>
+        </p:spPr>
+        <p:txBody>
+          <a:bodyPr wrap="square" lIns="0" rIns="0" tIns="0" bIns="0" anchor="t">
+            <a:spAutoFit/>
+          </a:bodyPr>
+          <a:lstStyle/>
+          <a:p>
+            <a:pPr algn="l">
+              <a:lnSpc>
+                <a:spcPct val="140000"/>
+              </a:lnSpc>
+            </a:pPr>
+            <a:r>
+              <a:rPr sz="1300" b="0" i="0">
+                <a:solidFill>
+                  <a:srgbClr val="F5F5F5"/>
+                </a:solidFill>
+                <a:latin typeface="Inter"/>
+              </a:rPr>
+              <a:t>Feature dump</a:t>
+            </a:r>
+          </a:p>
+        </p:txBody>
+      </p:sp>
+      <p:sp>
+        <p:nvSpPr>
+          <p:cNvPr id="29" name="TextBox 28"/>
+          <p:cNvSpPr txBox="1"/>
+          <p:nvPr/>
+        </p:nvSpPr>
+        <p:spPr>
+          <a:xfrm>
+            <a:off x="6446520" y="4206240"/>
+            <a:ext cx="274320" cy="365760"/>
+          </a:xfrm>
+          <a:prstGeom prst="rect">
+            <a:avLst/>
+          </a:prstGeom>
+          <a:noFill/>
+        </p:spPr>
+        <p:txBody>
+          <a:bodyPr wrap="square" lIns="0" rIns="0" tIns="0" bIns="0" anchor="t">
+            <a:spAutoFit/>
+          </a:bodyPr>
+          <a:lstStyle/>
+          <a:p>
+            <a:pPr algn="l">
+              <a:lnSpc>
+                <a:spcPct val="115000"/>
+              </a:lnSpc>
+            </a:pPr>
+            <a:r>
+              <a:rPr sz="1200" b="0" i="0">
+                <a:solidFill>
+                  <a:srgbClr val="6B6B6B"/>
+                </a:solidFill>
+                <a:latin typeface="Inter"/>
+              </a:rPr>
+              <a:t>●</a:t>
+            </a:r>
+          </a:p>
+        </p:txBody>
+      </p:sp>
+      <p:sp>
+        <p:nvSpPr>
+          <p:cNvPr id="30" name="TextBox 29"/>
+          <p:cNvSpPr txBox="1"/>
+          <p:nvPr/>
+        </p:nvSpPr>
+        <p:spPr>
+          <a:xfrm>
+            <a:off x="6766560" y="4206240"/>
+            <a:ext cx="4846320" cy="365760"/>
+          </a:xfrm>
+          <a:prstGeom prst="rect">
+            <a:avLst/>
+          </a:prstGeom>
+          <a:noFill/>
+        </p:spPr>
+        <p:txBody>
+          <a:bodyPr wrap="square" lIns="0" rIns="0" tIns="0" bIns="0" anchor="t">
+            <a:spAutoFit/>
+          </a:bodyPr>
+          <a:lstStyle/>
+          <a:p>
+            <a:pPr algn="l">
+              <a:lnSpc>
+                <a:spcPct val="140000"/>
+              </a:lnSpc>
+            </a:pPr>
+            <a:r>
+              <a:rPr sz="1300" b="0" i="0">
+                <a:solidFill>
+                  <a:srgbClr val="F5F5F5"/>
+                </a:solidFill>
+                <a:latin typeface="Inter"/>
+              </a:rPr>
+              <a:t>AI hype générique</a:t>
+            </a:r>
+          </a:p>
+        </p:txBody>
+      </p:sp>
+      <p:sp>
+        <p:nvSpPr>
+          <p:cNvPr id="31" name="TextBox 30"/>
+          <p:cNvSpPr txBox="1"/>
+          <p:nvPr/>
+        </p:nvSpPr>
+        <p:spPr>
+          <a:xfrm>
+            <a:off x="6446520" y="4617720"/>
+            <a:ext cx="274320" cy="365760"/>
+          </a:xfrm>
+          <a:prstGeom prst="rect">
+            <a:avLst/>
+          </a:prstGeom>
+          <a:noFill/>
+        </p:spPr>
+        <p:txBody>
+          <a:bodyPr wrap="square" lIns="0" rIns="0" tIns="0" bIns="0" anchor="t">
+            <a:spAutoFit/>
+          </a:bodyPr>
+          <a:lstStyle/>
+          <a:p>
+            <a:pPr algn="l">
+              <a:lnSpc>
+                <a:spcPct val="115000"/>
+              </a:lnSpc>
+            </a:pPr>
+            <a:r>
+              <a:rPr sz="1200" b="0" i="0">
+                <a:solidFill>
+                  <a:srgbClr val="6B6B6B"/>
+                </a:solidFill>
+                <a:latin typeface="Inter"/>
+              </a:rPr>
+              <a:t>●</a:t>
+            </a:r>
+          </a:p>
+        </p:txBody>
+      </p:sp>
+      <p:sp>
+        <p:nvSpPr>
+          <p:cNvPr id="32" name="TextBox 31"/>
+          <p:cNvSpPr txBox="1"/>
+          <p:nvPr/>
+        </p:nvSpPr>
+        <p:spPr>
+          <a:xfrm>
+            <a:off x="6766560" y="4617720"/>
+            <a:ext cx="4846320" cy="365760"/>
+          </a:xfrm>
+          <a:prstGeom prst="rect">
+            <a:avLst/>
+          </a:prstGeom>
+          <a:noFill/>
+        </p:spPr>
+        <p:txBody>
+          <a:bodyPr wrap="square" lIns="0" rIns="0" tIns="0" bIns="0" anchor="t">
+            <a:spAutoFit/>
+          </a:bodyPr>
+          <a:lstStyle/>
+          <a:p>
+            <a:pPr algn="l">
+              <a:lnSpc>
+                <a:spcPct val="140000"/>
+              </a:lnSpc>
+            </a:pPr>
+            <a:r>
+              <a:rPr sz="1300" b="0" i="0">
+                <a:solidFill>
+                  <a:srgbClr val="F5F5F5"/>
+                </a:solidFill>
+                <a:latin typeface="Inter"/>
+              </a:rPr>
+              <a:t>Overconfident sans grounding</a:t>
+            </a:r>
+          </a:p>
+        </p:txBody>
+      </p:sp>
+      <p:sp>
+        <p:nvSpPr>
+          <p:cNvPr id="33" name="TextBox 32"/>
+          <p:cNvSpPr txBox="1"/>
+          <p:nvPr/>
+        </p:nvSpPr>
+        <p:spPr>
+          <a:xfrm>
+            <a:off x="6446520" y="5029200"/>
+            <a:ext cx="274320" cy="365760"/>
+          </a:xfrm>
+          <a:prstGeom prst="rect">
+            <a:avLst/>
+          </a:prstGeom>
+          <a:noFill/>
+        </p:spPr>
+        <p:txBody>
+          <a:bodyPr wrap="square" lIns="0" rIns="0" tIns="0" bIns="0" anchor="t">
+            <a:spAutoFit/>
+          </a:bodyPr>
+          <a:lstStyle/>
+          <a:p>
+            <a:pPr algn="l">
+              <a:lnSpc>
+                <a:spcPct val="115000"/>
+              </a:lnSpc>
+            </a:pPr>
+            <a:r>
+              <a:rPr sz="1200" b="0" i="0">
+                <a:solidFill>
+                  <a:srgbClr val="6B6B6B"/>
+                </a:solidFill>
+                <a:latin typeface="Inter"/>
+              </a:rPr>
+              <a:t>●</a:t>
+            </a:r>
+          </a:p>
+        </p:txBody>
+      </p:sp>
+      <p:sp>
+        <p:nvSpPr>
+          <p:cNvPr id="34" name="TextBox 33"/>
+          <p:cNvSpPr txBox="1"/>
+          <p:nvPr/>
+        </p:nvSpPr>
+        <p:spPr>
+          <a:xfrm>
+            <a:off x="6766560" y="5029200"/>
+            <a:ext cx="4846320" cy="365760"/>
+          </a:xfrm>
+          <a:prstGeom prst="rect">
+            <a:avLst/>
+          </a:prstGeom>
+          <a:noFill/>
+        </p:spPr>
+        <p:txBody>
+          <a:bodyPr wrap="square" lIns="0" rIns="0" tIns="0" bIns="0" anchor="t">
+            <a:spAutoFit/>
+          </a:bodyPr>
+          <a:lstStyle/>
+          <a:p>
+            <a:pPr algn="l">
+              <a:lnSpc>
+                <a:spcPct val="140000"/>
+              </a:lnSpc>
+            </a:pPr>
+            <a:r>
+              <a:rPr sz="1300" b="0" i="0">
+                <a:solidFill>
+                  <a:srgbClr val="F5F5F5"/>
+                </a:solidFill>
+                <a:latin typeface="Inter"/>
+              </a:rPr>
+              <a:t>Pitcher avant d'avoir compris</a:t>
+            </a:r>
+          </a:p>
+        </p:txBody>
+      </p:sp>
+      <p:sp>
+        <p:nvSpPr>
+          <p:cNvPr id="35" name="TextBox 34"/>
+          <p:cNvSpPr txBox="1"/>
+          <p:nvPr/>
+        </p:nvSpPr>
+        <p:spPr>
+          <a:xfrm>
+            <a:off x="6446520" y="5440680"/>
+            <a:ext cx="274320" cy="365760"/>
+          </a:xfrm>
+          <a:prstGeom prst="rect">
+            <a:avLst/>
+          </a:prstGeom>
+          <a:noFill/>
+        </p:spPr>
+        <p:txBody>
+          <a:bodyPr wrap="square" lIns="0" rIns="0" tIns="0" bIns="0" anchor="t">
+            <a:spAutoFit/>
+          </a:bodyPr>
+          <a:lstStyle/>
+          <a:p>
+            <a:pPr algn="l">
+              <a:lnSpc>
+                <a:spcPct val="115000"/>
+              </a:lnSpc>
+            </a:pPr>
+            <a:r>
+              <a:rPr sz="1200" b="0" i="0">
+                <a:solidFill>
+                  <a:srgbClr val="6B6B6B"/>
+                </a:solidFill>
+                <a:latin typeface="Inter"/>
+              </a:rPr>
+              <a:t>●</a:t>
+            </a:r>
+          </a:p>
+        </p:txBody>
+      </p:sp>
+      <p:sp>
+        <p:nvSpPr>
+          <p:cNvPr id="36" name="TextBox 35"/>
+          <p:cNvSpPr txBox="1"/>
+          <p:nvPr/>
+        </p:nvSpPr>
+        <p:spPr>
+          <a:xfrm>
+            <a:off x="6766560" y="5440680"/>
+            <a:ext cx="4846320" cy="365760"/>
+          </a:xfrm>
+          <a:prstGeom prst="rect">
+            <a:avLst/>
+          </a:prstGeom>
+          <a:noFill/>
+        </p:spPr>
+        <p:txBody>
+          <a:bodyPr wrap="square" lIns="0" rIns="0" tIns="0" bIns="0" anchor="t">
+            <a:spAutoFit/>
+          </a:bodyPr>
+          <a:lstStyle/>
+          <a:p>
+            <a:pPr algn="l">
+              <a:lnSpc>
+                <a:spcPct val="140000"/>
+              </a:lnSpc>
+            </a:pPr>
+            <a:r>
+              <a:rPr sz="1300" b="0" i="0">
+                <a:solidFill>
+                  <a:srgbClr val="F5F5F5"/>
+                </a:solidFill>
+                <a:latin typeface="Inter"/>
+              </a:rPr>
+              <a:t>Donner une opinion sans contexte</a:t>
+            </a:r>
+          </a:p>
+        </p:txBody>
+      </p:sp>
+      <p:sp>
+        <p:nvSpPr>
+          <p:cNvPr id="37" name="TextBox 36"/>
+          <p:cNvSpPr txBox="1"/>
+          <p:nvPr/>
+        </p:nvSpPr>
+        <p:spPr>
+          <a:xfrm>
+            <a:off x="502920" y="6263640"/>
+            <a:ext cx="10972800" cy="274320"/>
+          </a:xfrm>
+          <a:prstGeom prst="rect">
+            <a:avLst/>
+          </a:prstGeom>
+          <a:noFill/>
+        </p:spPr>
+        <p:txBody>
+          <a:bodyPr wrap="square" lIns="0" rIns="0" tIns="0" bIns="0" anchor="t">
+            <a:spAutoFit/>
+          </a:bodyPr>
+          <a:lstStyle/>
+          <a:p>
+            <a:pPr algn="l">
+              <a:lnSpc>
+                <a:spcPct val="115000"/>
+              </a:lnSpc>
+            </a:pPr>
+            <a:r>
+              <a:rPr sz="1050" b="0" i="1" spc="20">
+                <a:solidFill>
+                  <a:srgbClr val="E5E5E5"/>
+                </a:solidFill>
+                <a:latin typeface="Inter"/>
+              </a:rPr>
+              <a:t>Rubrique : prepared · self-aware · composed · tactically sharp · coachable.</a:t>
             </a:r>
           </a:p>
         </p:txBody>
@@ -11071,7 +12858,7 @@
               </a:lnSpc>
             </a:pPr>
             <a:r>
-              <a:rPr sz="1100" b="1" spc="20">
+              <a:rPr sz="1100" b="1" i="0" spc="20">
                 <a:solidFill>
                   <a:srgbClr val="F5F5F5"/>
                 </a:solidFill>
@@ -11110,7 +12897,7 @@
               </a:lnSpc>
             </a:pPr>
             <a:r>
-              <a:rPr sz="900" b="0" spc="200">
+              <a:rPr sz="900" b="0" i="0" spc="200">
                 <a:solidFill>
                   <a:srgbClr val="6B6B6B"/>
                 </a:solidFill>
@@ -11149,7 +12936,7 @@
               </a:lnSpc>
             </a:pPr>
             <a:r>
-              <a:rPr sz="900" b="0" spc="80">
+              <a:rPr sz="900" b="0" i="0" spc="80">
                 <a:solidFill>
                   <a:srgbClr val="6B6B6B"/>
                 </a:solidFill>
@@ -11188,13 +12975,13 @@
               </a:lnSpc>
             </a:pPr>
             <a:r>
-              <a:rPr sz="900" b="0" spc="50">
+              <a:rPr sz="900" b="0" i="0" spc="50">
                 <a:solidFill>
                   <a:srgbClr val="6B6B6B"/>
                 </a:solidFill>
                 <a:latin typeface="JetBrains Mono"/>
               </a:rPr>
-              <a:t>02 / 16</a:t>
+              <a:t>02 / 17</a:t>
             </a:r>
           </a:p>
         </p:txBody>
@@ -11271,7 +13058,7 @@
               </a:lnSpc>
             </a:pPr>
             <a:r>
-              <a:rPr sz="1000" b="0" spc="300">
+              <a:rPr sz="1000" b="0" i="0" spc="300">
                 <a:solidFill>
                   <a:srgbClr val="6B6B6B"/>
                 </a:solidFill>
@@ -11310,7 +13097,7 @@
               </a:lnSpc>
             </a:pPr>
             <a:r>
-              <a:rPr sz="3600" b="1">
+              <a:rPr sz="3600" b="1" i="0">
                 <a:solidFill>
                   <a:srgbClr val="F5F5F5"/>
                 </a:solidFill>
@@ -11330,7 +13117,7 @@
         <p:spPr>
           <a:xfrm>
             <a:off x="502920" y="2606040"/>
-            <a:ext cx="10972800" cy="548640"/>
+            <a:ext cx="10972800" cy="640080"/>
           </a:xfrm>
           <a:prstGeom prst="rect">
             <a:avLst/>
@@ -11349,7 +13136,7 @@
               </a:lnSpc>
             </a:pPr>
             <a:r>
-              <a:rPr sz="1500" b="0">
+              <a:rPr sz="1500" b="0" i="0">
                 <a:solidFill>
                   <a:srgbClr val="A0A0A0"/>
                 </a:solidFill>
@@ -11388,7 +13175,7 @@
               </a:lnSpc>
             </a:pPr>
             <a:r>
-              <a:rPr sz="1200" b="0">
+              <a:rPr sz="1200" b="0" i="0">
                 <a:solidFill>
                   <a:srgbClr val="6B6B6B"/>
                 </a:solidFill>
@@ -11427,7 +13214,7 @@
               </a:lnSpc>
             </a:pPr>
             <a:r>
-              <a:rPr sz="1500" b="1">
+              <a:rPr sz="1500" b="1" i="0">
                 <a:solidFill>
                   <a:srgbClr val="F5F5F5"/>
                 </a:solidFill>
@@ -11466,7 +13253,7 @@
               </a:lnSpc>
             </a:pPr>
             <a:r>
-              <a:rPr sz="1300" b="0">
+              <a:rPr sz="1300" b="0" i="0">
                 <a:solidFill>
                   <a:srgbClr val="A0A0A0"/>
                 </a:solidFill>
@@ -11549,7 +13336,7 @@
               </a:lnSpc>
             </a:pPr>
             <a:r>
-              <a:rPr sz="1200" b="0">
+              <a:rPr sz="1200" b="0" i="0">
                 <a:solidFill>
                   <a:srgbClr val="6B6B6B"/>
                 </a:solidFill>
@@ -11588,7 +13375,7 @@
               </a:lnSpc>
             </a:pPr>
             <a:r>
-              <a:rPr sz="1500" b="1">
+              <a:rPr sz="1500" b="1" i="0">
                 <a:solidFill>
                   <a:srgbClr val="F5F5F5"/>
                 </a:solidFill>
@@ -11627,7 +13414,7 @@
               </a:lnSpc>
             </a:pPr>
             <a:r>
-              <a:rPr sz="1300" b="0">
+              <a:rPr sz="1300" b="0" i="0">
                 <a:solidFill>
                   <a:srgbClr val="A0A0A0"/>
                 </a:solidFill>
@@ -11710,7 +13497,7 @@
               </a:lnSpc>
             </a:pPr>
             <a:r>
-              <a:rPr sz="1200" b="0">
+              <a:rPr sz="1200" b="0" i="0">
                 <a:solidFill>
                   <a:srgbClr val="6B6B6B"/>
                 </a:solidFill>
@@ -11749,7 +13536,7 @@
               </a:lnSpc>
             </a:pPr>
             <a:r>
-              <a:rPr sz="1500" b="1">
+              <a:rPr sz="1500" b="1" i="0">
                 <a:solidFill>
                   <a:srgbClr val="F5F5F5"/>
                 </a:solidFill>
@@ -11788,7 +13575,7 @@
               </a:lnSpc>
             </a:pPr>
             <a:r>
-              <a:rPr sz="1300" b="0">
+              <a:rPr sz="1300" b="0" i="0">
                 <a:solidFill>
                   <a:srgbClr val="A0A0A0"/>
                 </a:solidFill>
@@ -11871,7 +13658,7 @@
               </a:lnSpc>
             </a:pPr>
             <a:r>
-              <a:rPr sz="1200" b="0">
+              <a:rPr sz="1200" b="0" i="0">
                 <a:solidFill>
                   <a:srgbClr val="6B6B6B"/>
                 </a:solidFill>
@@ -11910,7 +13697,7 @@
               </a:lnSpc>
             </a:pPr>
             <a:r>
-              <a:rPr sz="1500" b="1">
+              <a:rPr sz="1500" b="1" i="0">
                 <a:solidFill>
                   <a:srgbClr val="F5F5F5"/>
                 </a:solidFill>
@@ -11949,7 +13736,7 @@
               </a:lnSpc>
             </a:pPr>
             <a:r>
-              <a:rPr sz="1300" b="0">
+              <a:rPr sz="1300" b="0" i="0">
                 <a:solidFill>
                   <a:srgbClr val="A0A0A0"/>
                 </a:solidFill>
@@ -12032,7 +13819,7 @@
               </a:lnSpc>
             </a:pPr>
             <a:r>
-              <a:rPr sz="1200" b="0">
+              <a:rPr sz="1200" b="0" i="0">
                 <a:solidFill>
                   <a:srgbClr val="6B6B6B"/>
                 </a:solidFill>
@@ -12071,7 +13858,7 @@
               </a:lnSpc>
             </a:pPr>
             <a:r>
-              <a:rPr sz="1500" b="1">
+              <a:rPr sz="1500" b="1" i="0">
                 <a:solidFill>
                   <a:srgbClr val="F5F5F5"/>
                 </a:solidFill>
@@ -12110,7 +13897,7 @@
               </a:lnSpc>
             </a:pPr>
             <a:r>
-              <a:rPr sz="1300" b="0">
+              <a:rPr sz="1300" b="0" i="0">
                 <a:solidFill>
                   <a:srgbClr val="A0A0A0"/>
                 </a:solidFill>
@@ -12255,7 +14042,7 @@
               </a:lnSpc>
             </a:pPr>
             <a:r>
-              <a:rPr sz="1100" b="1" spc="20">
+              <a:rPr sz="1100" b="1" i="0" spc="20">
                 <a:solidFill>
                   <a:srgbClr val="F5F5F5"/>
                 </a:solidFill>
@@ -12294,7 +14081,7 @@
               </a:lnSpc>
             </a:pPr>
             <a:r>
-              <a:rPr sz="900" b="0" spc="200">
+              <a:rPr sz="900" b="0" i="0" spc="200">
                 <a:solidFill>
                   <a:srgbClr val="6B6B6B"/>
                 </a:solidFill>
@@ -12333,7 +14120,7 @@
               </a:lnSpc>
             </a:pPr>
             <a:r>
-              <a:rPr sz="900" b="0" spc="80">
+              <a:rPr sz="900" b="0" i="0" spc="80">
                 <a:solidFill>
                   <a:srgbClr val="6B6B6B"/>
                 </a:solidFill>
@@ -12372,13 +14159,13 @@
               </a:lnSpc>
             </a:pPr>
             <a:r>
-              <a:rPr sz="900" b="0" spc="50">
+              <a:rPr sz="900" b="0" i="0" spc="50">
                 <a:solidFill>
                   <a:srgbClr val="6B6B6B"/>
                 </a:solidFill>
                 <a:latin typeface="JetBrains Mono"/>
               </a:rPr>
-              <a:t>03 / 16</a:t>
+              <a:t>03 / 17</a:t>
             </a:r>
           </a:p>
         </p:txBody>
@@ -12455,7 +14242,7 @@
               </a:lnSpc>
             </a:pPr>
             <a:r>
-              <a:rPr sz="1000" b="0" spc="300">
+              <a:rPr sz="1000" b="0" i="0" spc="300">
                 <a:solidFill>
                   <a:srgbClr val="6B6B6B"/>
                 </a:solidFill>
@@ -12494,7 +14281,7 @@
               </a:lnSpc>
             </a:pPr>
             <a:r>
-              <a:rPr sz="3600" b="1">
+              <a:rPr sz="3600" b="1" i="0">
                 <a:solidFill>
                   <a:srgbClr val="F5F5F5"/>
                 </a:solidFill>
@@ -12514,7 +14301,7 @@
         <p:spPr>
           <a:xfrm>
             <a:off x="502920" y="2606040"/>
-            <a:ext cx="10972800" cy="548640"/>
+            <a:ext cx="10972800" cy="640080"/>
           </a:xfrm>
           <a:prstGeom prst="rect">
             <a:avLst/>
@@ -12533,7 +14320,7 @@
               </a:lnSpc>
             </a:pPr>
             <a:r>
-              <a:rPr sz="1500" b="0">
+              <a:rPr sz="1500" b="0" i="0">
                 <a:solidFill>
                   <a:srgbClr val="A0A0A0"/>
                 </a:solidFill>
@@ -12660,7 +14447,7 @@
               </a:lnSpc>
             </a:pPr>
             <a:r>
-              <a:rPr sz="1000" b="0" spc="300">
+              <a:rPr sz="1000" b="0" i="0" spc="300">
                 <a:solidFill>
                   <a:srgbClr val="6B6B6B"/>
                 </a:solidFill>
@@ -12699,7 +14486,7 @@
               </a:lnSpc>
             </a:pPr>
             <a:r>
-              <a:rPr sz="1200" b="0">
+              <a:rPr sz="1200" b="0" i="0">
                 <a:solidFill>
                   <a:srgbClr val="F5F5F5"/>
                 </a:solidFill>
@@ -12715,7 +14502,7 @@
               </a:lnSpc>
             </a:pPr>
             <a:r>
-              <a:rPr sz="1200" b="0">
+              <a:rPr sz="1200" b="0" i="0">
                 <a:solidFill>
                   <a:srgbClr val="F5F5F5"/>
                 </a:solidFill>
@@ -12731,7 +14518,7 @@
               </a:lnSpc>
             </a:pPr>
             <a:r>
-              <a:rPr sz="1200" b="0">
+              <a:rPr sz="1200" b="0" i="0">
                 <a:solidFill>
                   <a:srgbClr val="F5F5F5"/>
                 </a:solidFill>
@@ -12747,7 +14534,7 @@
               </a:lnSpc>
             </a:pPr>
             <a:r>
-              <a:rPr sz="1200" b="0">
+              <a:rPr sz="1200" b="0" i="0">
                 <a:solidFill>
                   <a:srgbClr val="F5F5F5"/>
                 </a:solidFill>
@@ -12874,7 +14661,7 @@
               </a:lnSpc>
             </a:pPr>
             <a:r>
-              <a:rPr sz="1000" b="0" spc="300">
+              <a:rPr sz="1000" b="0" i="0" spc="300">
                 <a:solidFill>
                   <a:srgbClr val="6B6B6B"/>
                 </a:solidFill>
@@ -12913,7 +14700,7 @@
               </a:lnSpc>
             </a:pPr>
             <a:r>
-              <a:rPr sz="1200" b="0">
+              <a:rPr sz="1200" b="0" i="0">
                 <a:solidFill>
                   <a:srgbClr val="F5F5F5"/>
                 </a:solidFill>
@@ -12929,7 +14716,7 @@
               </a:lnSpc>
             </a:pPr>
             <a:r>
-              <a:rPr sz="1200" b="0">
+              <a:rPr sz="1200" b="0" i="0">
                 <a:solidFill>
                   <a:srgbClr val="F5F5F5"/>
                 </a:solidFill>
@@ -12945,7 +14732,7 @@
               </a:lnSpc>
             </a:pPr>
             <a:r>
-              <a:rPr sz="1200" b="0">
+              <a:rPr sz="1200" b="0" i="0">
                 <a:solidFill>
                   <a:srgbClr val="F5F5F5"/>
                 </a:solidFill>
@@ -12961,7 +14748,7 @@
               </a:lnSpc>
             </a:pPr>
             <a:r>
-              <a:rPr sz="1200" b="0">
+              <a:rPr sz="1200" b="0" i="0">
                 <a:solidFill>
                   <a:srgbClr val="F5F5F5"/>
                 </a:solidFill>
@@ -13088,7 +14875,7 @@
               </a:lnSpc>
             </a:pPr>
             <a:r>
-              <a:rPr sz="1000" b="0" spc="300">
+              <a:rPr sz="1000" b="0" i="0" spc="300">
                 <a:solidFill>
                   <a:srgbClr val="6B6B6B"/>
                 </a:solidFill>
@@ -13127,7 +14914,7 @@
               </a:lnSpc>
             </a:pPr>
             <a:r>
-              <a:rPr sz="1200" b="0">
+              <a:rPr sz="1200" b="0" i="0">
                 <a:solidFill>
                   <a:srgbClr val="F5F5F5"/>
                 </a:solidFill>
@@ -13143,7 +14930,7 @@
               </a:lnSpc>
             </a:pPr>
             <a:r>
-              <a:rPr sz="1200" b="0">
+              <a:rPr sz="1200" b="0" i="0">
                 <a:solidFill>
                   <a:srgbClr val="F5F5F5"/>
                 </a:solidFill>
@@ -13159,7 +14946,7 @@
               </a:lnSpc>
             </a:pPr>
             <a:r>
-              <a:rPr sz="1200" b="0">
+              <a:rPr sz="1200" b="0" i="0">
                 <a:solidFill>
                   <a:srgbClr val="F5F5F5"/>
                 </a:solidFill>
@@ -13175,7 +14962,7 @@
               </a:lnSpc>
             </a:pPr>
             <a:r>
-              <a:rPr sz="1200" b="0">
+              <a:rPr sz="1200" b="0" i="0">
                 <a:solidFill>
                   <a:srgbClr val="F5F5F5"/>
                 </a:solidFill>
@@ -13302,7 +15089,7 @@
               </a:lnSpc>
             </a:pPr>
             <a:r>
-              <a:rPr sz="1000" b="0" spc="300">
+              <a:rPr sz="1000" b="0" i="0" spc="300">
                 <a:solidFill>
                   <a:srgbClr val="6B6B6B"/>
                 </a:solidFill>
@@ -13341,7 +15128,7 @@
               </a:lnSpc>
             </a:pPr>
             <a:r>
-              <a:rPr sz="1200" b="0">
+              <a:rPr sz="1200" b="0" i="0">
                 <a:solidFill>
                   <a:srgbClr val="F5F5F5"/>
                 </a:solidFill>
@@ -13357,7 +15144,7 @@
               </a:lnSpc>
             </a:pPr>
             <a:r>
-              <a:rPr sz="1200" b="0">
+              <a:rPr sz="1200" b="0" i="0">
                 <a:solidFill>
                   <a:srgbClr val="F5F5F5"/>
                 </a:solidFill>
@@ -13373,7 +15160,7 @@
               </a:lnSpc>
             </a:pPr>
             <a:r>
-              <a:rPr sz="1200" b="0">
+              <a:rPr sz="1200" b="0" i="0">
                 <a:solidFill>
                   <a:srgbClr val="F5F5F5"/>
                 </a:solidFill>
@@ -13389,7 +15176,7 @@
               </a:lnSpc>
             </a:pPr>
             <a:r>
-              <a:rPr sz="1200" b="0">
+              <a:rPr sz="1200" b="0" i="0">
                 <a:solidFill>
                   <a:srgbClr val="F5F5F5"/>
                 </a:solidFill>
@@ -13490,7 +15277,7 @@
               </a:lnSpc>
             </a:pPr>
             <a:r>
-              <a:rPr sz="1100" b="1" spc="20">
+              <a:rPr sz="1100" b="1" i="0" spc="20">
                 <a:solidFill>
                   <a:srgbClr val="F5F5F5"/>
                 </a:solidFill>
@@ -13529,7 +15316,7 @@
               </a:lnSpc>
             </a:pPr>
             <a:r>
-              <a:rPr sz="900" b="0" spc="200">
+              <a:rPr sz="900" b="0" i="0" spc="200">
                 <a:solidFill>
                   <a:srgbClr val="6B6B6B"/>
                 </a:solidFill>
@@ -13568,7 +15355,7 @@
               </a:lnSpc>
             </a:pPr>
             <a:r>
-              <a:rPr sz="900" b="0" spc="80">
+              <a:rPr sz="900" b="0" i="0" spc="80">
                 <a:solidFill>
                   <a:srgbClr val="6B6B6B"/>
                 </a:solidFill>
@@ -13607,13 +15394,13 @@
               </a:lnSpc>
             </a:pPr>
             <a:r>
-              <a:rPr sz="900" b="0" spc="50">
+              <a:rPr sz="900" b="0" i="0" spc="50">
                 <a:solidFill>
                   <a:srgbClr val="6B6B6B"/>
                 </a:solidFill>
                 <a:latin typeface="JetBrains Mono"/>
               </a:rPr>
-              <a:t>04 / 16</a:t>
+              <a:t>04 / 17</a:t>
             </a:r>
           </a:p>
         </p:txBody>
@@ -13690,7 +15477,7 @@
               </a:lnSpc>
             </a:pPr>
             <a:r>
-              <a:rPr sz="1000" b="0" spc="300">
+              <a:rPr sz="1000" b="0" i="0" spc="300">
                 <a:solidFill>
                   <a:srgbClr val="6B6B6B"/>
                 </a:solidFill>
@@ -13729,7 +15516,7 @@
               </a:lnSpc>
             </a:pPr>
             <a:r>
-              <a:rPr sz="3600" b="1">
+              <a:rPr sz="3600" b="1" i="0">
                 <a:solidFill>
                   <a:srgbClr val="F5F5F5"/>
                 </a:solidFill>
@@ -13749,7 +15536,7 @@
         <p:spPr>
           <a:xfrm>
             <a:off x="502920" y="2606040"/>
-            <a:ext cx="10972800" cy="548640"/>
+            <a:ext cx="10972800" cy="640080"/>
           </a:xfrm>
           <a:prstGeom prst="rect">
             <a:avLst/>
@@ -13768,7 +15555,7 @@
               </a:lnSpc>
             </a:pPr>
             <a:r>
-              <a:rPr sz="1500" b="0">
+              <a:rPr sz="1500" b="0" i="0">
                 <a:solidFill>
                   <a:srgbClr val="A0A0A0"/>
                 </a:solidFill>
@@ -13895,7 +15682,7 @@
               </a:lnSpc>
             </a:pPr>
             <a:r>
-              <a:rPr sz="1000" b="0" spc="300">
+              <a:rPr sz="1000" b="0" i="0" spc="300">
                 <a:solidFill>
                   <a:srgbClr val="6B6B6B"/>
                 </a:solidFill>
@@ -13934,7 +15721,7 @@
               </a:lnSpc>
             </a:pPr>
             <a:r>
-              <a:rPr sz="2000" b="1">
+              <a:rPr sz="2000" b="1" i="0">
                 <a:solidFill>
                   <a:srgbClr val="F5F5F5"/>
                 </a:solidFill>
@@ -13973,7 +15760,7 @@
               </a:lnSpc>
             </a:pPr>
             <a:r>
-              <a:rPr sz="900" b="0" spc="200">
+              <a:rPr sz="900" b="0" i="0" spc="200">
                 <a:solidFill>
                   <a:srgbClr val="6B6B6B"/>
                 </a:solidFill>
@@ -14012,7 +15799,7 @@
               </a:lnSpc>
             </a:pPr>
             <a:r>
-              <a:rPr sz="1200" b="0">
+              <a:rPr sz="1200" b="0" i="0">
                 <a:solidFill>
                   <a:srgbClr val="F5F5F5"/>
                 </a:solidFill>
@@ -14051,7 +15838,7 @@
               </a:lnSpc>
             </a:pPr>
             <a:r>
-              <a:rPr sz="900" b="0" spc="200">
+              <a:rPr sz="900" b="0" i="0" spc="200">
                 <a:solidFill>
                   <a:srgbClr val="6B6B6B"/>
                 </a:solidFill>
@@ -14090,7 +15877,7 @@
               </a:lnSpc>
             </a:pPr>
             <a:r>
-              <a:rPr sz="1200" b="0">
+              <a:rPr sz="1200" b="0" i="0">
                 <a:solidFill>
                   <a:srgbClr val="F5F5F5"/>
                 </a:solidFill>
@@ -14129,7 +15916,7 @@
               </a:lnSpc>
             </a:pPr>
             <a:r>
-              <a:rPr sz="900" b="0" spc="200">
+              <a:rPr sz="900" b="0" i="0" spc="200">
                 <a:solidFill>
                   <a:srgbClr val="6B6B6B"/>
                 </a:solidFill>
@@ -14168,7 +15955,7 @@
               </a:lnSpc>
             </a:pPr>
             <a:r>
-              <a:rPr sz="1200" b="0">
+              <a:rPr sz="1200" b="0" i="0">
                 <a:solidFill>
                   <a:srgbClr val="F5F5F5"/>
                 </a:solidFill>
@@ -14207,7 +15994,7 @@
               </a:lnSpc>
             </a:pPr>
             <a:r>
-              <a:rPr sz="900" b="0" spc="200">
+              <a:rPr sz="900" b="0" i="0" spc="200">
                 <a:solidFill>
                   <a:srgbClr val="6B6B6B"/>
                 </a:solidFill>
@@ -14246,7 +16033,7 @@
               </a:lnSpc>
             </a:pPr>
             <a:r>
-              <a:rPr sz="1200" b="0">
+              <a:rPr sz="1200" b="0" i="0">
                 <a:solidFill>
                   <a:srgbClr val="F5F5F5"/>
                 </a:solidFill>
@@ -14373,7 +16160,7 @@
               </a:lnSpc>
             </a:pPr>
             <a:r>
-              <a:rPr sz="1000" b="0" spc="300">
+              <a:rPr sz="1000" b="0" i="0" spc="300">
                 <a:solidFill>
                   <a:srgbClr val="6B6B6B"/>
                 </a:solidFill>
@@ -14412,7 +16199,7 @@
               </a:lnSpc>
             </a:pPr>
             <a:r>
-              <a:rPr sz="2000" b="1">
+              <a:rPr sz="2000" b="1" i="0">
                 <a:solidFill>
                   <a:srgbClr val="F5F5F5"/>
                 </a:solidFill>
@@ -14451,7 +16238,7 @@
               </a:lnSpc>
             </a:pPr>
             <a:r>
-              <a:rPr sz="900" b="0" spc="200">
+              <a:rPr sz="900" b="0" i="0" spc="200">
                 <a:solidFill>
                   <a:srgbClr val="6B6B6B"/>
                 </a:solidFill>
@@ -14490,7 +16277,7 @@
               </a:lnSpc>
             </a:pPr>
             <a:r>
-              <a:rPr sz="1200" b="0">
+              <a:rPr sz="1200" b="0" i="0">
                 <a:solidFill>
                   <a:srgbClr val="F5F5F5"/>
                 </a:solidFill>
@@ -14529,7 +16316,7 @@
               </a:lnSpc>
             </a:pPr>
             <a:r>
-              <a:rPr sz="900" b="0" spc="200">
+              <a:rPr sz="900" b="0" i="0" spc="200">
                 <a:solidFill>
                   <a:srgbClr val="6B6B6B"/>
                 </a:solidFill>
@@ -14568,7 +16355,7 @@
               </a:lnSpc>
             </a:pPr>
             <a:r>
-              <a:rPr sz="1200" b="0">
+              <a:rPr sz="1200" b="0" i="0">
                 <a:solidFill>
                   <a:srgbClr val="F5F5F5"/>
                 </a:solidFill>
@@ -14607,7 +16394,7 @@
               </a:lnSpc>
             </a:pPr>
             <a:r>
-              <a:rPr sz="900" b="0" spc="200">
+              <a:rPr sz="900" b="0" i="0" spc="200">
                 <a:solidFill>
                   <a:srgbClr val="6B6B6B"/>
                 </a:solidFill>
@@ -14646,7 +16433,7 @@
               </a:lnSpc>
             </a:pPr>
             <a:r>
-              <a:rPr sz="1200" b="0">
+              <a:rPr sz="1200" b="0" i="0">
                 <a:solidFill>
                   <a:srgbClr val="F5F5F5"/>
                 </a:solidFill>
@@ -14685,7 +16472,7 @@
               </a:lnSpc>
             </a:pPr>
             <a:r>
-              <a:rPr sz="900" b="0" spc="200">
+              <a:rPr sz="900" b="0" i="0" spc="200">
                 <a:solidFill>
                   <a:srgbClr val="6B6B6B"/>
                 </a:solidFill>
@@ -14724,7 +16511,7 @@
               </a:lnSpc>
             </a:pPr>
             <a:r>
-              <a:rPr sz="1200" b="0">
+              <a:rPr sz="1200" b="0" i="0">
                 <a:solidFill>
                   <a:srgbClr val="F5F5F5"/>
                 </a:solidFill>
@@ -14825,7 +16612,7 @@
               </a:lnSpc>
             </a:pPr>
             <a:r>
-              <a:rPr sz="1100" b="1" spc="20">
+              <a:rPr sz="1100" b="1" i="0" spc="20">
                 <a:solidFill>
                   <a:srgbClr val="F5F5F5"/>
                 </a:solidFill>
@@ -14864,7 +16651,7 @@
               </a:lnSpc>
             </a:pPr>
             <a:r>
-              <a:rPr sz="900" b="0" spc="200">
+              <a:rPr sz="900" b="0" i="0" spc="200">
                 <a:solidFill>
                   <a:srgbClr val="6B6B6B"/>
                 </a:solidFill>
@@ -14903,7 +16690,7 @@
               </a:lnSpc>
             </a:pPr>
             <a:r>
-              <a:rPr sz="900" b="0" spc="80">
+              <a:rPr sz="900" b="0" i="0" spc="80">
                 <a:solidFill>
                   <a:srgbClr val="6B6B6B"/>
                 </a:solidFill>
@@ -14942,13 +16729,13 @@
               </a:lnSpc>
             </a:pPr>
             <a:r>
-              <a:rPr sz="900" b="0" spc="50">
+              <a:rPr sz="900" b="0" i="0" spc="50">
                 <a:solidFill>
                   <a:srgbClr val="6B6B6B"/>
                 </a:solidFill>
                 <a:latin typeface="JetBrains Mono"/>
               </a:rPr>
-              <a:t>05 / 16</a:t>
+              <a:t>05 / 17</a:t>
             </a:r>
           </a:p>
         </p:txBody>
@@ -15025,7 +16812,7 @@
               </a:lnSpc>
             </a:pPr>
             <a:r>
-              <a:rPr sz="1000" b="0" spc="300">
+              <a:rPr sz="1000" b="0" i="0" spc="300">
                 <a:solidFill>
                   <a:srgbClr val="6B6B6B"/>
                 </a:solidFill>
@@ -15064,7 +16851,7 @@
               </a:lnSpc>
             </a:pPr>
             <a:r>
-              <a:rPr sz="3600" b="1">
+              <a:rPr sz="3600" b="1" i="0">
                 <a:solidFill>
                   <a:srgbClr val="F5F5F5"/>
                 </a:solidFill>
@@ -15084,7 +16871,7 @@
         <p:spPr>
           <a:xfrm>
             <a:off x="502920" y="2606040"/>
-            <a:ext cx="10972800" cy="548640"/>
+            <a:ext cx="10972800" cy="640080"/>
           </a:xfrm>
           <a:prstGeom prst="rect">
             <a:avLst/>
@@ -15103,7 +16890,7 @@
               </a:lnSpc>
             </a:pPr>
             <a:r>
-              <a:rPr sz="1500" b="0">
+              <a:rPr sz="1500" b="0" i="0">
                 <a:solidFill>
                   <a:srgbClr val="A0A0A0"/>
                 </a:solidFill>
@@ -15230,7 +17017,7 @@
               </a:lnSpc>
             </a:pPr>
             <a:r>
-              <a:rPr sz="4400" b="0">
+              <a:rPr sz="4400" b="0" i="0">
                 <a:solidFill>
                   <a:srgbClr val="6B6B6B"/>
                 </a:solidFill>
@@ -15269,7 +17056,7 @@
               </a:lnSpc>
             </a:pPr>
             <a:r>
-              <a:rPr sz="1500" b="0">
+              <a:rPr sz="1500" b="0" i="0">
                 <a:solidFill>
                   <a:srgbClr val="F5F5F5"/>
                 </a:solidFill>
@@ -15308,7 +17095,7 @@
               </a:lnSpc>
             </a:pPr>
             <a:r>
-              <a:rPr sz="1000" b="0" spc="80">
+              <a:rPr sz="1000" b="0" i="0" spc="80">
                 <a:solidFill>
                   <a:srgbClr val="6B6B6B"/>
                 </a:solidFill>
@@ -15409,7 +17196,7 @@
               </a:lnSpc>
             </a:pPr>
             <a:r>
-              <a:rPr sz="1100" b="1" spc="20">
+              <a:rPr sz="1100" b="1" i="0" spc="20">
                 <a:solidFill>
                   <a:srgbClr val="F5F5F5"/>
                 </a:solidFill>
@@ -15448,7 +17235,7 @@
               </a:lnSpc>
             </a:pPr>
             <a:r>
-              <a:rPr sz="900" b="0" spc="200">
+              <a:rPr sz="900" b="0" i="0" spc="200">
                 <a:solidFill>
                   <a:srgbClr val="6B6B6B"/>
                 </a:solidFill>
@@ -15487,7 +17274,7 @@
               </a:lnSpc>
             </a:pPr>
             <a:r>
-              <a:rPr sz="900" b="0" spc="80">
+              <a:rPr sz="900" b="0" i="0" spc="80">
                 <a:solidFill>
                   <a:srgbClr val="6B6B6B"/>
                 </a:solidFill>
@@ -15526,13 +17313,13 @@
               </a:lnSpc>
             </a:pPr>
             <a:r>
-              <a:rPr sz="900" b="0" spc="50">
+              <a:rPr sz="900" b="0" i="0" spc="50">
                 <a:solidFill>
                   <a:srgbClr val="6B6B6B"/>
                 </a:solidFill>
                 <a:latin typeface="JetBrains Mono"/>
               </a:rPr>
-              <a:t>06 / 16</a:t>
+              <a:t>06 / 17</a:t>
             </a:r>
           </a:p>
         </p:txBody>
@@ -15609,7 +17396,7 @@
               </a:lnSpc>
             </a:pPr>
             <a:r>
-              <a:rPr sz="1000" b="0" spc="300">
+              <a:rPr sz="1000" b="0" i="0" spc="300">
                 <a:solidFill>
                   <a:srgbClr val="6B6B6B"/>
                 </a:solidFill>
@@ -15648,7 +17435,7 @@
               </a:lnSpc>
             </a:pPr>
             <a:r>
-              <a:rPr sz="3600" b="1">
+              <a:rPr sz="3600" b="1" i="0">
                 <a:solidFill>
                   <a:srgbClr val="F5F5F5"/>
                 </a:solidFill>
@@ -15668,7 +17455,7 @@
         <p:spPr>
           <a:xfrm>
             <a:off x="502920" y="2606040"/>
-            <a:ext cx="10972800" cy="548640"/>
+            <a:ext cx="10972800" cy="640080"/>
           </a:xfrm>
           <a:prstGeom prst="rect">
             <a:avLst/>
@@ -15687,7 +17474,7 @@
               </a:lnSpc>
             </a:pPr>
             <a:r>
-              <a:rPr sz="1500" b="0">
+              <a:rPr sz="1500" b="0" i="0">
                 <a:solidFill>
                   <a:srgbClr val="A0A0A0"/>
                 </a:solidFill>
@@ -15726,7 +17513,7 @@
               </a:lnSpc>
             </a:pPr>
             <a:r>
-              <a:rPr sz="1400" b="0">
+              <a:rPr sz="1400" b="0" i="0">
                 <a:solidFill>
                   <a:srgbClr val="6B6B6B"/>
                 </a:solidFill>
@@ -15765,7 +17552,7 @@
               </a:lnSpc>
             </a:pPr>
             <a:r>
-              <a:rPr sz="1300" b="1">
+              <a:rPr sz="1300" b="1" i="0">
                 <a:solidFill>
                   <a:srgbClr val="F5F5F5"/>
                 </a:solidFill>
@@ -15804,7 +17591,7 @@
               </a:lnSpc>
             </a:pPr>
             <a:r>
-              <a:rPr sz="1200" b="0">
+              <a:rPr sz="1200" b="0" i="0">
                 <a:solidFill>
                   <a:srgbClr val="E5E5E5"/>
                 </a:solidFill>
@@ -15843,7 +17630,7 @@
               </a:lnSpc>
             </a:pPr>
             <a:r>
-              <a:rPr sz="1100" b="0">
+              <a:rPr sz="1100" b="0" i="0">
                 <a:solidFill>
                   <a:srgbClr val="6B6B6B"/>
                 </a:solidFill>
@@ -15926,7 +17713,7 @@
               </a:lnSpc>
             </a:pPr>
             <a:r>
-              <a:rPr sz="1400" b="0">
+              <a:rPr sz="1400" b="0" i="0">
                 <a:solidFill>
                   <a:srgbClr val="6B6B6B"/>
                 </a:solidFill>
@@ -15965,7 +17752,7 @@
               </a:lnSpc>
             </a:pPr>
             <a:r>
-              <a:rPr sz="1300" b="1">
+              <a:rPr sz="1300" b="1" i="0">
                 <a:solidFill>
                   <a:srgbClr val="F5F5F5"/>
                 </a:solidFill>
@@ -16004,7 +17791,7 @@
               </a:lnSpc>
             </a:pPr>
             <a:r>
-              <a:rPr sz="1200" b="0">
+              <a:rPr sz="1200" b="0" i="0">
                 <a:solidFill>
                   <a:srgbClr val="E5E5E5"/>
                 </a:solidFill>
@@ -16043,7 +17830,7 @@
               </a:lnSpc>
             </a:pPr>
             <a:r>
-              <a:rPr sz="1100" b="0">
+              <a:rPr sz="1100" b="0" i="0">
                 <a:solidFill>
                   <a:srgbClr val="6B6B6B"/>
                 </a:solidFill>
@@ -16126,7 +17913,7 @@
               </a:lnSpc>
             </a:pPr>
             <a:r>
-              <a:rPr sz="1400" b="0">
+              <a:rPr sz="1400" b="0" i="0">
                 <a:solidFill>
                   <a:srgbClr val="6B6B6B"/>
                 </a:solidFill>
@@ -16165,13 +17952,13 @@
               </a:lnSpc>
             </a:pPr>
             <a:r>
-              <a:rPr sz="1300" b="1">
+              <a:rPr sz="1300" b="1" i="0">
                 <a:solidFill>
                   <a:srgbClr val="F5F5F5"/>
                 </a:solidFill>
                 <a:latin typeface="Inter"/>
               </a:rPr>
-              <a:t>Où ça fait mal</a:t>
+              <a:t>Pressure-test urgence</a:t>
             </a:r>
           </a:p>
         </p:txBody>
@@ -16204,13 +17991,13 @@
               </a:lnSpc>
             </a:pPr>
             <a:r>
-              <a:rPr sz="1200" b="0">
+              <a:rPr sz="1200" b="0" i="0">
                 <a:solidFill>
                   <a:srgbClr val="E5E5E5"/>
                 </a:solidFill>
                 <a:latin typeface="Inter"/>
               </a:rPr>
-              <a:t>« Quelle étape du SDLC l'IA devrait aider mais n'aide pas — review, refactos, onboarding, tests, incidents ? »</a:t>
+              <a:t>« Pourquoi vous regardez ça maintenant plutôt qu'au prochain renouvellement Copilot ? Qu'est-ce qui a changé ce trimestre ? »</a:t>
             </a:r>
           </a:p>
         </p:txBody>
@@ -16243,13 +18030,13 @@
               </a:lnSpc>
             </a:pPr>
             <a:r>
-              <a:rPr sz="1100" b="0">
+              <a:rPr sz="1100" b="0" i="0">
                 <a:solidFill>
                   <a:srgbClr val="6B6B6B"/>
                 </a:solidFill>
                 <a:latin typeface="Inter"/>
               </a:rPr>
-              <a:t>→ Refactos / large-context = sweet spot Cursor.</a:t>
+              <a:t>→ Pas de réponse claire = l'urgence est faible, on calibre les next steps.</a:t>
             </a:r>
           </a:p>
         </p:txBody>
@@ -16326,7 +18113,7 @@
               </a:lnSpc>
             </a:pPr>
             <a:r>
-              <a:rPr sz="1400" b="0">
+              <a:rPr sz="1400" b="0" i="0">
                 <a:solidFill>
                   <a:srgbClr val="6B6B6B"/>
                 </a:solidFill>
@@ -16365,7 +18152,7 @@
               </a:lnSpc>
             </a:pPr>
             <a:r>
-              <a:rPr sz="1300" b="1">
+              <a:rPr sz="1300" b="1" i="0">
                 <a:solidFill>
                   <a:srgbClr val="F5F5F5"/>
                 </a:solidFill>
@@ -16404,7 +18191,7 @@
               </a:lnSpc>
             </a:pPr>
             <a:r>
-              <a:rPr sz="1200" b="0">
+              <a:rPr sz="1200" b="0" i="0">
                 <a:solidFill>
                   <a:srgbClr val="E5E5E5"/>
                 </a:solidFill>
@@ -16443,7 +18230,7 @@
               </a:lnSpc>
             </a:pPr>
             <a:r>
-              <a:rPr sz="1100" b="0">
+              <a:rPr sz="1100" b="0" i="0">
                 <a:solidFill>
                   <a:srgbClr val="6B6B6B"/>
                 </a:solidFill>
@@ -16588,7 +18375,7 @@
               </a:lnSpc>
             </a:pPr>
             <a:r>
-              <a:rPr sz="1100" b="1" spc="20">
+              <a:rPr sz="1100" b="1" i="0" spc="20">
                 <a:solidFill>
                   <a:srgbClr val="F5F5F5"/>
                 </a:solidFill>
@@ -16627,7 +18414,7 @@
               </a:lnSpc>
             </a:pPr>
             <a:r>
-              <a:rPr sz="900" b="0" spc="200">
+              <a:rPr sz="900" b="0" i="0" spc="200">
                 <a:solidFill>
                   <a:srgbClr val="6B6B6B"/>
                 </a:solidFill>
@@ -16666,7 +18453,7 @@
               </a:lnSpc>
             </a:pPr>
             <a:r>
-              <a:rPr sz="900" b="0" spc="80">
+              <a:rPr sz="900" b="0" i="0" spc="80">
                 <a:solidFill>
                   <a:srgbClr val="6B6B6B"/>
                 </a:solidFill>
@@ -16705,13 +18492,13 @@
               </a:lnSpc>
             </a:pPr>
             <a:r>
-              <a:rPr sz="900" b="0" spc="50">
+              <a:rPr sz="900" b="0" i="0" spc="50">
                 <a:solidFill>
                   <a:srgbClr val="6B6B6B"/>
                 </a:solidFill>
                 <a:latin typeface="JetBrains Mono"/>
               </a:rPr>
-              <a:t>07 / 16</a:t>
+              <a:t>07 / 17</a:t>
             </a:r>
           </a:p>
         </p:txBody>
@@ -16788,7 +18575,7 @@
               </a:lnSpc>
             </a:pPr>
             <a:r>
-              <a:rPr sz="1000" b="0" spc="300">
+              <a:rPr sz="1000" b="0" i="0" spc="300">
                 <a:solidFill>
                   <a:srgbClr val="6B6B6B"/>
                 </a:solidFill>
@@ -16827,7 +18614,7 @@
               </a:lnSpc>
             </a:pPr>
             <a:r>
-              <a:rPr sz="3600" b="1">
+              <a:rPr sz="3600" b="1" i="0">
                 <a:solidFill>
                   <a:srgbClr val="F5F5F5"/>
                 </a:solidFill>
@@ -16847,7 +18634,7 @@
         <p:spPr>
           <a:xfrm>
             <a:off x="502920" y="2606040"/>
-            <a:ext cx="10972800" cy="548640"/>
+            <a:ext cx="10972800" cy="640080"/>
           </a:xfrm>
           <a:prstGeom prst="rect">
             <a:avLst/>
@@ -16866,7 +18653,7 @@
               </a:lnSpc>
             </a:pPr>
             <a:r>
-              <a:rPr sz="1500" b="0">
+              <a:rPr sz="1500" b="0" i="0">
                 <a:solidFill>
                   <a:srgbClr val="A0A0A0"/>
                 </a:solidFill>
@@ -16905,7 +18692,7 @@
               </a:lnSpc>
             </a:pPr>
             <a:r>
-              <a:rPr sz="1400" b="0">
+              <a:rPr sz="1400" b="0" i="0">
                 <a:solidFill>
                   <a:srgbClr val="6B6B6B"/>
                 </a:solidFill>
@@ -16944,7 +18731,7 @@
               </a:lnSpc>
             </a:pPr>
             <a:r>
-              <a:rPr sz="1300" b="1">
+              <a:rPr sz="1300" b="1" i="0">
                 <a:solidFill>
                   <a:srgbClr val="F5F5F5"/>
                 </a:solidFill>
@@ -16983,7 +18770,7 @@
               </a:lnSpc>
             </a:pPr>
             <a:r>
-              <a:rPr sz="1200" b="0">
+              <a:rPr sz="1200" b="0" i="0">
                 <a:solidFill>
                   <a:srgbClr val="E5E5E5"/>
                 </a:solidFill>
@@ -17022,7 +18809,7 @@
               </a:lnSpc>
             </a:pPr>
             <a:r>
-              <a:rPr sz="1100" b="0">
+              <a:rPr sz="1100" b="0" i="0">
                 <a:solidFill>
                   <a:srgbClr val="6B6B6B"/>
                 </a:solidFill>
@@ -17105,7 +18892,7 @@
               </a:lnSpc>
             </a:pPr>
             <a:r>
-              <a:rPr sz="1400" b="0">
+              <a:rPr sz="1400" b="0" i="0">
                 <a:solidFill>
                   <a:srgbClr val="6B6B6B"/>
                 </a:solidFill>
@@ -17144,7 +18931,7 @@
               </a:lnSpc>
             </a:pPr>
             <a:r>
-              <a:rPr sz="1300" b="1">
+              <a:rPr sz="1300" b="1" i="0">
                 <a:solidFill>
                   <a:srgbClr val="F5F5F5"/>
                 </a:solidFill>
@@ -17183,7 +18970,7 @@
               </a:lnSpc>
             </a:pPr>
             <a:r>
-              <a:rPr sz="1200" b="0">
+              <a:rPr sz="1200" b="0" i="0">
                 <a:solidFill>
                   <a:srgbClr val="E5E5E5"/>
                 </a:solidFill>
@@ -17222,7 +19009,7 @@
               </a:lnSpc>
             </a:pPr>
             <a:r>
-              <a:rPr sz="1100" b="0">
+              <a:rPr sz="1100" b="0" i="0">
                 <a:solidFill>
                   <a:srgbClr val="6B6B6B"/>
                 </a:solidFill>
@@ -17305,7 +19092,7 @@
               </a:lnSpc>
             </a:pPr>
             <a:r>
-              <a:rPr sz="1400" b="0">
+              <a:rPr sz="1400" b="0" i="0">
                 <a:solidFill>
                   <a:srgbClr val="6B6B6B"/>
                 </a:solidFill>
@@ -17344,7 +19131,7 @@
               </a:lnSpc>
             </a:pPr>
             <a:r>
-              <a:rPr sz="1300" b="1">
+              <a:rPr sz="1300" b="1" i="0">
                 <a:solidFill>
                   <a:srgbClr val="F5F5F5"/>
                 </a:solidFill>
@@ -17383,7 +19170,7 @@
               </a:lnSpc>
             </a:pPr>
             <a:r>
-              <a:rPr sz="1200" b="0">
+              <a:rPr sz="1200" b="0" i="0">
                 <a:solidFill>
                   <a:srgbClr val="E5E5E5"/>
                 </a:solidFill>
@@ -17422,7 +19209,7 @@
               </a:lnSpc>
             </a:pPr>
             <a:r>
-              <a:rPr sz="1100" b="0">
+              <a:rPr sz="1100" b="0" i="0">
                 <a:solidFill>
                   <a:srgbClr val="6B6B6B"/>
                 </a:solidFill>
@@ -17567,7 +19354,7 @@
               </a:lnSpc>
             </a:pPr>
             <a:r>
-              <a:rPr sz="1100" b="1" spc="20">
+              <a:rPr sz="1100" b="1" i="0" spc="20">
                 <a:solidFill>
                   <a:srgbClr val="F5F5F5"/>
                 </a:solidFill>
@@ -17606,7 +19393,7 @@
               </a:lnSpc>
             </a:pPr>
             <a:r>
-              <a:rPr sz="900" b="0" spc="200">
+              <a:rPr sz="900" b="0" i="0" spc="200">
                 <a:solidFill>
                   <a:srgbClr val="6B6B6B"/>
                 </a:solidFill>
@@ -17645,7 +19432,7 @@
               </a:lnSpc>
             </a:pPr>
             <a:r>
-              <a:rPr sz="900" b="0" spc="80">
+              <a:rPr sz="900" b="0" i="0" spc="80">
                 <a:solidFill>
                   <a:srgbClr val="6B6B6B"/>
                 </a:solidFill>
@@ -17684,13 +19471,13 @@
               </a:lnSpc>
             </a:pPr>
             <a:r>
-              <a:rPr sz="900" b="0" spc="50">
+              <a:rPr sz="900" b="0" i="0" spc="50">
                 <a:solidFill>
                   <a:srgbClr val="6B6B6B"/>
                 </a:solidFill>
                 <a:latin typeface="JetBrains Mono"/>
               </a:rPr>
-              <a:t>08 / 16</a:t>
+              <a:t>08 / 17</a:t>
             </a:r>
           </a:p>
         </p:txBody>
@@ -17767,7 +19554,7 @@
               </a:lnSpc>
             </a:pPr>
             <a:r>
-              <a:rPr sz="1000" b="0" spc="300">
+              <a:rPr sz="1000" b="0" i="0" spc="300">
                 <a:solidFill>
                   <a:srgbClr val="6B6B6B"/>
                 </a:solidFill>
@@ -17806,7 +19593,7 @@
               </a:lnSpc>
             </a:pPr>
             <a:r>
-              <a:rPr sz="3600" b="1">
+              <a:rPr sz="3600" b="1" i="0">
                 <a:solidFill>
                   <a:srgbClr val="F5F5F5"/>
                 </a:solidFill>
@@ -17826,7 +19613,7 @@
         <p:spPr>
           <a:xfrm>
             <a:off x="502920" y="2606040"/>
-            <a:ext cx="10972800" cy="548640"/>
+            <a:ext cx="10972800" cy="640080"/>
           </a:xfrm>
           <a:prstGeom prst="rect">
             <a:avLst/>
@@ -17845,7 +19632,7 @@
               </a:lnSpc>
             </a:pPr>
             <a:r>
-              <a:rPr sz="1500" b="0">
+              <a:rPr sz="1500" b="0" i="0">
                 <a:solidFill>
                   <a:srgbClr val="A0A0A0"/>
                 </a:solidFill>
@@ -17972,7 +19759,7 @@
               </a:lnSpc>
             </a:pPr>
             <a:r>
-              <a:rPr sz="1100" b="1" spc="200">
+              <a:rPr sz="1100" b="1" i="0" spc="200">
                 <a:solidFill>
                   <a:srgbClr val="6B6B6B"/>
                 </a:solidFill>
@@ -18011,7 +19798,7 @@
               </a:lnSpc>
             </a:pPr>
             <a:r>
-              <a:rPr sz="1150" b="0">
+              <a:rPr sz="1150" b="0" i="0">
                 <a:solidFill>
                   <a:srgbClr val="F5F5F5"/>
                 </a:solidFill>
@@ -18138,7 +19925,7 @@
               </a:lnSpc>
             </a:pPr>
             <a:r>
-              <a:rPr sz="1100" b="1" spc="200">
+              <a:rPr sz="1100" b="1" i="0" spc="200">
                 <a:solidFill>
                   <a:srgbClr val="6B6B6B"/>
                 </a:solidFill>
@@ -18177,7 +19964,7 @@
               </a:lnSpc>
             </a:pPr>
             <a:r>
-              <a:rPr sz="1150" b="0">
+              <a:rPr sz="1150" b="0" i="0">
                 <a:solidFill>
                   <a:srgbClr val="F5F5F5"/>
                 </a:solidFill>
@@ -18304,7 +20091,7 @@
               </a:lnSpc>
             </a:pPr>
             <a:r>
-              <a:rPr sz="1100" b="1" spc="200">
+              <a:rPr sz="1100" b="1" i="0" spc="200">
                 <a:solidFill>
                   <a:srgbClr val="6B6B6B"/>
                 </a:solidFill>
@@ -18343,7 +20130,7 @@
               </a:lnSpc>
             </a:pPr>
             <a:r>
-              <a:rPr sz="1150" b="0">
+              <a:rPr sz="1150" b="0" i="0">
                 <a:solidFill>
                   <a:srgbClr val="F5F5F5"/>
                 </a:solidFill>
@@ -18470,7 +20257,7 @@
               </a:lnSpc>
             </a:pPr>
             <a:r>
-              <a:rPr sz="1100" b="1" spc="200">
+              <a:rPr sz="1100" b="1" i="0" spc="200">
                 <a:solidFill>
                   <a:srgbClr val="6B6B6B"/>
                 </a:solidFill>
@@ -18509,7 +20296,7 @@
               </a:lnSpc>
             </a:pPr>
             <a:r>
-              <a:rPr sz="1150" b="0">
+              <a:rPr sz="1150" b="0" i="0">
                 <a:solidFill>
                   <a:srgbClr val="F5F5F5"/>
                 </a:solidFill>
@@ -18610,7 +20397,7 @@
               </a:lnSpc>
             </a:pPr>
             <a:r>
-              <a:rPr sz="1100" b="1" spc="20">
+              <a:rPr sz="1100" b="1" i="0" spc="20">
                 <a:solidFill>
                   <a:srgbClr val="F5F5F5"/>
                 </a:solidFill>
@@ -18649,7 +20436,7 @@
               </a:lnSpc>
             </a:pPr>
             <a:r>
-              <a:rPr sz="900" b="0" spc="200">
+              <a:rPr sz="900" b="0" i="0" spc="200">
                 <a:solidFill>
                   <a:srgbClr val="6B6B6B"/>
                 </a:solidFill>
@@ -18688,7 +20475,7 @@
               </a:lnSpc>
             </a:pPr>
             <a:r>
-              <a:rPr sz="900" b="0" spc="80">
+              <a:rPr sz="900" b="0" i="0" spc="80">
                 <a:solidFill>
                   <a:srgbClr val="6B6B6B"/>
                 </a:solidFill>
@@ -18727,13 +20514,13 @@
               </a:lnSpc>
             </a:pPr>
             <a:r>
-              <a:rPr sz="900" b="0" spc="50">
+              <a:rPr sz="900" b="0" i="0" spc="50">
                 <a:solidFill>
                   <a:srgbClr val="6B6B6B"/>
                 </a:solidFill>
                 <a:latin typeface="JetBrains Mono"/>
               </a:rPr>
-              <a:t>09 / 16</a:t>
+              <a:t>09 / 17</a:t>
             </a:r>
           </a:p>
         </p:txBody>
@@ -18810,13 +20597,13 @@
               </a:lnSpc>
             </a:pPr>
             <a:r>
-              <a:rPr sz="1000" b="0" spc="300">
+              <a:rPr sz="1000" b="0" i="0" spc="300">
                 <a:solidFill>
                   <a:srgbClr val="6B6B6B"/>
                 </a:solidFill>
                 <a:latin typeface="Inter"/>
               </a:rPr>
-              <a:t>POURQUOI CHANGER (DU SORTANT — QUASI SÛREMENT COPILOT)</a:t>
+              <a:t>LE PAYSAGE 2026</a:t>
             </a:r>
           </a:p>
         </p:txBody>
@@ -18849,13 +20636,13 @@
               </a:lnSpc>
             </a:pPr>
             <a:r>
-              <a:rPr sz="3600" b="1">
+              <a:rPr sz="3600" b="1" i="0">
                 <a:solidFill>
                   <a:srgbClr val="F5F5F5"/>
                 </a:solidFill>
                 <a:latin typeface="Inter"/>
               </a:rPr>
-              <a:t>Un gap qualité, pas une bataille de marque.</a:t>
+              <a:t>Copilot et Claude Code, deux conversations différentes.</a:t>
             </a:r>
           </a:p>
         </p:txBody>
@@ -18869,7 +20656,7 @@
         <p:spPr>
           <a:xfrm>
             <a:off x="502920" y="2606040"/>
-            <a:ext cx="10972800" cy="548640"/>
+            <a:ext cx="10972800" cy="640080"/>
           </a:xfrm>
           <a:prstGeom prst="rect">
             <a:avLst/>
@@ -18888,144 +20675,71 @@
               </a:lnSpc>
             </a:pPr>
             <a:r>
-              <a:rPr sz="1500" b="0">
+              <a:rPr sz="1500" b="0" i="0">
                 <a:solidFill>
                   <a:srgbClr val="A0A0A0"/>
                 </a:solidFill>
                 <a:latin typeface="Inter"/>
               </a:rPr>
-              <a:t>On ne descend pas Copilot. On nomme ce qui mange les journées des seniors.</a:t>
-            </a:r>
-          </a:p>
-        </p:txBody>
-      </p:sp>
-      <p:sp>
-        <p:nvSpPr>
-          <p:cNvPr id="11" name="TextBox 10"/>
-          <p:cNvSpPr txBox="1"/>
-          <p:nvPr/>
-        </p:nvSpPr>
-        <p:spPr>
-          <a:xfrm>
-            <a:off x="502920" y="3383280"/>
-            <a:ext cx="365760" cy="365760"/>
-          </a:xfrm>
-          <a:prstGeom prst="rect">
-            <a:avLst/>
-          </a:prstGeom>
-          <a:noFill/>
-        </p:spPr>
-        <p:txBody>
-          <a:bodyPr wrap="square" lIns="0" rIns="0" tIns="0" bIns="0" anchor="t">
-            <a:spAutoFit/>
-          </a:bodyPr>
-          <a:lstStyle/>
-          <a:p>
-            <a:pPr algn="l">
-              <a:lnSpc>
-                <a:spcPct val="115000"/>
-              </a:lnSpc>
-            </a:pPr>
-            <a:r>
-              <a:rPr sz="1800" b="0">
-                <a:solidFill>
-                  <a:srgbClr val="6B6B6B"/>
-                </a:solidFill>
-                <a:latin typeface="Inter"/>
-              </a:rPr>
-              <a:t>→</a:t>
-            </a:r>
-          </a:p>
-        </p:txBody>
-      </p:sp>
-      <p:sp>
-        <p:nvSpPr>
-          <p:cNvPr id="12" name="TextBox 11"/>
-          <p:cNvSpPr txBox="1"/>
-          <p:nvPr/>
-        </p:nvSpPr>
-        <p:spPr>
-          <a:xfrm>
-            <a:off x="960120" y="3383280"/>
-            <a:ext cx="3657600" cy="365760"/>
-          </a:xfrm>
-          <a:prstGeom prst="rect">
-            <a:avLst/>
-          </a:prstGeom>
-          <a:noFill/>
-        </p:spPr>
-        <p:txBody>
-          <a:bodyPr wrap="square" lIns="0" rIns="0" tIns="0" bIns="0" anchor="t">
-            <a:spAutoFit/>
-          </a:bodyPr>
-          <a:lstStyle/>
-          <a:p>
-            <a:pPr algn="l">
-              <a:lnSpc>
-                <a:spcPct val="115000"/>
-              </a:lnSpc>
-            </a:pPr>
-            <a:r>
-              <a:rPr sz="1500" b="1">
-                <a:solidFill>
-                  <a:srgbClr val="F5F5F5"/>
-                </a:solidFill>
-                <a:latin typeface="Inter"/>
-              </a:rPr>
-              <a:t>Le travail qui coûte cher</a:t>
-            </a:r>
-          </a:p>
-        </p:txBody>
-      </p:sp>
-      <p:sp>
-        <p:nvSpPr>
-          <p:cNvPr id="13" name="TextBox 12"/>
-          <p:cNvSpPr txBox="1"/>
-          <p:nvPr/>
-        </p:nvSpPr>
-        <p:spPr>
-          <a:xfrm>
-            <a:off x="4754880" y="3383280"/>
-            <a:ext cx="6949440" cy="914400"/>
-          </a:xfrm>
-          <a:prstGeom prst="rect">
-            <a:avLst/>
-          </a:prstGeom>
-          <a:noFill/>
-        </p:spPr>
-        <p:txBody>
-          <a:bodyPr wrap="square" lIns="0" rIns="0" tIns="0" bIns="0" anchor="t">
-            <a:spAutoFit/>
-          </a:bodyPr>
-          <a:lstStyle/>
-          <a:p>
-            <a:pPr algn="l">
-              <a:lnSpc>
-                <a:spcPct val="145000"/>
-              </a:lnSpc>
-            </a:pPr>
-            <a:r>
-              <a:rPr sz="1250" b="0">
-                <a:solidFill>
-                  <a:srgbClr val="A0A0A0"/>
-                </a:solidFill>
-                <a:latin typeface="Inter"/>
-              </a:rPr>
-              <a:t>Refactos multi-fichiers, navigation d'un service inconnu, repro de bug, tests manquants. C'est là que le gap est le plus large — et il s'est élargi sur 9 mois, pas refermé.</a:t>
-            </a:r>
-          </a:p>
-        </p:txBody>
-      </p:sp>
-      <p:sp>
-        <p:nvSpPr>
-          <p:cNvPr id="14" name="Rectangle 13"/>
+              <a:t>On ne descend personne. On nomme ce que Cursor applique mieux.</a:t>
+            </a:r>
+          </a:p>
+        </p:txBody>
+      </p:sp>
+      <p:sp>
+        <p:nvSpPr>
+          <p:cNvPr id="11" name="Rectangle 10"/>
           <p:cNvSpPr/>
           <p:nvPr/>
         </p:nvSpPr>
         <p:spPr>
           <a:xfrm>
-            <a:off x="502920" y="4389120"/>
-            <a:ext cx="11201400" cy="6350"/>
+            <a:off x="502920" y="3291840"/>
+            <a:ext cx="5577840" cy="3200400"/>
+          </a:xfrm>
+          <a:prstGeom prst="rect">
+            <a:avLst/>
+          </a:prstGeom>
+          <a:solidFill>
+            <a:srgbClr val="141414"/>
+          </a:solidFill>
+          <a:ln>
+            <a:noFill/>
+          </a:ln>
+          <a:effectLst/>
+        </p:spPr>
+        <p:style>
+          <a:lnRef idx="1">
+            <a:schemeClr val="accent1"/>
+          </a:lnRef>
+          <a:fillRef idx="3">
+            <a:schemeClr val="accent1"/>
+          </a:fillRef>
+          <a:effectRef idx="2">
+            <a:schemeClr val="accent1"/>
+          </a:effectRef>
+          <a:fontRef idx="minor">
+            <a:schemeClr val="lt1"/>
+          </a:fontRef>
+        </p:style>
+        <p:txBody>
+          <a:bodyPr rtlCol="0" anchor="ctr"/>
+          <a:lstStyle/>
+          <a:p>
+            <a:pPr algn="ctr"/>
+          </a:p>
+        </p:txBody>
+      </p:sp>
+      <p:sp>
+        <p:nvSpPr>
+          <p:cNvPr id="12" name="Rectangle 11"/>
+          <p:cNvSpPr/>
+          <p:nvPr/>
+        </p:nvSpPr>
+        <p:spPr>
+          <a:xfrm>
+            <a:off x="502920" y="3291840"/>
+            <a:ext cx="5577840" cy="6350"/>
           </a:xfrm>
           <a:prstGeom prst="rect">
             <a:avLst/>
@@ -19062,33 +20776,150 @@
       </p:sp>
       <p:sp>
         <p:nvSpPr>
+          <p:cNvPr id="13" name="TextBox 12"/>
+          <p:cNvSpPr txBox="1"/>
+          <p:nvPr/>
+        </p:nvSpPr>
+        <p:spPr>
+          <a:xfrm>
+            <a:off x="777240" y="3429000"/>
+            <a:ext cx="5029200" cy="365760"/>
+          </a:xfrm>
+          <a:prstGeom prst="rect">
+            <a:avLst/>
+          </a:prstGeom>
+          <a:noFill/>
+        </p:spPr>
+        <p:txBody>
+          <a:bodyPr wrap="square" lIns="0" rIns="0" tIns="0" bIns="0" anchor="t">
+            <a:spAutoFit/>
+          </a:bodyPr>
+          <a:lstStyle/>
+          <a:p>
+            <a:pPr algn="l">
+              <a:lnSpc>
+                <a:spcPct val="115000"/>
+              </a:lnSpc>
+            </a:pPr>
+            <a:r>
+              <a:rPr sz="1000" b="0" i="0" spc="300">
+                <a:solidFill>
+                  <a:srgbClr val="6B6B6B"/>
+                </a:solidFill>
+                <a:latin typeface="Inter"/>
+              </a:rPr>
+              <a:t>VS GITHUB COPILOT</a:t>
+            </a:r>
+          </a:p>
+        </p:txBody>
+      </p:sp>
+      <p:sp>
+        <p:nvSpPr>
+          <p:cNvPr id="14" name="TextBox 13"/>
+          <p:cNvSpPr txBox="1"/>
+          <p:nvPr/>
+        </p:nvSpPr>
+        <p:spPr>
+          <a:xfrm>
+            <a:off x="777240" y="3749039"/>
+            <a:ext cx="5029200" cy="457200"/>
+          </a:xfrm>
+          <a:prstGeom prst="rect">
+            <a:avLst/>
+          </a:prstGeom>
+          <a:noFill/>
+        </p:spPr>
+        <p:txBody>
+          <a:bodyPr wrap="square" lIns="0" rIns="0" tIns="0" bIns="0" anchor="t">
+            <a:spAutoFit/>
+          </a:bodyPr>
+          <a:lstStyle/>
+          <a:p>
+            <a:pPr algn="l">
+              <a:lnSpc>
+                <a:spcPct val="115000"/>
+              </a:lnSpc>
+            </a:pPr>
+            <a:r>
+              <a:rPr sz="1800" b="1" i="0">
+                <a:solidFill>
+                  <a:srgbClr val="F5F5F5"/>
+                </a:solidFill>
+                <a:latin typeface="Inter"/>
+              </a:rPr>
+              <a:t>Du snippet à la tâche</a:t>
+            </a:r>
+          </a:p>
+        </p:txBody>
+      </p:sp>
+      <p:sp>
+        <p:nvSpPr>
           <p:cNvPr id="15" name="TextBox 14"/>
           <p:cNvSpPr txBox="1"/>
           <p:nvPr/>
         </p:nvSpPr>
         <p:spPr>
           <a:xfrm>
-            <a:off x="502920" y="4480560"/>
-            <a:ext cx="365760" cy="365760"/>
-          </a:xfrm>
-          <a:prstGeom prst="rect">
-            <a:avLst/>
-          </a:prstGeom>
-          <a:noFill/>
-        </p:spPr>
-        <p:txBody>
-          <a:bodyPr wrap="square" lIns="0" rIns="0" tIns="0" bIns="0" anchor="t">
-            <a:spAutoFit/>
-          </a:bodyPr>
-          <a:lstStyle/>
-          <a:p>
-            <a:pPr algn="l">
-              <a:lnSpc>
-                <a:spcPct val="115000"/>
-              </a:lnSpc>
-            </a:pPr>
-            <a:r>
-              <a:rPr sz="1800" b="0">
+            <a:off x="777240" y="4343400"/>
+            <a:ext cx="2194560" cy="365760"/>
+          </a:xfrm>
+          <a:prstGeom prst="rect">
+            <a:avLst/>
+          </a:prstGeom>
+          <a:noFill/>
+        </p:spPr>
+        <p:txBody>
+          <a:bodyPr wrap="square" lIns="0" rIns="0" tIns="0" bIns="0" anchor="t">
+            <a:spAutoFit/>
+          </a:bodyPr>
+          <a:lstStyle/>
+          <a:p>
+            <a:pPr algn="l">
+              <a:lnSpc>
+                <a:spcPct val="115000"/>
+              </a:lnSpc>
+            </a:pPr>
+            <a:r>
+              <a:rPr sz="1100" b="0" i="0">
+                <a:solidFill>
+                  <a:srgbClr val="A0A0A0"/>
+                </a:solidFill>
+                <a:latin typeface="Inter"/>
+              </a:rPr>
+              <a:t>Snippet help</a:t>
+            </a:r>
+          </a:p>
+        </p:txBody>
+      </p:sp>
+      <p:sp>
+        <p:nvSpPr>
+          <p:cNvPr id="16" name="TextBox 15"/>
+          <p:cNvSpPr txBox="1"/>
+          <p:nvPr/>
+        </p:nvSpPr>
+        <p:spPr>
+          <a:xfrm>
+            <a:off x="2926080" y="4343400"/>
+            <a:ext cx="274320" cy="365760"/>
+          </a:xfrm>
+          <a:prstGeom prst="rect">
+            <a:avLst/>
+          </a:prstGeom>
+          <a:noFill/>
+        </p:spPr>
+        <p:txBody>
+          <a:bodyPr wrap="square" lIns="0" rIns="0" tIns="0" bIns="0" anchor="t">
+            <a:spAutoFit/>
+          </a:bodyPr>
+          <a:lstStyle/>
+          <a:p>
+            <a:pPr algn="l">
+              <a:lnSpc>
+                <a:spcPct val="115000"/>
+              </a:lnSpc>
+            </a:pPr>
+            <a:r>
+              <a:rPr sz="1100" b="0" i="0">
                 <a:solidFill>
                   <a:srgbClr val="6B6B6B"/>
                 </a:solidFill>
@@ -19101,92 +20932,448 @@
       </p:sp>
       <p:sp>
         <p:nvSpPr>
-          <p:cNvPr id="16" name="TextBox 15"/>
-          <p:cNvSpPr txBox="1"/>
-          <p:nvPr/>
-        </p:nvSpPr>
-        <p:spPr>
-          <a:xfrm>
-            <a:off x="960120" y="4480560"/>
-            <a:ext cx="3657600" cy="365760"/>
-          </a:xfrm>
-          <a:prstGeom prst="rect">
-            <a:avLst/>
-          </a:prstGeom>
-          <a:noFill/>
-        </p:spPr>
-        <p:txBody>
-          <a:bodyPr wrap="square" lIns="0" rIns="0" tIns="0" bIns="0" anchor="t">
-            <a:spAutoFit/>
-          </a:bodyPr>
-          <a:lstStyle/>
-          <a:p>
-            <a:pPr algn="l">
-              <a:lnSpc>
-                <a:spcPct val="115000"/>
-              </a:lnSpc>
-            </a:pPr>
-            <a:r>
-              <a:rPr sz="1500" b="1">
+          <p:cNvPr id="17" name="TextBox 16"/>
+          <p:cNvSpPr txBox="1"/>
+          <p:nvPr/>
+        </p:nvSpPr>
+        <p:spPr>
+          <a:xfrm>
+            <a:off x="3246120" y="4343400"/>
+            <a:ext cx="2651760" cy="365760"/>
+          </a:xfrm>
+          <a:prstGeom prst="rect">
+            <a:avLst/>
+          </a:prstGeom>
+          <a:noFill/>
+        </p:spPr>
+        <p:txBody>
+          <a:bodyPr wrap="square" lIns="0" rIns="0" tIns="0" bIns="0" anchor="t">
+            <a:spAutoFit/>
+          </a:bodyPr>
+          <a:lstStyle/>
+          <a:p>
+            <a:pPr algn="l">
+              <a:lnSpc>
+                <a:spcPct val="115000"/>
+              </a:lnSpc>
+            </a:pPr>
+            <a:r>
+              <a:rPr sz="1100" b="1" i="0">
                 <a:solidFill>
                   <a:srgbClr val="F5F5F5"/>
                 </a:solidFill>
                 <a:latin typeface="Inter"/>
               </a:rPr>
-              <a:t>Senior IC opt-out</a:t>
-            </a:r>
-          </a:p>
-        </p:txBody>
-      </p:sp>
-      <p:sp>
-        <p:nvSpPr>
-          <p:cNvPr id="17" name="TextBox 16"/>
-          <p:cNvSpPr txBox="1"/>
-          <p:nvPr/>
-        </p:nvSpPr>
-        <p:spPr>
-          <a:xfrm>
-            <a:off x="4754880" y="4480560"/>
-            <a:ext cx="6949440" cy="914400"/>
-          </a:xfrm>
-          <a:prstGeom prst="rect">
-            <a:avLst/>
-          </a:prstGeom>
-          <a:noFill/>
-        </p:spPr>
-        <p:txBody>
-          <a:bodyPr wrap="square" lIns="0" rIns="0" tIns="0" bIns="0" anchor="t">
-            <a:spAutoFit/>
-          </a:bodyPr>
-          <a:lstStyle/>
-          <a:p>
-            <a:pPr algn="l">
-              <a:lnSpc>
-                <a:spcPct val="145000"/>
-              </a:lnSpc>
-            </a:pPr>
-            <a:r>
-              <a:rPr sz="1250" b="0">
+              <a:t>Task completion</a:t>
+            </a:r>
+          </a:p>
+        </p:txBody>
+      </p:sp>
+      <p:sp>
+        <p:nvSpPr>
+          <p:cNvPr id="18" name="TextBox 17"/>
+          <p:cNvSpPr txBox="1"/>
+          <p:nvPr/>
+        </p:nvSpPr>
+        <p:spPr>
+          <a:xfrm>
+            <a:off x="777240" y="4727448"/>
+            <a:ext cx="2194560" cy="365760"/>
+          </a:xfrm>
+          <a:prstGeom prst="rect">
+            <a:avLst/>
+          </a:prstGeom>
+          <a:noFill/>
+        </p:spPr>
+        <p:txBody>
+          <a:bodyPr wrap="square" lIns="0" rIns="0" tIns="0" bIns="0" anchor="t">
+            <a:spAutoFit/>
+          </a:bodyPr>
+          <a:lstStyle/>
+          <a:p>
+            <a:pPr algn="l">
+              <a:lnSpc>
+                <a:spcPct val="115000"/>
+              </a:lnSpc>
+            </a:pPr>
+            <a:r>
+              <a:rPr sz="1100" b="0" i="0">
                 <a:solidFill>
                   <a:srgbClr val="A0A0A0"/>
                 </a:solidFill>
                 <a:latin typeface="Inter"/>
               </a:rPr>
-              <a:t>Pattern récurrent : quand vos meilleurs ingés n'utilisent pas l'outil, le plafond ROI org est ~5 %. Quand ils l'utilisent, c'est 20–30 %.</a:t>
-            </a:r>
-          </a:p>
-        </p:txBody>
-      </p:sp>
-      <p:sp>
-        <p:nvSpPr>
-          <p:cNvPr id="18" name="Rectangle 17"/>
+              <a:t>Local suggestions</a:t>
+            </a:r>
+          </a:p>
+        </p:txBody>
+      </p:sp>
+      <p:sp>
+        <p:nvSpPr>
+          <p:cNvPr id="19" name="TextBox 18"/>
+          <p:cNvSpPr txBox="1"/>
+          <p:nvPr/>
+        </p:nvSpPr>
+        <p:spPr>
+          <a:xfrm>
+            <a:off x="2926080" y="4727448"/>
+            <a:ext cx="274320" cy="365760"/>
+          </a:xfrm>
+          <a:prstGeom prst="rect">
+            <a:avLst/>
+          </a:prstGeom>
+          <a:noFill/>
+        </p:spPr>
+        <p:txBody>
+          <a:bodyPr wrap="square" lIns="0" rIns="0" tIns="0" bIns="0" anchor="t">
+            <a:spAutoFit/>
+          </a:bodyPr>
+          <a:lstStyle/>
+          <a:p>
+            <a:pPr algn="l">
+              <a:lnSpc>
+                <a:spcPct val="115000"/>
+              </a:lnSpc>
+            </a:pPr>
+            <a:r>
+              <a:rPr sz="1100" b="0" i="0">
+                <a:solidFill>
+                  <a:srgbClr val="6B6B6B"/>
+                </a:solidFill>
+                <a:latin typeface="Inter"/>
+              </a:rPr>
+              <a:t>→</a:t>
+            </a:r>
+          </a:p>
+        </p:txBody>
+      </p:sp>
+      <p:sp>
+        <p:nvSpPr>
+          <p:cNvPr id="20" name="TextBox 19"/>
+          <p:cNvSpPr txBox="1"/>
+          <p:nvPr/>
+        </p:nvSpPr>
+        <p:spPr>
+          <a:xfrm>
+            <a:off x="3246120" y="4727448"/>
+            <a:ext cx="2651760" cy="365760"/>
+          </a:xfrm>
+          <a:prstGeom prst="rect">
+            <a:avLst/>
+          </a:prstGeom>
+          <a:noFill/>
+        </p:spPr>
+        <p:txBody>
+          <a:bodyPr wrap="square" lIns="0" rIns="0" tIns="0" bIns="0" anchor="t">
+            <a:spAutoFit/>
+          </a:bodyPr>
+          <a:lstStyle/>
+          <a:p>
+            <a:pPr algn="l">
+              <a:lnSpc>
+                <a:spcPct val="115000"/>
+              </a:lnSpc>
+            </a:pPr>
+            <a:r>
+              <a:rPr sz="1100" b="1" i="0">
+                <a:solidFill>
+                  <a:srgbClr val="F5F5F5"/>
+                </a:solidFill>
+                <a:latin typeface="Inter"/>
+              </a:rPr>
+              <a:t>Codebase context</a:t>
+            </a:r>
+          </a:p>
+        </p:txBody>
+      </p:sp>
+      <p:sp>
+        <p:nvSpPr>
+          <p:cNvPr id="21" name="TextBox 20"/>
+          <p:cNvSpPr txBox="1"/>
+          <p:nvPr/>
+        </p:nvSpPr>
+        <p:spPr>
+          <a:xfrm>
+            <a:off x="777240" y="5111496"/>
+            <a:ext cx="2194560" cy="365760"/>
+          </a:xfrm>
+          <a:prstGeom prst="rect">
+            <a:avLst/>
+          </a:prstGeom>
+          <a:noFill/>
+        </p:spPr>
+        <p:txBody>
+          <a:bodyPr wrap="square" lIns="0" rIns="0" tIns="0" bIns="0" anchor="t">
+            <a:spAutoFit/>
+          </a:bodyPr>
+          <a:lstStyle/>
+          <a:p>
+            <a:pPr algn="l">
+              <a:lnSpc>
+                <a:spcPct val="115000"/>
+              </a:lnSpc>
+            </a:pPr>
+            <a:r>
+              <a:rPr sz="1100" b="0" i="0">
+                <a:solidFill>
+                  <a:srgbClr val="A0A0A0"/>
+                </a:solidFill>
+                <a:latin typeface="Inter"/>
+              </a:rPr>
+              <a:t>Isolated assistance</a:t>
+            </a:r>
+          </a:p>
+        </p:txBody>
+      </p:sp>
+      <p:sp>
+        <p:nvSpPr>
+          <p:cNvPr id="22" name="TextBox 21"/>
+          <p:cNvSpPr txBox="1"/>
+          <p:nvPr/>
+        </p:nvSpPr>
+        <p:spPr>
+          <a:xfrm>
+            <a:off x="2926080" y="5111496"/>
+            <a:ext cx="274320" cy="365760"/>
+          </a:xfrm>
+          <a:prstGeom prst="rect">
+            <a:avLst/>
+          </a:prstGeom>
+          <a:noFill/>
+        </p:spPr>
+        <p:txBody>
+          <a:bodyPr wrap="square" lIns="0" rIns="0" tIns="0" bIns="0" anchor="t">
+            <a:spAutoFit/>
+          </a:bodyPr>
+          <a:lstStyle/>
+          <a:p>
+            <a:pPr algn="l">
+              <a:lnSpc>
+                <a:spcPct val="115000"/>
+              </a:lnSpc>
+            </a:pPr>
+            <a:r>
+              <a:rPr sz="1100" b="0" i="0">
+                <a:solidFill>
+                  <a:srgbClr val="6B6B6B"/>
+                </a:solidFill>
+                <a:latin typeface="Inter"/>
+              </a:rPr>
+              <a:t>→</a:t>
+            </a:r>
+          </a:p>
+        </p:txBody>
+      </p:sp>
+      <p:sp>
+        <p:nvSpPr>
+          <p:cNvPr id="23" name="TextBox 22"/>
+          <p:cNvSpPr txBox="1"/>
+          <p:nvPr/>
+        </p:nvSpPr>
+        <p:spPr>
+          <a:xfrm>
+            <a:off x="3246120" y="5111496"/>
+            <a:ext cx="2651760" cy="365760"/>
+          </a:xfrm>
+          <a:prstGeom prst="rect">
+            <a:avLst/>
+          </a:prstGeom>
+          <a:noFill/>
+        </p:spPr>
+        <p:txBody>
+          <a:bodyPr wrap="square" lIns="0" rIns="0" tIns="0" bIns="0" anchor="t">
+            <a:spAutoFit/>
+          </a:bodyPr>
+          <a:lstStyle/>
+          <a:p>
+            <a:pPr algn="l">
+              <a:lnSpc>
+                <a:spcPct val="115000"/>
+              </a:lnSpc>
+            </a:pPr>
+            <a:r>
+              <a:rPr sz="1100" b="1" i="0">
+                <a:solidFill>
+                  <a:srgbClr val="F5F5F5"/>
+                </a:solidFill>
+                <a:latin typeface="Inter"/>
+              </a:rPr>
+              <a:t>Workflow support</a:t>
+            </a:r>
+          </a:p>
+        </p:txBody>
+      </p:sp>
+      <p:sp>
+        <p:nvSpPr>
+          <p:cNvPr id="24" name="TextBox 23"/>
+          <p:cNvSpPr txBox="1"/>
+          <p:nvPr/>
+        </p:nvSpPr>
+        <p:spPr>
+          <a:xfrm>
+            <a:off x="777240" y="5495544"/>
+            <a:ext cx="2194560" cy="365760"/>
+          </a:xfrm>
+          <a:prstGeom prst="rect">
+            <a:avLst/>
+          </a:prstGeom>
+          <a:noFill/>
+        </p:spPr>
+        <p:txBody>
+          <a:bodyPr wrap="square" lIns="0" rIns="0" tIns="0" bIns="0" anchor="t">
+            <a:spAutoFit/>
+          </a:bodyPr>
+          <a:lstStyle/>
+          <a:p>
+            <a:pPr algn="l">
+              <a:lnSpc>
+                <a:spcPct val="115000"/>
+              </a:lnSpc>
+            </a:pPr>
+            <a:r>
+              <a:rPr sz="1100" b="0" i="0">
+                <a:solidFill>
+                  <a:srgbClr val="A0A0A0"/>
+                </a:solidFill>
+                <a:latin typeface="Inter"/>
+              </a:rPr>
+              <a:t>Point solution</a:t>
+            </a:r>
+          </a:p>
+        </p:txBody>
+      </p:sp>
+      <p:sp>
+        <p:nvSpPr>
+          <p:cNvPr id="25" name="TextBox 24"/>
+          <p:cNvSpPr txBox="1"/>
+          <p:nvPr/>
+        </p:nvSpPr>
+        <p:spPr>
+          <a:xfrm>
+            <a:off x="2926080" y="5495544"/>
+            <a:ext cx="274320" cy="365760"/>
+          </a:xfrm>
+          <a:prstGeom prst="rect">
+            <a:avLst/>
+          </a:prstGeom>
+          <a:noFill/>
+        </p:spPr>
+        <p:txBody>
+          <a:bodyPr wrap="square" lIns="0" rIns="0" tIns="0" bIns="0" anchor="t">
+            <a:spAutoFit/>
+          </a:bodyPr>
+          <a:lstStyle/>
+          <a:p>
+            <a:pPr algn="l">
+              <a:lnSpc>
+                <a:spcPct val="115000"/>
+              </a:lnSpc>
+            </a:pPr>
+            <a:r>
+              <a:rPr sz="1100" b="0" i="0">
+                <a:solidFill>
+                  <a:srgbClr val="6B6B6B"/>
+                </a:solidFill>
+                <a:latin typeface="Inter"/>
+              </a:rPr>
+              <a:t>→</a:t>
+            </a:r>
+          </a:p>
+        </p:txBody>
+      </p:sp>
+      <p:sp>
+        <p:nvSpPr>
+          <p:cNvPr id="26" name="TextBox 25"/>
+          <p:cNvSpPr txBox="1"/>
+          <p:nvPr/>
+        </p:nvSpPr>
+        <p:spPr>
+          <a:xfrm>
+            <a:off x="3246120" y="5495544"/>
+            <a:ext cx="2651760" cy="365760"/>
+          </a:xfrm>
+          <a:prstGeom prst="rect">
+            <a:avLst/>
+          </a:prstGeom>
+          <a:noFill/>
+        </p:spPr>
+        <p:txBody>
+          <a:bodyPr wrap="square" lIns="0" rIns="0" tIns="0" bIns="0" anchor="t">
+            <a:spAutoFit/>
+          </a:bodyPr>
+          <a:lstStyle/>
+          <a:p>
+            <a:pPr algn="l">
+              <a:lnSpc>
+                <a:spcPct val="115000"/>
+              </a:lnSpc>
+            </a:pPr>
+            <a:r>
+              <a:rPr sz="1100" b="1" i="0">
+                <a:solidFill>
+                  <a:srgbClr val="F5F5F5"/>
+                </a:solidFill>
+                <a:latin typeface="Inter"/>
+              </a:rPr>
+              <a:t>Integrated platform</a:t>
+            </a:r>
+          </a:p>
+        </p:txBody>
+      </p:sp>
+      <p:sp>
+        <p:nvSpPr>
+          <p:cNvPr id="27" name="Rectangle 26"/>
           <p:cNvSpPr/>
           <p:nvPr/>
         </p:nvSpPr>
         <p:spPr>
           <a:xfrm>
-            <a:off x="502920" y="5486400"/>
-            <a:ext cx="11201400" cy="6350"/>
+            <a:off x="6172200" y="3291840"/>
+            <a:ext cx="5577840" cy="3200400"/>
+          </a:xfrm>
+          <a:prstGeom prst="rect">
+            <a:avLst/>
+          </a:prstGeom>
+          <a:solidFill>
+            <a:srgbClr val="141414"/>
+          </a:solidFill>
+          <a:ln>
+            <a:noFill/>
+          </a:ln>
+          <a:effectLst/>
+        </p:spPr>
+        <p:style>
+          <a:lnRef idx="1">
+            <a:schemeClr val="accent1"/>
+          </a:lnRef>
+          <a:fillRef idx="3">
+            <a:schemeClr val="accent1"/>
+          </a:fillRef>
+          <a:effectRef idx="2">
+            <a:schemeClr val="accent1"/>
+          </a:effectRef>
+          <a:fontRef idx="minor">
+            <a:schemeClr val="lt1"/>
+          </a:fontRef>
+        </p:style>
+        <p:txBody>
+          <a:bodyPr rtlCol="0" anchor="ctr"/>
+          <a:lstStyle/>
+          <a:p>
+            <a:pPr algn="ctr"/>
+          </a:p>
+        </p:txBody>
+      </p:sp>
+      <p:sp>
+        <p:nvSpPr>
+          <p:cNvPr id="28" name="Rectangle 27"/>
+          <p:cNvSpPr/>
+          <p:nvPr/>
+        </p:nvSpPr>
+        <p:spPr>
+          <a:xfrm>
+            <a:off x="6172200" y="3291840"/>
+            <a:ext cx="5577840" cy="6350"/>
           </a:xfrm>
           <a:prstGeom prst="rect">
             <a:avLst/>
@@ -19223,38 +21410,155 @@
       </p:sp>
       <p:sp>
         <p:nvSpPr>
-          <p:cNvPr id="19" name="TextBox 18"/>
-          <p:cNvSpPr txBox="1"/>
-          <p:nvPr/>
-        </p:nvSpPr>
-        <p:spPr>
-          <a:xfrm>
-            <a:off x="502920" y="5577840"/>
-            <a:ext cx="365760" cy="365760"/>
-          </a:xfrm>
-          <a:prstGeom prst="rect">
-            <a:avLst/>
-          </a:prstGeom>
-          <a:noFill/>
-        </p:spPr>
-        <p:txBody>
-          <a:bodyPr wrap="square" lIns="0" rIns="0" tIns="0" bIns="0" anchor="t">
-            <a:spAutoFit/>
-          </a:bodyPr>
-          <a:lstStyle/>
-          <a:p>
-            <a:pPr algn="l">
-              <a:lnSpc>
-                <a:spcPct val="115000"/>
-              </a:lnSpc>
-            </a:pPr>
-            <a:r>
-              <a:rPr sz="1800" b="0">
+          <p:cNvPr id="29" name="TextBox 28"/>
+          <p:cNvSpPr txBox="1"/>
+          <p:nvPr/>
+        </p:nvSpPr>
+        <p:spPr>
+          <a:xfrm>
+            <a:off x="6446520" y="3429000"/>
+            <a:ext cx="5029200" cy="365760"/>
+          </a:xfrm>
+          <a:prstGeom prst="rect">
+            <a:avLst/>
+          </a:prstGeom>
+          <a:noFill/>
+        </p:spPr>
+        <p:txBody>
+          <a:bodyPr wrap="square" lIns="0" rIns="0" tIns="0" bIns="0" anchor="t">
+            <a:spAutoFit/>
+          </a:bodyPr>
+          <a:lstStyle/>
+          <a:p>
+            <a:pPr algn="l">
+              <a:lnSpc>
+                <a:spcPct val="115000"/>
+              </a:lnSpc>
+            </a:pPr>
+            <a:r>
+              <a:rPr sz="1000" b="0" i="0" spc="300">
                 <a:solidFill>
                   <a:srgbClr val="6B6B6B"/>
                 </a:solidFill>
                 <a:latin typeface="Inter"/>
               </a:rPr>
+              <a:t>VS CLAUDE CODE</a:t>
+            </a:r>
+          </a:p>
+        </p:txBody>
+      </p:sp>
+      <p:sp>
+        <p:nvSpPr>
+          <p:cNvPr id="30" name="TextBox 29"/>
+          <p:cNvSpPr txBox="1"/>
+          <p:nvPr/>
+        </p:nvSpPr>
+        <p:spPr>
+          <a:xfrm>
+            <a:off x="6446520" y="3749039"/>
+            <a:ext cx="5029200" cy="457200"/>
+          </a:xfrm>
+          <a:prstGeom prst="rect">
+            <a:avLst/>
+          </a:prstGeom>
+          <a:noFill/>
+        </p:spPr>
+        <p:txBody>
+          <a:bodyPr wrap="square" lIns="0" rIns="0" tIns="0" bIns="0" anchor="t">
+            <a:spAutoFit/>
+          </a:bodyPr>
+          <a:lstStyle/>
+          <a:p>
+            <a:pPr algn="l">
+              <a:lnSpc>
+                <a:spcPct val="115000"/>
+              </a:lnSpc>
+            </a:pPr>
+            <a:r>
+              <a:rPr sz="1800" b="1" i="0">
+                <a:solidFill>
+                  <a:srgbClr val="F5F5F5"/>
+                </a:solidFill>
+                <a:latin typeface="Inter"/>
+              </a:rPr>
+              <a:t>Le compétiteur #1 en 2026</a:t>
+            </a:r>
+          </a:p>
+        </p:txBody>
+      </p:sp>
+      <p:sp>
+        <p:nvSpPr>
+          <p:cNvPr id="31" name="TextBox 30"/>
+          <p:cNvSpPr txBox="1"/>
+          <p:nvPr/>
+        </p:nvSpPr>
+        <p:spPr>
+          <a:xfrm>
+            <a:off x="6446520" y="4343400"/>
+            <a:ext cx="2194560" cy="365760"/>
+          </a:xfrm>
+          <a:prstGeom prst="rect">
+            <a:avLst/>
+          </a:prstGeom>
+          <a:noFill/>
+        </p:spPr>
+        <p:txBody>
+          <a:bodyPr wrap="square" lIns="0" rIns="0" tIns="0" bIns="0" anchor="t">
+            <a:spAutoFit/>
+          </a:bodyPr>
+          <a:lstStyle/>
+          <a:p>
+            <a:pPr algn="l">
+              <a:lnSpc>
+                <a:spcPct val="115000"/>
+              </a:lnSpc>
+            </a:pPr>
+            <a:r>
+              <a:rPr sz="1100" b="0" i="0">
+                <a:solidFill>
+                  <a:srgbClr val="A0A0A0"/>
+                </a:solidFill>
+                <a:latin typeface="Inter"/>
+              </a:rPr>
+              <a:t>Single-provider</a:t>
+            </a:r>
+          </a:p>
+        </p:txBody>
+      </p:sp>
+      <p:sp>
+        <p:nvSpPr>
+          <p:cNvPr id="32" name="TextBox 31"/>
+          <p:cNvSpPr txBox="1"/>
+          <p:nvPr/>
+        </p:nvSpPr>
+        <p:spPr>
+          <a:xfrm>
+            <a:off x="8595360" y="4343400"/>
+            <a:ext cx="274320" cy="365760"/>
+          </a:xfrm>
+          <a:prstGeom prst="rect">
+            <a:avLst/>
+          </a:prstGeom>
+          <a:noFill/>
+        </p:spPr>
+        <p:txBody>
+          <a:bodyPr wrap="square" lIns="0" rIns="0" tIns="0" bIns="0" anchor="t">
+            <a:spAutoFit/>
+          </a:bodyPr>
+          <a:lstStyle/>
+          <a:p>
+            <a:pPr algn="l">
+              <a:lnSpc>
+                <a:spcPct val="115000"/>
+              </a:lnSpc>
+            </a:pPr>
+            <a:r>
+              <a:rPr sz="1100" b="0" i="0">
+                <a:solidFill>
+                  <a:srgbClr val="6B6B6B"/>
+                </a:solidFill>
+                <a:latin typeface="Inter"/>
+              </a:rPr>
               <a:t>→</a:t>
             </a:r>
           </a:p>
@@ -19262,123 +21566,430 @@
       </p:sp>
       <p:sp>
         <p:nvSpPr>
-          <p:cNvPr id="20" name="TextBox 19"/>
-          <p:cNvSpPr txBox="1"/>
-          <p:nvPr/>
-        </p:nvSpPr>
-        <p:spPr>
-          <a:xfrm>
-            <a:off x="960120" y="5577840"/>
-            <a:ext cx="3657600" cy="365760"/>
-          </a:xfrm>
-          <a:prstGeom prst="rect">
-            <a:avLst/>
-          </a:prstGeom>
-          <a:noFill/>
-        </p:spPr>
-        <p:txBody>
-          <a:bodyPr wrap="square" lIns="0" rIns="0" tIns="0" bIns="0" anchor="t">
-            <a:spAutoFit/>
-          </a:bodyPr>
-          <a:lstStyle/>
-          <a:p>
-            <a:pPr algn="l">
-              <a:lnSpc>
-                <a:spcPct val="115000"/>
-              </a:lnSpc>
-            </a:pPr>
-            <a:r>
-              <a:rPr sz="1500" b="1">
+          <p:cNvPr id="33" name="TextBox 32"/>
+          <p:cNvSpPr txBox="1"/>
+          <p:nvPr/>
+        </p:nvSpPr>
+        <p:spPr>
+          <a:xfrm>
+            <a:off x="8915400" y="4343400"/>
+            <a:ext cx="2651760" cy="365760"/>
+          </a:xfrm>
+          <a:prstGeom prst="rect">
+            <a:avLst/>
+          </a:prstGeom>
+          <a:noFill/>
+        </p:spPr>
+        <p:txBody>
+          <a:bodyPr wrap="square" lIns="0" rIns="0" tIns="0" bIns="0" anchor="t">
+            <a:spAutoFit/>
+          </a:bodyPr>
+          <a:lstStyle/>
+          <a:p>
+            <a:pPr algn="l">
+              <a:lnSpc>
+                <a:spcPct val="115000"/>
+              </a:lnSpc>
+            </a:pPr>
+            <a:r>
+              <a:rPr sz="1100" b="1" i="0">
                 <a:solidFill>
                   <a:srgbClr val="F5F5F5"/>
                 </a:solidFill>
                 <a:latin typeface="Inter"/>
               </a:rPr>
-              <a:t>Coût du sur-place</a:t>
-            </a:r>
-          </a:p>
-        </p:txBody>
-      </p:sp>
-      <p:sp>
-        <p:nvSpPr>
-          <p:cNvPr id="21" name="TextBox 20"/>
-          <p:cNvSpPr txBox="1"/>
-          <p:nvPr/>
-        </p:nvSpPr>
-        <p:spPr>
-          <a:xfrm>
-            <a:off x="4754880" y="5577840"/>
-            <a:ext cx="6949440" cy="914400"/>
-          </a:xfrm>
-          <a:prstGeom prst="rect">
-            <a:avLst/>
-          </a:prstGeom>
-          <a:noFill/>
-        </p:spPr>
-        <p:txBody>
-          <a:bodyPr wrap="square" lIns="0" rIns="0" tIns="0" bIns="0" anchor="t">
-            <a:spAutoFit/>
-          </a:bodyPr>
-          <a:lstStyle/>
-          <a:p>
-            <a:pPr algn="l">
-              <a:lnSpc>
-                <a:spcPct val="145000"/>
-              </a:lnSpc>
-            </a:pPr>
-            <a:r>
-              <a:rPr sz="1250" b="0">
+              <a:t>Model neutrality</a:t>
+            </a:r>
+          </a:p>
+        </p:txBody>
+      </p:sp>
+      <p:sp>
+        <p:nvSpPr>
+          <p:cNvPr id="34" name="TextBox 33"/>
+          <p:cNvSpPr txBox="1"/>
+          <p:nvPr/>
+        </p:nvSpPr>
+        <p:spPr>
+          <a:xfrm>
+            <a:off x="6446520" y="4727448"/>
+            <a:ext cx="2194560" cy="365760"/>
+          </a:xfrm>
+          <a:prstGeom prst="rect">
+            <a:avLst/>
+          </a:prstGeom>
+          <a:noFill/>
+        </p:spPr>
+        <p:txBody>
+          <a:bodyPr wrap="square" lIns="0" rIns="0" tIns="0" bIns="0" anchor="t">
+            <a:spAutoFit/>
+          </a:bodyPr>
+          <a:lstStyle/>
+          <a:p>
+            <a:pPr algn="l">
+              <a:lnSpc>
+                <a:spcPct val="115000"/>
+              </a:lnSpc>
+            </a:pPr>
+            <a:r>
+              <a:rPr sz="1100" b="0" i="0">
                 <a:solidFill>
                   <a:srgbClr val="A0A0A0"/>
                 </a:solidFill>
                 <a:latin typeface="Inter"/>
               </a:rPr>
-              <a:t>Chaque mois passé sur un outil plafonné = patterns internes qui se figent autour de ses limites. Le switch devient plus cher, pas moins cher.</a:t>
-            </a:r>
-          </a:p>
-        </p:txBody>
-      </p:sp>
-      <p:sp>
-        <p:nvSpPr>
-          <p:cNvPr id="22" name="Rectangle 21"/>
-          <p:cNvSpPr/>
-          <p:nvPr/>
-        </p:nvSpPr>
-        <p:spPr>
-          <a:xfrm>
-            <a:off x="502920" y="6583680"/>
-            <a:ext cx="11201400" cy="6350"/>
-          </a:xfrm>
-          <a:prstGeom prst="rect">
-            <a:avLst/>
-          </a:prstGeom>
-          <a:solidFill>
-            <a:srgbClr val="2A2A2A"/>
-          </a:solidFill>
-          <a:ln>
-            <a:noFill/>
-          </a:ln>
-          <a:effectLst/>
-        </p:spPr>
-        <p:style>
-          <a:lnRef idx="1">
-            <a:schemeClr val="accent1"/>
-          </a:lnRef>
-          <a:fillRef idx="3">
-            <a:schemeClr val="accent1"/>
-          </a:fillRef>
-          <a:effectRef idx="2">
-            <a:schemeClr val="accent1"/>
-          </a:effectRef>
-          <a:fontRef idx="minor">
-            <a:schemeClr val="lt1"/>
-          </a:fontRef>
-        </p:style>
-        <p:txBody>
-          <a:bodyPr rtlCol="0" anchor="ctr"/>
-          <a:lstStyle/>
-          <a:p>
-            <a:pPr algn="ctr"/>
+              <a:t>Raw model wrapper</a:t>
+            </a:r>
+          </a:p>
+        </p:txBody>
+      </p:sp>
+      <p:sp>
+        <p:nvSpPr>
+          <p:cNvPr id="35" name="TextBox 34"/>
+          <p:cNvSpPr txBox="1"/>
+          <p:nvPr/>
+        </p:nvSpPr>
+        <p:spPr>
+          <a:xfrm>
+            <a:off x="8595360" y="4727448"/>
+            <a:ext cx="274320" cy="365760"/>
+          </a:xfrm>
+          <a:prstGeom prst="rect">
+            <a:avLst/>
+          </a:prstGeom>
+          <a:noFill/>
+        </p:spPr>
+        <p:txBody>
+          <a:bodyPr wrap="square" lIns="0" rIns="0" tIns="0" bIns="0" anchor="t">
+            <a:spAutoFit/>
+          </a:bodyPr>
+          <a:lstStyle/>
+          <a:p>
+            <a:pPr algn="l">
+              <a:lnSpc>
+                <a:spcPct val="115000"/>
+              </a:lnSpc>
+            </a:pPr>
+            <a:r>
+              <a:rPr sz="1100" b="0" i="0">
+                <a:solidFill>
+                  <a:srgbClr val="6B6B6B"/>
+                </a:solidFill>
+                <a:latin typeface="Inter"/>
+              </a:rPr>
+              <a:t>→</a:t>
+            </a:r>
+          </a:p>
+        </p:txBody>
+      </p:sp>
+      <p:sp>
+        <p:nvSpPr>
+          <p:cNvPr id="36" name="TextBox 35"/>
+          <p:cNvSpPr txBox="1"/>
+          <p:nvPr/>
+        </p:nvSpPr>
+        <p:spPr>
+          <a:xfrm>
+            <a:off x="8915400" y="4727448"/>
+            <a:ext cx="2651760" cy="365760"/>
+          </a:xfrm>
+          <a:prstGeom prst="rect">
+            <a:avLst/>
+          </a:prstGeom>
+          <a:noFill/>
+        </p:spPr>
+        <p:txBody>
+          <a:bodyPr wrap="square" lIns="0" rIns="0" tIns="0" bIns="0" anchor="t">
+            <a:spAutoFit/>
+          </a:bodyPr>
+          <a:lstStyle/>
+          <a:p>
+            <a:pPr algn="l">
+              <a:lnSpc>
+                <a:spcPct val="115000"/>
+              </a:lnSpc>
+            </a:pPr>
+            <a:r>
+              <a:rPr sz="1100" b="1" i="0">
+                <a:solidFill>
+                  <a:srgbClr val="F5F5F5"/>
+                </a:solidFill>
+                <a:latin typeface="Inter"/>
+              </a:rPr>
+              <a:t>Workflow integration</a:t>
+            </a:r>
+          </a:p>
+        </p:txBody>
+      </p:sp>
+      <p:sp>
+        <p:nvSpPr>
+          <p:cNvPr id="37" name="TextBox 36"/>
+          <p:cNvSpPr txBox="1"/>
+          <p:nvPr/>
+        </p:nvSpPr>
+        <p:spPr>
+          <a:xfrm>
+            <a:off x="6446520" y="5111496"/>
+            <a:ext cx="2194560" cy="365760"/>
+          </a:xfrm>
+          <a:prstGeom prst="rect">
+            <a:avLst/>
+          </a:prstGeom>
+          <a:noFill/>
+        </p:spPr>
+        <p:txBody>
+          <a:bodyPr wrap="square" lIns="0" rIns="0" tIns="0" bIns="0" anchor="t">
+            <a:spAutoFit/>
+          </a:bodyPr>
+          <a:lstStyle/>
+          <a:p>
+            <a:pPr algn="l">
+              <a:lnSpc>
+                <a:spcPct val="115000"/>
+              </a:lnSpc>
+            </a:pPr>
+            <a:r>
+              <a:rPr sz="1100" b="0" i="0">
+                <a:solidFill>
+                  <a:srgbClr val="A0A0A0"/>
+                </a:solidFill>
+                <a:latin typeface="Inter"/>
+              </a:rPr>
+              <a:t>Limited repo context</a:t>
+            </a:r>
+          </a:p>
+        </p:txBody>
+      </p:sp>
+      <p:sp>
+        <p:nvSpPr>
+          <p:cNvPr id="38" name="TextBox 37"/>
+          <p:cNvSpPr txBox="1"/>
+          <p:nvPr/>
+        </p:nvSpPr>
+        <p:spPr>
+          <a:xfrm>
+            <a:off x="8595360" y="5111496"/>
+            <a:ext cx="274320" cy="365760"/>
+          </a:xfrm>
+          <a:prstGeom prst="rect">
+            <a:avLst/>
+          </a:prstGeom>
+          <a:noFill/>
+        </p:spPr>
+        <p:txBody>
+          <a:bodyPr wrap="square" lIns="0" rIns="0" tIns="0" bIns="0" anchor="t">
+            <a:spAutoFit/>
+          </a:bodyPr>
+          <a:lstStyle/>
+          <a:p>
+            <a:pPr algn="l">
+              <a:lnSpc>
+                <a:spcPct val="115000"/>
+              </a:lnSpc>
+            </a:pPr>
+            <a:r>
+              <a:rPr sz="1100" b="0" i="0">
+                <a:solidFill>
+                  <a:srgbClr val="6B6B6B"/>
+                </a:solidFill>
+                <a:latin typeface="Inter"/>
+              </a:rPr>
+              <a:t>→</a:t>
+            </a:r>
+          </a:p>
+        </p:txBody>
+      </p:sp>
+      <p:sp>
+        <p:nvSpPr>
+          <p:cNvPr id="39" name="TextBox 38"/>
+          <p:cNvSpPr txBox="1"/>
+          <p:nvPr/>
+        </p:nvSpPr>
+        <p:spPr>
+          <a:xfrm>
+            <a:off x="8915400" y="5111496"/>
+            <a:ext cx="2651760" cy="365760"/>
+          </a:xfrm>
+          <a:prstGeom prst="rect">
+            <a:avLst/>
+          </a:prstGeom>
+          <a:noFill/>
+        </p:spPr>
+        <p:txBody>
+          <a:bodyPr wrap="square" lIns="0" rIns="0" tIns="0" bIns="0" anchor="t">
+            <a:spAutoFit/>
+          </a:bodyPr>
+          <a:lstStyle/>
+          <a:p>
+            <a:pPr algn="l">
+              <a:lnSpc>
+                <a:spcPct val="115000"/>
+              </a:lnSpc>
+            </a:pPr>
+            <a:r>
+              <a:rPr sz="1100" b="1" i="0">
+                <a:solidFill>
+                  <a:srgbClr val="F5F5F5"/>
+                </a:solidFill>
+                <a:latin typeface="Inter"/>
+              </a:rPr>
+              <a:t>Large codebase performance</a:t>
+            </a:r>
+          </a:p>
+        </p:txBody>
+      </p:sp>
+      <p:sp>
+        <p:nvSpPr>
+          <p:cNvPr id="40" name="TextBox 39"/>
+          <p:cNvSpPr txBox="1"/>
+          <p:nvPr/>
+        </p:nvSpPr>
+        <p:spPr>
+          <a:xfrm>
+            <a:off x="6446520" y="5495544"/>
+            <a:ext cx="2194560" cy="365760"/>
+          </a:xfrm>
+          <a:prstGeom prst="rect">
+            <a:avLst/>
+          </a:prstGeom>
+          <a:noFill/>
+        </p:spPr>
+        <p:txBody>
+          <a:bodyPr wrap="square" lIns="0" rIns="0" tIns="0" bIns="0" anchor="t">
+            <a:spAutoFit/>
+          </a:bodyPr>
+          <a:lstStyle/>
+          <a:p>
+            <a:pPr algn="l">
+              <a:lnSpc>
+                <a:spcPct val="115000"/>
+              </a:lnSpc>
+            </a:pPr>
+            <a:r>
+              <a:rPr sz="1100" b="0" i="0">
+                <a:solidFill>
+                  <a:srgbClr val="A0A0A0"/>
+                </a:solidFill>
+                <a:latin typeface="Inter"/>
+              </a:rPr>
+              <a:t>DIY setup</a:t>
+            </a:r>
+          </a:p>
+        </p:txBody>
+      </p:sp>
+      <p:sp>
+        <p:nvSpPr>
+          <p:cNvPr id="41" name="TextBox 40"/>
+          <p:cNvSpPr txBox="1"/>
+          <p:nvPr/>
+        </p:nvSpPr>
+        <p:spPr>
+          <a:xfrm>
+            <a:off x="8595360" y="5495544"/>
+            <a:ext cx="274320" cy="365760"/>
+          </a:xfrm>
+          <a:prstGeom prst="rect">
+            <a:avLst/>
+          </a:prstGeom>
+          <a:noFill/>
+        </p:spPr>
+        <p:txBody>
+          <a:bodyPr wrap="square" lIns="0" rIns="0" tIns="0" bIns="0" anchor="t">
+            <a:spAutoFit/>
+          </a:bodyPr>
+          <a:lstStyle/>
+          <a:p>
+            <a:pPr algn="l">
+              <a:lnSpc>
+                <a:spcPct val="115000"/>
+              </a:lnSpc>
+            </a:pPr>
+            <a:r>
+              <a:rPr sz="1100" b="0" i="0">
+                <a:solidFill>
+                  <a:srgbClr val="6B6B6B"/>
+                </a:solidFill>
+                <a:latin typeface="Inter"/>
+              </a:rPr>
+              <a:t>→</a:t>
+            </a:r>
+          </a:p>
+        </p:txBody>
+      </p:sp>
+      <p:sp>
+        <p:nvSpPr>
+          <p:cNvPr id="42" name="TextBox 41"/>
+          <p:cNvSpPr txBox="1"/>
+          <p:nvPr/>
+        </p:nvSpPr>
+        <p:spPr>
+          <a:xfrm>
+            <a:off x="8915400" y="5495544"/>
+            <a:ext cx="2651760" cy="365760"/>
+          </a:xfrm>
+          <a:prstGeom prst="rect">
+            <a:avLst/>
+          </a:prstGeom>
+          <a:noFill/>
+        </p:spPr>
+        <p:txBody>
+          <a:bodyPr wrap="square" lIns="0" rIns="0" tIns="0" bIns="0" anchor="t">
+            <a:spAutoFit/>
+          </a:bodyPr>
+          <a:lstStyle/>
+          <a:p>
+            <a:pPr algn="l">
+              <a:lnSpc>
+                <a:spcPct val="115000"/>
+              </a:lnSpc>
+            </a:pPr>
+            <a:r>
+              <a:rPr sz="1100" b="1" i="0">
+                <a:solidFill>
+                  <a:srgbClr val="F5F5F5"/>
+                </a:solidFill>
+                <a:latin typeface="Inter"/>
+              </a:rPr>
+              <a:t>Faster time to value</a:t>
+            </a:r>
+          </a:p>
+        </p:txBody>
+      </p:sp>
+      <p:sp>
+        <p:nvSpPr>
+          <p:cNvPr id="43" name="TextBox 42"/>
+          <p:cNvSpPr txBox="1"/>
+          <p:nvPr/>
+        </p:nvSpPr>
+        <p:spPr>
+          <a:xfrm>
+            <a:off x="502920" y="6446520"/>
+            <a:ext cx="10972800" cy="274320"/>
+          </a:xfrm>
+          <a:prstGeom prst="rect">
+            <a:avLst/>
+          </a:prstGeom>
+          <a:noFill/>
+        </p:spPr>
+        <p:txBody>
+          <a:bodyPr wrap="square" lIns="0" rIns="0" tIns="0" bIns="0" anchor="t">
+            <a:spAutoFit/>
+          </a:bodyPr>
+          <a:lstStyle/>
+          <a:p>
+            <a:pPr algn="l">
+              <a:lnSpc>
+                <a:spcPct val="115000"/>
+              </a:lnSpc>
+            </a:pPr>
+            <a:r>
+              <a:rPr sz="1050" b="0" i="1" spc="20">
+                <a:solidFill>
+                  <a:srgbClr val="E5E5E5"/>
+                </a:solidFill>
+                <a:latin typeface="Inter"/>
+              </a:rPr>
+              <a:t>L'edge n'est pas une intelligence exclusive — c'est l'intelligence appliquée plus efficacement aux workflows d'ingénierie réels.</a:t>
+            </a:r>
           </a:p>
         </p:txBody>
       </p:sp>
